--- a/GenAI/wk3_LLM_Prompting/1_LLM_Definition_Limitation.pptx
+++ b/GenAI/wk3_LLM_Prompting/1_LLM_Definition_Limitation.pptx
@@ -4,22 +4,19 @@
   <p:sldMasterIdLst>
     <p:sldMasterId id="2147483648" r:id="rId1"/>
   </p:sldMasterIdLst>
-  <p:notesMasterIdLst>
-    <p:notesMasterId r:id="rId11"/>
-  </p:notesMasterIdLst>
-  <p:handoutMasterIdLst>
-    <p:handoutMasterId r:id="rId12"/>
-  </p:handoutMasterIdLst>
   <p:sldIdLst>
-    <p:sldId id="276" r:id="rId2"/>
-    <p:sldId id="257" r:id="rId3"/>
-    <p:sldId id="283" r:id="rId4"/>
-    <p:sldId id="284" r:id="rId5"/>
-    <p:sldId id="285" r:id="rId6"/>
-    <p:sldId id="286" r:id="rId7"/>
-    <p:sldId id="287" r:id="rId8"/>
-    <p:sldId id="288" r:id="rId9"/>
-    <p:sldId id="289" r:id="rId10"/>
+    <p:sldId id="256" r:id="rId2"/>
+    <p:sldId id="290" r:id="rId3"/>
+    <p:sldId id="291" r:id="rId4"/>
+    <p:sldId id="299" r:id="rId5"/>
+    <p:sldId id="292" r:id="rId6"/>
+    <p:sldId id="300" r:id="rId7"/>
+    <p:sldId id="293" r:id="rId8"/>
+    <p:sldId id="294" r:id="rId9"/>
+    <p:sldId id="295" r:id="rId10"/>
+    <p:sldId id="296" r:id="rId11"/>
+    <p:sldId id="297" r:id="rId12"/>
+    <p:sldId id="298" r:id="rId13"/>
   </p:sldIdLst>
   <p:sldSz cx="12192000" cy="6858000"/>
   <p:notesSz cx="6858000" cy="9144000"/>
@@ -122,20 +119,20 @@
     <p:ext uri="{EFAFB233-063F-42B5-8137-9DF3F51BA10A}">
       <p15:sldGuideLst xmlns:p15="http://schemas.microsoft.com/office/powerpoint/2012/main"/>
     </p:ext>
-    <p:ext uri="{2D200454-40CA-4A62-9FC3-DE9A4176ACB9}">
-      <p15:notesGuideLst xmlns:p15="http://schemas.microsoft.com/office/powerpoint/2012/main"/>
-    </p:ext>
   </p:extLst>
 </p:presentation>
 </file>
 
-<file path=ppt/handoutMasters/handoutMaster1.xml><?xml version="1.0" encoding="utf-8"?>
-<p:handoutMaster xmlns:a="http://schemas.openxmlformats.org/drawingml/2006/main" xmlns:r="http://schemas.openxmlformats.org/officeDocument/2006/relationships" xmlns:p="http://schemas.openxmlformats.org/presentationml/2006/main">
-  <p:cSld>
+<file path=ppt/slideLayouts/slideLayout1.xml><?xml version="1.0" encoding="utf-8"?>
+<p:sldLayout xmlns:a="http://schemas.openxmlformats.org/drawingml/2006/main" xmlns:r="http://schemas.openxmlformats.org/officeDocument/2006/relationships" xmlns:p="http://schemas.openxmlformats.org/presentationml/2006/main" type="title" preserve="1">
+  <p:cSld name="Title Slide">
     <p:bg>
-      <p:bgRef idx="1001">
-        <a:schemeClr val="bg1"/>
-      </p:bgRef>
+      <p:bgPr>
+        <a:solidFill>
+          <a:schemeClr val="tx1"/>
+        </a:solidFill>
+        <a:effectLst/>
+      </p:bgPr>
     </p:bg>
     <p:spTree>
       <p:nvGrpSpPr>
@@ -153,543 +150,10 @@
       </p:grpSpPr>
       <p:sp>
         <p:nvSpPr>
-          <p:cNvPr id="2" name="Header Placeholder 1">
-            <a:extLst>
-              <a:ext uri="{FF2B5EF4-FFF2-40B4-BE49-F238E27FC236}">
-                <a16:creationId xmlns:a16="http://schemas.microsoft.com/office/drawing/2014/main" id="{1ACA3A45-07AA-881E-EBAC-FAE1FFF9B3BB}"/>
-              </a:ext>
-            </a:extLst>
-          </p:cNvPr>
-          <p:cNvSpPr>
-            <a:spLocks noGrp="1"/>
-          </p:cNvSpPr>
-          <p:nvPr>
-            <p:ph type="hdr" sz="quarter"/>
-          </p:nvPr>
-        </p:nvSpPr>
-        <p:spPr>
-          <a:xfrm>
-            <a:off x="0" y="0"/>
-            <a:ext cx="2971800" cy="458788"/>
-          </a:xfrm>
-          <a:prstGeom prst="rect">
-            <a:avLst/>
-          </a:prstGeom>
-        </p:spPr>
-        <p:txBody>
-          <a:bodyPr vert="horz" lIns="91440" tIns="45720" rIns="91440" bIns="45720" rtlCol="0"/>
-          <a:lstStyle>
-            <a:lvl1pPr algn="l">
-              <a:defRPr sz="1200"/>
-            </a:lvl1pPr>
-          </a:lstStyle>
-          <a:p>
-            <a:endParaRPr lang="en-US"/>
-          </a:p>
-        </p:txBody>
-      </p:sp>
-      <p:sp>
-        <p:nvSpPr>
-          <p:cNvPr id="3" name="Date Placeholder 2">
-            <a:extLst>
-              <a:ext uri="{FF2B5EF4-FFF2-40B4-BE49-F238E27FC236}">
-                <a16:creationId xmlns:a16="http://schemas.microsoft.com/office/drawing/2014/main" id="{B72C2385-62BD-1B9C-A617-554DDB21E0F4}"/>
-              </a:ext>
-            </a:extLst>
-          </p:cNvPr>
-          <p:cNvSpPr>
-            <a:spLocks noGrp="1"/>
-          </p:cNvSpPr>
-          <p:nvPr>
-            <p:ph type="dt" sz="quarter" idx="1"/>
-          </p:nvPr>
-        </p:nvSpPr>
-        <p:spPr>
-          <a:xfrm>
-            <a:off x="3884613" y="0"/>
-            <a:ext cx="2971800" cy="458788"/>
-          </a:xfrm>
-          <a:prstGeom prst="rect">
-            <a:avLst/>
-          </a:prstGeom>
-        </p:spPr>
-        <p:txBody>
-          <a:bodyPr vert="horz" lIns="91440" tIns="45720" rIns="91440" bIns="45720" rtlCol="0"/>
-          <a:lstStyle>
-            <a:lvl1pPr algn="r">
-              <a:defRPr sz="1200"/>
-            </a:lvl1pPr>
-          </a:lstStyle>
-          <a:p>
-            <a:fld id="{7BAEECA8-D063-486F-AE31-5020270C1449}" type="datetimeFigureOut">
-              <a:rPr lang="en-US" smtClean="0"/>
-              <a:t>9/24/2026</a:t>
-            </a:fld>
-            <a:endParaRPr lang="en-US"/>
-          </a:p>
-        </p:txBody>
-      </p:sp>
-      <p:sp>
-        <p:nvSpPr>
-          <p:cNvPr id="4" name="Footer Placeholder 3">
-            <a:extLst>
-              <a:ext uri="{FF2B5EF4-FFF2-40B4-BE49-F238E27FC236}">
-                <a16:creationId xmlns:a16="http://schemas.microsoft.com/office/drawing/2014/main" id="{C5328A6F-7933-1F9C-E9F6-B4A61026FBA4}"/>
-              </a:ext>
-            </a:extLst>
-          </p:cNvPr>
-          <p:cNvSpPr>
-            <a:spLocks noGrp="1"/>
-          </p:cNvSpPr>
-          <p:nvPr>
-            <p:ph type="ftr" sz="quarter" idx="2"/>
-          </p:nvPr>
-        </p:nvSpPr>
-        <p:spPr>
-          <a:xfrm>
-            <a:off x="0" y="8685213"/>
-            <a:ext cx="2971800" cy="458787"/>
-          </a:xfrm>
-          <a:prstGeom prst="rect">
-            <a:avLst/>
-          </a:prstGeom>
-        </p:spPr>
-        <p:txBody>
-          <a:bodyPr vert="horz" lIns="91440" tIns="45720" rIns="91440" bIns="45720" rtlCol="0" anchor="b"/>
-          <a:lstStyle>
-            <a:lvl1pPr algn="l">
-              <a:defRPr sz="1200"/>
-            </a:lvl1pPr>
-          </a:lstStyle>
-          <a:p>
-            <a:endParaRPr lang="en-US"/>
-          </a:p>
-        </p:txBody>
-      </p:sp>
-      <p:sp>
-        <p:nvSpPr>
-          <p:cNvPr id="5" name="Slide Number Placeholder 4">
-            <a:extLst>
-              <a:ext uri="{FF2B5EF4-FFF2-40B4-BE49-F238E27FC236}">
-                <a16:creationId xmlns:a16="http://schemas.microsoft.com/office/drawing/2014/main" id="{66F9A57F-3A38-6EDA-B76D-A3DB4F6978A7}"/>
-              </a:ext>
-            </a:extLst>
-          </p:cNvPr>
-          <p:cNvSpPr>
-            <a:spLocks noGrp="1"/>
-          </p:cNvSpPr>
-          <p:nvPr>
-            <p:ph type="sldNum" sz="quarter" idx="3"/>
-          </p:nvPr>
-        </p:nvSpPr>
-        <p:spPr>
-          <a:xfrm>
-            <a:off x="3884613" y="8685213"/>
-            <a:ext cx="2971800" cy="458787"/>
-          </a:xfrm>
-          <a:prstGeom prst="rect">
-            <a:avLst/>
-          </a:prstGeom>
-        </p:spPr>
-        <p:txBody>
-          <a:bodyPr vert="horz" lIns="91440" tIns="45720" rIns="91440" bIns="45720" rtlCol="0" anchor="b"/>
-          <a:lstStyle>
-            <a:lvl1pPr algn="r">
-              <a:defRPr sz="1200"/>
-            </a:lvl1pPr>
-          </a:lstStyle>
-          <a:p>
-            <a:fld id="{5793F6CE-D1D9-4B7B-9040-C7CAC074A6CE}" type="slidenum">
-              <a:rPr lang="en-US" smtClean="0"/>
-              <a:t>‹#›</a:t>
-            </a:fld>
-            <a:endParaRPr lang="en-US"/>
-          </a:p>
-        </p:txBody>
-      </p:sp>
-    </p:spTree>
-    <p:extLst>
-      <p:ext uri="{BB962C8B-B14F-4D97-AF65-F5344CB8AC3E}">
-        <p14:creationId xmlns:p14="http://schemas.microsoft.com/office/powerpoint/2010/main" val="397613359"/>
-      </p:ext>
-    </p:extLst>
-  </p:cSld>
-  <p:clrMap bg1="lt1" tx1="dk1" bg2="lt2" tx2="dk2" accent1="accent1" accent2="accent2" accent3="accent3" accent4="accent4" accent5="accent5" accent6="accent6" hlink="hlink" folHlink="folHlink"/>
-</p:handoutMaster>
-</file>
-
-<file path=ppt/notesMasters/notesMaster1.xml><?xml version="1.0" encoding="utf-8"?>
-<p:notesMaster xmlns:a="http://schemas.openxmlformats.org/drawingml/2006/main" xmlns:r="http://schemas.openxmlformats.org/officeDocument/2006/relationships" xmlns:p="http://schemas.openxmlformats.org/presentationml/2006/main">
-  <p:cSld>
-    <p:bg>
-      <p:bgRef idx="1001">
-        <a:schemeClr val="bg1"/>
-      </p:bgRef>
-    </p:bg>
-    <p:spTree>
-      <p:nvGrpSpPr>
-        <p:cNvPr id="1" name=""/>
-        <p:cNvGrpSpPr/>
-        <p:nvPr/>
-      </p:nvGrpSpPr>
-      <p:grpSpPr>
-        <a:xfrm>
-          <a:off x="0" y="0"/>
-          <a:ext cx="0" cy="0"/>
-          <a:chOff x="0" y="0"/>
-          <a:chExt cx="0" cy="0"/>
-        </a:xfrm>
-      </p:grpSpPr>
-      <p:sp>
-        <p:nvSpPr>
-          <p:cNvPr id="2" name="Header Placeholder 1"/>
-          <p:cNvSpPr>
-            <a:spLocks noGrp="1"/>
-          </p:cNvSpPr>
-          <p:nvPr>
-            <p:ph type="hdr" sz="quarter"/>
-          </p:nvPr>
-        </p:nvSpPr>
-        <p:spPr>
-          <a:xfrm>
-            <a:off x="0" y="0"/>
-            <a:ext cx="2971800" cy="458788"/>
-          </a:xfrm>
-          <a:prstGeom prst="rect">
-            <a:avLst/>
-          </a:prstGeom>
-        </p:spPr>
-        <p:txBody>
-          <a:bodyPr vert="horz" lIns="91440" tIns="45720" rIns="91440" bIns="45720" rtlCol="0"/>
-          <a:lstStyle>
-            <a:lvl1pPr algn="l">
-              <a:defRPr sz="1200"/>
-            </a:lvl1pPr>
-          </a:lstStyle>
-          <a:p>
-            <a:endParaRPr lang="en-US"/>
-          </a:p>
-        </p:txBody>
-      </p:sp>
-      <p:sp>
-        <p:nvSpPr>
-          <p:cNvPr id="3" name="Date Placeholder 2"/>
-          <p:cNvSpPr>
-            <a:spLocks noGrp="1"/>
-          </p:cNvSpPr>
-          <p:nvPr>
-            <p:ph type="dt" idx="1"/>
-          </p:nvPr>
-        </p:nvSpPr>
-        <p:spPr>
-          <a:xfrm>
-            <a:off x="3884613" y="0"/>
-            <a:ext cx="2971800" cy="458788"/>
-          </a:xfrm>
-          <a:prstGeom prst="rect">
-            <a:avLst/>
-          </a:prstGeom>
-        </p:spPr>
-        <p:txBody>
-          <a:bodyPr vert="horz" lIns="91440" tIns="45720" rIns="91440" bIns="45720" rtlCol="0"/>
-          <a:lstStyle>
-            <a:lvl1pPr algn="r">
-              <a:defRPr sz="1200"/>
-            </a:lvl1pPr>
-          </a:lstStyle>
-          <a:p>
-            <a:fld id="{CB233BD1-3BA8-448D-9D08-7846095EA517}" type="datetimeFigureOut">
-              <a:rPr lang="en-US" smtClean="0"/>
-              <a:t>9/24/2026</a:t>
-            </a:fld>
-            <a:endParaRPr lang="en-US"/>
-          </a:p>
-        </p:txBody>
-      </p:sp>
-      <p:sp>
-        <p:nvSpPr>
-          <p:cNvPr id="4" name="Slide Image Placeholder 3"/>
-          <p:cNvSpPr>
-            <a:spLocks noGrp="1" noRot="1" noChangeAspect="1"/>
-          </p:cNvSpPr>
-          <p:nvPr>
-            <p:ph type="sldImg" idx="2"/>
-          </p:nvPr>
-        </p:nvSpPr>
-        <p:spPr>
-          <a:xfrm>
-            <a:off x="685800" y="1143000"/>
-            <a:ext cx="5486400" cy="3086100"/>
-          </a:xfrm>
-          <a:prstGeom prst="rect">
-            <a:avLst/>
-          </a:prstGeom>
-          <a:noFill/>
-          <a:ln w="12700">
-            <a:solidFill>
-              <a:prstClr val="black"/>
-            </a:solidFill>
-          </a:ln>
-        </p:spPr>
-        <p:txBody>
-          <a:bodyPr vert="horz" lIns="91440" tIns="45720" rIns="91440" bIns="45720" rtlCol="0" anchor="ctr"/>
-          <a:lstStyle/>
-          <a:p>
-            <a:endParaRPr lang="en-US"/>
-          </a:p>
-        </p:txBody>
-      </p:sp>
-      <p:sp>
-        <p:nvSpPr>
-          <p:cNvPr id="5" name="Notes Placeholder 4"/>
-          <p:cNvSpPr>
-            <a:spLocks noGrp="1"/>
-          </p:cNvSpPr>
-          <p:nvPr>
-            <p:ph type="body" sz="quarter" idx="3"/>
-          </p:nvPr>
-        </p:nvSpPr>
-        <p:spPr>
-          <a:xfrm>
-            <a:off x="685800" y="4400550"/>
-            <a:ext cx="5486400" cy="3600450"/>
-          </a:xfrm>
-          <a:prstGeom prst="rect">
-            <a:avLst/>
-          </a:prstGeom>
-        </p:spPr>
-        <p:txBody>
-          <a:bodyPr vert="horz" lIns="91440" tIns="45720" rIns="91440" bIns="45720" rtlCol="0"/>
-          <a:lstStyle/>
-          <a:p>
-            <a:pPr lvl="0"/>
-            <a:r>
-              <a:rPr lang="en-US"/>
-              <a:t>Click to edit Master text styles</a:t>
-            </a:r>
-          </a:p>
-          <a:p>
-            <a:pPr lvl="1"/>
-            <a:r>
-              <a:rPr lang="en-US"/>
-              <a:t>Second level</a:t>
-            </a:r>
-          </a:p>
-          <a:p>
-            <a:pPr lvl="2"/>
-            <a:r>
-              <a:rPr lang="en-US"/>
-              <a:t>Third level</a:t>
-            </a:r>
-          </a:p>
-          <a:p>
-            <a:pPr lvl="3"/>
-            <a:r>
-              <a:rPr lang="en-US"/>
-              <a:t>Fourth level</a:t>
-            </a:r>
-          </a:p>
-          <a:p>
-            <a:pPr lvl="4"/>
-            <a:r>
-              <a:rPr lang="en-US"/>
-              <a:t>Fifth level</a:t>
-            </a:r>
-          </a:p>
-        </p:txBody>
-      </p:sp>
-      <p:sp>
-        <p:nvSpPr>
-          <p:cNvPr id="6" name="Footer Placeholder 5"/>
-          <p:cNvSpPr>
-            <a:spLocks noGrp="1"/>
-          </p:cNvSpPr>
-          <p:nvPr>
-            <p:ph type="ftr" sz="quarter" idx="4"/>
-          </p:nvPr>
-        </p:nvSpPr>
-        <p:spPr>
-          <a:xfrm>
-            <a:off x="0" y="8685213"/>
-            <a:ext cx="2971800" cy="458787"/>
-          </a:xfrm>
-          <a:prstGeom prst="rect">
-            <a:avLst/>
-          </a:prstGeom>
-        </p:spPr>
-        <p:txBody>
-          <a:bodyPr vert="horz" lIns="91440" tIns="45720" rIns="91440" bIns="45720" rtlCol="0" anchor="b"/>
-          <a:lstStyle>
-            <a:lvl1pPr algn="l">
-              <a:defRPr sz="1200"/>
-            </a:lvl1pPr>
-          </a:lstStyle>
-          <a:p>
-            <a:endParaRPr lang="en-US"/>
-          </a:p>
-        </p:txBody>
-      </p:sp>
-      <p:sp>
-        <p:nvSpPr>
-          <p:cNvPr id="7" name="Slide Number Placeholder 6"/>
-          <p:cNvSpPr>
-            <a:spLocks noGrp="1"/>
-          </p:cNvSpPr>
-          <p:nvPr>
-            <p:ph type="sldNum" sz="quarter" idx="5"/>
-          </p:nvPr>
-        </p:nvSpPr>
-        <p:spPr>
-          <a:xfrm>
-            <a:off x="3884613" y="8685213"/>
-            <a:ext cx="2971800" cy="458787"/>
-          </a:xfrm>
-          <a:prstGeom prst="rect">
-            <a:avLst/>
-          </a:prstGeom>
-        </p:spPr>
-        <p:txBody>
-          <a:bodyPr vert="horz" lIns="91440" tIns="45720" rIns="91440" bIns="45720" rtlCol="0" anchor="b"/>
-          <a:lstStyle>
-            <a:lvl1pPr algn="r">
-              <a:defRPr sz="1200"/>
-            </a:lvl1pPr>
-          </a:lstStyle>
-          <a:p>
-            <a:fld id="{6C63499C-1FAC-4F66-96F8-6DA2CC28B748}" type="slidenum">
-              <a:rPr lang="en-US" smtClean="0"/>
-              <a:t>‹#›</a:t>
-            </a:fld>
-            <a:endParaRPr lang="en-US"/>
-          </a:p>
-        </p:txBody>
-      </p:sp>
-    </p:spTree>
-    <p:extLst>
-      <p:ext uri="{BB962C8B-B14F-4D97-AF65-F5344CB8AC3E}">
-        <p14:creationId xmlns:p14="http://schemas.microsoft.com/office/powerpoint/2010/main" val="817539779"/>
-      </p:ext>
-    </p:extLst>
-  </p:cSld>
-  <p:clrMap bg1="lt1" tx1="dk1" bg2="lt2" tx2="dk2" accent1="accent1" accent2="accent2" accent3="accent3" accent4="accent4" accent5="accent5" accent6="accent6" hlink="hlink" folHlink="folHlink"/>
-  <p:notesStyle>
-    <a:lvl1pPr marL="0" algn="l" defTabSz="914400" rtl="0" eaLnBrk="1" latinLnBrk="0" hangingPunct="1">
-      <a:defRPr sz="1200" kern="1200">
-        <a:solidFill>
-          <a:schemeClr val="tx1"/>
-        </a:solidFill>
-        <a:latin typeface="+mn-lt"/>
-        <a:ea typeface="+mn-ea"/>
-        <a:cs typeface="+mn-cs"/>
-      </a:defRPr>
-    </a:lvl1pPr>
-    <a:lvl2pPr marL="457200" algn="l" defTabSz="914400" rtl="0" eaLnBrk="1" latinLnBrk="0" hangingPunct="1">
-      <a:defRPr sz="1200" kern="1200">
-        <a:solidFill>
-          <a:schemeClr val="tx1"/>
-        </a:solidFill>
-        <a:latin typeface="+mn-lt"/>
-        <a:ea typeface="+mn-ea"/>
-        <a:cs typeface="+mn-cs"/>
-      </a:defRPr>
-    </a:lvl2pPr>
-    <a:lvl3pPr marL="914400" algn="l" defTabSz="914400" rtl="0" eaLnBrk="1" latinLnBrk="0" hangingPunct="1">
-      <a:defRPr sz="1200" kern="1200">
-        <a:solidFill>
-          <a:schemeClr val="tx1"/>
-        </a:solidFill>
-        <a:latin typeface="+mn-lt"/>
-        <a:ea typeface="+mn-ea"/>
-        <a:cs typeface="+mn-cs"/>
-      </a:defRPr>
-    </a:lvl3pPr>
-    <a:lvl4pPr marL="1371600" algn="l" defTabSz="914400" rtl="0" eaLnBrk="1" latinLnBrk="0" hangingPunct="1">
-      <a:defRPr sz="1200" kern="1200">
-        <a:solidFill>
-          <a:schemeClr val="tx1"/>
-        </a:solidFill>
-        <a:latin typeface="+mn-lt"/>
-        <a:ea typeface="+mn-ea"/>
-        <a:cs typeface="+mn-cs"/>
-      </a:defRPr>
-    </a:lvl4pPr>
-    <a:lvl5pPr marL="1828800" algn="l" defTabSz="914400" rtl="0" eaLnBrk="1" latinLnBrk="0" hangingPunct="1">
-      <a:defRPr sz="1200" kern="1200">
-        <a:solidFill>
-          <a:schemeClr val="tx1"/>
-        </a:solidFill>
-        <a:latin typeface="+mn-lt"/>
-        <a:ea typeface="+mn-ea"/>
-        <a:cs typeface="+mn-cs"/>
-      </a:defRPr>
-    </a:lvl5pPr>
-    <a:lvl6pPr marL="2286000" algn="l" defTabSz="914400" rtl="0" eaLnBrk="1" latinLnBrk="0" hangingPunct="1">
-      <a:defRPr sz="1200" kern="1200">
-        <a:solidFill>
-          <a:schemeClr val="tx1"/>
-        </a:solidFill>
-        <a:latin typeface="+mn-lt"/>
-        <a:ea typeface="+mn-ea"/>
-        <a:cs typeface="+mn-cs"/>
-      </a:defRPr>
-    </a:lvl6pPr>
-    <a:lvl7pPr marL="2743200" algn="l" defTabSz="914400" rtl="0" eaLnBrk="1" latinLnBrk="0" hangingPunct="1">
-      <a:defRPr sz="1200" kern="1200">
-        <a:solidFill>
-          <a:schemeClr val="tx1"/>
-        </a:solidFill>
-        <a:latin typeface="+mn-lt"/>
-        <a:ea typeface="+mn-ea"/>
-        <a:cs typeface="+mn-cs"/>
-      </a:defRPr>
-    </a:lvl7pPr>
-    <a:lvl8pPr marL="3200400" algn="l" defTabSz="914400" rtl="0" eaLnBrk="1" latinLnBrk="0" hangingPunct="1">
-      <a:defRPr sz="1200" kern="1200">
-        <a:solidFill>
-          <a:schemeClr val="tx1"/>
-        </a:solidFill>
-        <a:latin typeface="+mn-lt"/>
-        <a:ea typeface="+mn-ea"/>
-        <a:cs typeface="+mn-cs"/>
-      </a:defRPr>
-    </a:lvl8pPr>
-    <a:lvl9pPr marL="3657600" algn="l" defTabSz="914400" rtl="0" eaLnBrk="1" latinLnBrk="0" hangingPunct="1">
-      <a:defRPr sz="1200" kern="1200">
-        <a:solidFill>
-          <a:schemeClr val="tx1"/>
-        </a:solidFill>
-        <a:latin typeface="+mn-lt"/>
-        <a:ea typeface="+mn-ea"/>
-        <a:cs typeface="+mn-cs"/>
-      </a:defRPr>
-    </a:lvl9pPr>
-  </p:notesStyle>
-</p:notesMaster>
-</file>
-
-<file path=ppt/slideLayouts/slideLayout1.xml><?xml version="1.0" encoding="utf-8"?>
-<p:sldLayout xmlns:a="http://schemas.openxmlformats.org/drawingml/2006/main" xmlns:r="http://schemas.openxmlformats.org/officeDocument/2006/relationships" xmlns:p="http://schemas.openxmlformats.org/presentationml/2006/main" type="title" preserve="1">
-  <p:cSld name="Title Slide">
-    <p:spTree>
-      <p:nvGrpSpPr>
-        <p:cNvPr id="1" name=""/>
-        <p:cNvGrpSpPr/>
-        <p:nvPr/>
-      </p:nvGrpSpPr>
-      <p:grpSpPr>
-        <a:xfrm>
-          <a:off x="0" y="0"/>
-          <a:ext cx="0" cy="0"/>
-          <a:chOff x="0" y="0"/>
-          <a:chExt cx="0" cy="0"/>
-        </a:xfrm>
-      </p:grpSpPr>
-      <p:sp>
-        <p:nvSpPr>
           <p:cNvPr id="2" name="Title 1">
             <a:extLst>
               <a:ext uri="{FF2B5EF4-FFF2-40B4-BE49-F238E27FC236}">
-                <a16:creationId xmlns:a16="http://schemas.microsoft.com/office/drawing/2014/main" id="{65EB0F26-247A-F2E0-8FBA-6EA7974D69E5}"/>
+                <a16:creationId xmlns:a16="http://schemas.microsoft.com/office/drawing/2014/main" id="{2C8A318F-F6FC-6CB9-CEC6-8B2C0F5EE227}"/>
               </a:ext>
             </a:extLst>
           </p:cNvPr>
@@ -718,6 +182,7 @@
               <a:rPr lang="en-US"/>
               <a:t>Click to edit Master title style</a:t>
             </a:r>
+            <a:endParaRPr lang="en-IN"/>
           </a:p>
         </p:txBody>
       </p:sp>
@@ -726,7 +191,7 @@
           <p:cNvPr id="3" name="Subtitle 2">
             <a:extLst>
               <a:ext uri="{FF2B5EF4-FFF2-40B4-BE49-F238E27FC236}">
-                <a16:creationId xmlns:a16="http://schemas.microsoft.com/office/drawing/2014/main" id="{F394F308-CEE8-92BC-D91A-4212DEA015D6}"/>
+                <a16:creationId xmlns:a16="http://schemas.microsoft.com/office/drawing/2014/main" id="{E7F8D7EB-E762-144D-1496-74683313656C}"/>
               </a:ext>
             </a:extLst>
           </p:cNvPr>
@@ -788,6 +253,7 @@
               <a:rPr lang="en-US"/>
               <a:t>Click to edit Master subtitle style</a:t>
             </a:r>
+            <a:endParaRPr lang="en-IN"/>
           </a:p>
         </p:txBody>
       </p:sp>
@@ -796,7 +262,7 @@
           <p:cNvPr id="4" name="Date Placeholder 3">
             <a:extLst>
               <a:ext uri="{FF2B5EF4-FFF2-40B4-BE49-F238E27FC236}">
-                <a16:creationId xmlns:a16="http://schemas.microsoft.com/office/drawing/2014/main" id="{B32794D3-11DF-A675-8D28-EC65EF27521E}"/>
+                <a16:creationId xmlns:a16="http://schemas.microsoft.com/office/drawing/2014/main" id="{B7756C53-114C-E36A-EC7E-AEE4C2084ABF}"/>
               </a:ext>
             </a:extLst>
           </p:cNvPr>
@@ -812,11 +278,11 @@
           <a:bodyPr/>
           <a:lstStyle/>
           <a:p>
-            <a:fld id="{6383FAE1-13DE-4511-8C1B-C8AFB720664C}" type="datetimeFigureOut">
-              <a:rPr lang="en-US" smtClean="0"/>
-              <a:t>9/24/2026</a:t>
+            <a:fld id="{6EBA79C2-4FE3-4D0C-AFFB-D4FCE050D5EA}" type="datetimeFigureOut">
+              <a:rPr lang="en-IN" smtClean="0"/>
+              <a:t>26-09-2026</a:t>
             </a:fld>
-            <a:endParaRPr lang="en-US"/>
+            <a:endParaRPr lang="en-IN"/>
           </a:p>
         </p:txBody>
       </p:sp>
@@ -825,7 +291,7 @@
           <p:cNvPr id="5" name="Footer Placeholder 4">
             <a:extLst>
               <a:ext uri="{FF2B5EF4-FFF2-40B4-BE49-F238E27FC236}">
-                <a16:creationId xmlns:a16="http://schemas.microsoft.com/office/drawing/2014/main" id="{EC53FDAF-B83A-AE0A-B811-B7195D37FDD4}"/>
+                <a16:creationId xmlns:a16="http://schemas.microsoft.com/office/drawing/2014/main" id="{D76CC798-66E8-807B-3021-DC717C7ABB7D}"/>
               </a:ext>
             </a:extLst>
           </p:cNvPr>
@@ -841,7 +307,7 @@
           <a:bodyPr/>
           <a:lstStyle/>
           <a:p>
-            <a:endParaRPr lang="en-US"/>
+            <a:endParaRPr lang="en-IN"/>
           </a:p>
         </p:txBody>
       </p:sp>
@@ -850,7 +316,7 @@
           <p:cNvPr id="6" name="Slide Number Placeholder 5">
             <a:extLst>
               <a:ext uri="{FF2B5EF4-FFF2-40B4-BE49-F238E27FC236}">
-                <a16:creationId xmlns:a16="http://schemas.microsoft.com/office/drawing/2014/main" id="{149530BD-9515-D107-426C-B72742CBF0BF}"/>
+                <a16:creationId xmlns:a16="http://schemas.microsoft.com/office/drawing/2014/main" id="{8FAA2714-B223-D201-168E-C22AD16013D1}"/>
               </a:ext>
             </a:extLst>
           </p:cNvPr>
@@ -866,18 +332,55 @@
           <a:bodyPr/>
           <a:lstStyle/>
           <a:p>
-            <a:fld id="{81BC7A09-79EE-44A0-8F92-750D7C83D871}" type="slidenum">
-              <a:rPr lang="en-US" smtClean="0"/>
+            <a:fld id="{023A53CF-6AA3-4EF6-9F05-A0E3059C583D}" type="slidenum">
+              <a:rPr lang="en-IN" smtClean="0"/>
               <a:t>‹#›</a:t>
             </a:fld>
-            <a:endParaRPr lang="en-US"/>
-          </a:p>
-        </p:txBody>
-      </p:sp>
+            <a:endParaRPr lang="en-IN"/>
+          </a:p>
+        </p:txBody>
+      </p:sp>
+      <p:pic>
+        <p:nvPicPr>
+          <p:cNvPr id="8" name="Picture 7">
+            <a:extLst>
+              <a:ext uri="{FF2B5EF4-FFF2-40B4-BE49-F238E27FC236}">
+                <a16:creationId xmlns:a16="http://schemas.microsoft.com/office/drawing/2014/main" id="{B14F047B-8F92-089C-65A3-54359B3F76C4}"/>
+              </a:ext>
+            </a:extLst>
+          </p:cNvPr>
+          <p:cNvPicPr>
+            <a:picLocks noChangeAspect="1"/>
+          </p:cNvPicPr>
+          <p:nvPr userDrawn="1"/>
+        </p:nvPicPr>
+        <p:blipFill>
+          <a:blip r:embed="rId2">
+            <a:alphaModFix amt="68000"/>
+            <a:extLst>
+              <a:ext uri="{28A0092B-C50C-407E-A947-70E740481C1C}">
+                <a14:useLocalDpi xmlns:a14="http://schemas.microsoft.com/office/drawing/2010/main" val="0"/>
+              </a:ext>
+            </a:extLst>
+          </a:blip>
+          <a:stretch>
+            <a:fillRect/>
+          </a:stretch>
+        </p:blipFill>
+        <p:spPr>
+          <a:xfrm>
+            <a:off x="10823275" y="63142"/>
+            <a:ext cx="1295581" cy="924054"/>
+          </a:xfrm>
+          <a:prstGeom prst="rect">
+            <a:avLst/>
+          </a:prstGeom>
+        </p:spPr>
+      </p:pic>
     </p:spTree>
     <p:extLst>
       <p:ext uri="{BB962C8B-B14F-4D97-AF65-F5344CB8AC3E}">
-        <p14:creationId xmlns:p14="http://schemas.microsoft.com/office/powerpoint/2010/main" val="1449282697"/>
+        <p14:creationId xmlns:p14="http://schemas.microsoft.com/office/powerpoint/2010/main" val="480681030"/>
       </p:ext>
     </p:extLst>
   </p:cSld>
@@ -909,7 +412,7 @@
           <p:cNvPr id="2" name="Title 1">
             <a:extLst>
               <a:ext uri="{FF2B5EF4-FFF2-40B4-BE49-F238E27FC236}">
-                <a16:creationId xmlns:a16="http://schemas.microsoft.com/office/drawing/2014/main" id="{A8B3002A-A21A-4F99-1BCE-F61C85D7B652}"/>
+                <a16:creationId xmlns:a16="http://schemas.microsoft.com/office/drawing/2014/main" id="{1C53211F-A80A-9BAC-AAEC-067CCDA5C0CB}"/>
               </a:ext>
             </a:extLst>
           </p:cNvPr>
@@ -929,6 +432,7 @@
               <a:rPr lang="en-US"/>
               <a:t>Click to edit Master title style</a:t>
             </a:r>
+            <a:endParaRPr lang="en-IN"/>
           </a:p>
         </p:txBody>
       </p:sp>
@@ -937,7 +441,7 @@
           <p:cNvPr id="3" name="Vertical Text Placeholder 2">
             <a:extLst>
               <a:ext uri="{FF2B5EF4-FFF2-40B4-BE49-F238E27FC236}">
-                <a16:creationId xmlns:a16="http://schemas.microsoft.com/office/drawing/2014/main" id="{50E85D03-9A7F-4A9E-379E-2DEA86D21FC4}"/>
+                <a16:creationId xmlns:a16="http://schemas.microsoft.com/office/drawing/2014/main" id="{538AD45D-5A88-1664-D692-069F5C5D1AC8}"/>
               </a:ext>
             </a:extLst>
           </p:cNvPr>
@@ -986,6 +490,7 @@
               <a:rPr lang="en-US"/>
               <a:t>Fifth level</a:t>
             </a:r>
+            <a:endParaRPr lang="en-IN"/>
           </a:p>
         </p:txBody>
       </p:sp>
@@ -994,7 +499,7 @@
           <p:cNvPr id="4" name="Date Placeholder 3">
             <a:extLst>
               <a:ext uri="{FF2B5EF4-FFF2-40B4-BE49-F238E27FC236}">
-                <a16:creationId xmlns:a16="http://schemas.microsoft.com/office/drawing/2014/main" id="{DFDEEFB4-95FB-FEDD-75E7-143E7ED29C8A}"/>
+                <a16:creationId xmlns:a16="http://schemas.microsoft.com/office/drawing/2014/main" id="{6B32EEB4-BA21-8613-2094-72EEFB7929B4}"/>
               </a:ext>
             </a:extLst>
           </p:cNvPr>
@@ -1010,11 +515,11 @@
           <a:bodyPr/>
           <a:lstStyle/>
           <a:p>
-            <a:fld id="{6383FAE1-13DE-4511-8C1B-C8AFB720664C}" type="datetimeFigureOut">
-              <a:rPr lang="en-US" smtClean="0"/>
-              <a:t>9/24/2026</a:t>
+            <a:fld id="{6EBA79C2-4FE3-4D0C-AFFB-D4FCE050D5EA}" type="datetimeFigureOut">
+              <a:rPr lang="en-IN" smtClean="0"/>
+              <a:t>26-09-2026</a:t>
             </a:fld>
-            <a:endParaRPr lang="en-US"/>
+            <a:endParaRPr lang="en-IN"/>
           </a:p>
         </p:txBody>
       </p:sp>
@@ -1023,7 +528,7 @@
           <p:cNvPr id="5" name="Footer Placeholder 4">
             <a:extLst>
               <a:ext uri="{FF2B5EF4-FFF2-40B4-BE49-F238E27FC236}">
-                <a16:creationId xmlns:a16="http://schemas.microsoft.com/office/drawing/2014/main" id="{F1BCE0D7-1712-FF0C-D965-BFD5AE1610F2}"/>
+                <a16:creationId xmlns:a16="http://schemas.microsoft.com/office/drawing/2014/main" id="{A9ECE1A2-6F93-B3CC-3837-CD60E48CFFC9}"/>
               </a:ext>
             </a:extLst>
           </p:cNvPr>
@@ -1039,7 +544,7 @@
           <a:bodyPr/>
           <a:lstStyle/>
           <a:p>
-            <a:endParaRPr lang="en-US"/>
+            <a:endParaRPr lang="en-IN"/>
           </a:p>
         </p:txBody>
       </p:sp>
@@ -1048,7 +553,7 @@
           <p:cNvPr id="6" name="Slide Number Placeholder 5">
             <a:extLst>
               <a:ext uri="{FF2B5EF4-FFF2-40B4-BE49-F238E27FC236}">
-                <a16:creationId xmlns:a16="http://schemas.microsoft.com/office/drawing/2014/main" id="{932632A1-4243-F65B-A2B0-3F2142C3415D}"/>
+                <a16:creationId xmlns:a16="http://schemas.microsoft.com/office/drawing/2014/main" id="{3BE5D015-61E2-E514-FC97-B282920D9867}"/>
               </a:ext>
             </a:extLst>
           </p:cNvPr>
@@ -1064,18 +569,18 @@
           <a:bodyPr/>
           <a:lstStyle/>
           <a:p>
-            <a:fld id="{81BC7A09-79EE-44A0-8F92-750D7C83D871}" type="slidenum">
-              <a:rPr lang="en-US" smtClean="0"/>
+            <a:fld id="{023A53CF-6AA3-4EF6-9F05-A0E3059C583D}" type="slidenum">
+              <a:rPr lang="en-IN" smtClean="0"/>
               <a:t>‹#›</a:t>
             </a:fld>
-            <a:endParaRPr lang="en-US"/>
+            <a:endParaRPr lang="en-IN"/>
           </a:p>
         </p:txBody>
       </p:sp>
     </p:spTree>
     <p:extLst>
       <p:ext uri="{BB962C8B-B14F-4D97-AF65-F5344CB8AC3E}">
-        <p14:creationId xmlns:p14="http://schemas.microsoft.com/office/powerpoint/2010/main" val="4275079751"/>
+        <p14:creationId xmlns:p14="http://schemas.microsoft.com/office/powerpoint/2010/main" val="3282989655"/>
       </p:ext>
     </p:extLst>
   </p:cSld>
@@ -1107,7 +612,7 @@
           <p:cNvPr id="2" name="Vertical Title 1">
             <a:extLst>
               <a:ext uri="{FF2B5EF4-FFF2-40B4-BE49-F238E27FC236}">
-                <a16:creationId xmlns:a16="http://schemas.microsoft.com/office/drawing/2014/main" id="{72293F13-2480-AB35-1A68-57A54CE6CD63}"/>
+                <a16:creationId xmlns:a16="http://schemas.microsoft.com/office/drawing/2014/main" id="{8B873E00-8852-9872-6FBC-537174553939}"/>
               </a:ext>
             </a:extLst>
           </p:cNvPr>
@@ -1132,6 +637,7 @@
               <a:rPr lang="en-US"/>
               <a:t>Click to edit Master title style</a:t>
             </a:r>
+            <a:endParaRPr lang="en-IN"/>
           </a:p>
         </p:txBody>
       </p:sp>
@@ -1140,7 +646,7 @@
           <p:cNvPr id="3" name="Vertical Text Placeholder 2">
             <a:extLst>
               <a:ext uri="{FF2B5EF4-FFF2-40B4-BE49-F238E27FC236}">
-                <a16:creationId xmlns:a16="http://schemas.microsoft.com/office/drawing/2014/main" id="{3BDA286C-2521-2961-CABA-5684DF43FB2A}"/>
+                <a16:creationId xmlns:a16="http://schemas.microsoft.com/office/drawing/2014/main" id="{FA02A146-0150-F26C-6A86-1CA1FD558AAE}"/>
               </a:ext>
             </a:extLst>
           </p:cNvPr>
@@ -1194,6 +700,7 @@
               <a:rPr lang="en-US"/>
               <a:t>Fifth level</a:t>
             </a:r>
+            <a:endParaRPr lang="en-IN"/>
           </a:p>
         </p:txBody>
       </p:sp>
@@ -1202,7 +709,7 @@
           <p:cNvPr id="4" name="Date Placeholder 3">
             <a:extLst>
               <a:ext uri="{FF2B5EF4-FFF2-40B4-BE49-F238E27FC236}">
-                <a16:creationId xmlns:a16="http://schemas.microsoft.com/office/drawing/2014/main" id="{74D5FF44-F63B-872A-DC8D-A873790A64A3}"/>
+                <a16:creationId xmlns:a16="http://schemas.microsoft.com/office/drawing/2014/main" id="{D8077DF1-F7DE-4956-6F82-6161FC02210A}"/>
               </a:ext>
             </a:extLst>
           </p:cNvPr>
@@ -1218,11 +725,11 @@
           <a:bodyPr/>
           <a:lstStyle/>
           <a:p>
-            <a:fld id="{6383FAE1-13DE-4511-8C1B-C8AFB720664C}" type="datetimeFigureOut">
-              <a:rPr lang="en-US" smtClean="0"/>
-              <a:t>9/24/2026</a:t>
+            <a:fld id="{6EBA79C2-4FE3-4D0C-AFFB-D4FCE050D5EA}" type="datetimeFigureOut">
+              <a:rPr lang="en-IN" smtClean="0"/>
+              <a:t>26-09-2026</a:t>
             </a:fld>
-            <a:endParaRPr lang="en-US"/>
+            <a:endParaRPr lang="en-IN"/>
           </a:p>
         </p:txBody>
       </p:sp>
@@ -1231,7 +738,7 @@
           <p:cNvPr id="5" name="Footer Placeholder 4">
             <a:extLst>
               <a:ext uri="{FF2B5EF4-FFF2-40B4-BE49-F238E27FC236}">
-                <a16:creationId xmlns:a16="http://schemas.microsoft.com/office/drawing/2014/main" id="{4E653A11-7793-38C6-0506-A6FBE9A02A10}"/>
+                <a16:creationId xmlns:a16="http://schemas.microsoft.com/office/drawing/2014/main" id="{3637416A-6960-5BA0-E825-F9D0B514C1AD}"/>
               </a:ext>
             </a:extLst>
           </p:cNvPr>
@@ -1247,7 +754,7 @@
           <a:bodyPr/>
           <a:lstStyle/>
           <a:p>
-            <a:endParaRPr lang="en-US"/>
+            <a:endParaRPr lang="en-IN"/>
           </a:p>
         </p:txBody>
       </p:sp>
@@ -1256,7 +763,7 @@
           <p:cNvPr id="6" name="Slide Number Placeholder 5">
             <a:extLst>
               <a:ext uri="{FF2B5EF4-FFF2-40B4-BE49-F238E27FC236}">
-                <a16:creationId xmlns:a16="http://schemas.microsoft.com/office/drawing/2014/main" id="{310962C0-F018-7629-445C-DDCA8AE1401B}"/>
+                <a16:creationId xmlns:a16="http://schemas.microsoft.com/office/drawing/2014/main" id="{E2C46A03-0511-8AD1-FB2D-69E35F8F158D}"/>
               </a:ext>
             </a:extLst>
           </p:cNvPr>
@@ -1272,18 +779,18 @@
           <a:bodyPr/>
           <a:lstStyle/>
           <a:p>
-            <a:fld id="{81BC7A09-79EE-44A0-8F92-750D7C83D871}" type="slidenum">
-              <a:rPr lang="en-US" smtClean="0"/>
+            <a:fld id="{023A53CF-6AA3-4EF6-9F05-A0E3059C583D}" type="slidenum">
+              <a:rPr lang="en-IN" smtClean="0"/>
               <a:t>‹#›</a:t>
             </a:fld>
-            <a:endParaRPr lang="en-US"/>
+            <a:endParaRPr lang="en-IN"/>
           </a:p>
         </p:txBody>
       </p:sp>
     </p:spTree>
     <p:extLst>
       <p:ext uri="{BB962C8B-B14F-4D97-AF65-F5344CB8AC3E}">
-        <p14:creationId xmlns:p14="http://schemas.microsoft.com/office/powerpoint/2010/main" val="2612998807"/>
+        <p14:creationId xmlns:p14="http://schemas.microsoft.com/office/powerpoint/2010/main" val="3267707711"/>
       </p:ext>
     </p:extLst>
   </p:cSld>
@@ -1315,7 +822,7 @@
           <p:cNvPr id="2" name="Title 1">
             <a:extLst>
               <a:ext uri="{FF2B5EF4-FFF2-40B4-BE49-F238E27FC236}">
-                <a16:creationId xmlns:a16="http://schemas.microsoft.com/office/drawing/2014/main" id="{84CE7E77-8771-0BA4-B1D5-7F1DE0138C3D}"/>
+                <a16:creationId xmlns:a16="http://schemas.microsoft.com/office/drawing/2014/main" id="{D02ECE76-A752-DB86-6111-A724232D2637}"/>
               </a:ext>
             </a:extLst>
           </p:cNvPr>
@@ -1332,9 +839,10 @@
           <a:lstStyle/>
           <a:p>
             <a:r>
-              <a:rPr lang="en-US" dirty="0"/>
+              <a:rPr lang="en-US"/>
               <a:t>Click to edit Master title style</a:t>
             </a:r>
+            <a:endParaRPr lang="en-IN"/>
           </a:p>
         </p:txBody>
       </p:sp>
@@ -1343,7 +851,7 @@
           <p:cNvPr id="3" name="Content Placeholder 2">
             <a:extLst>
               <a:ext uri="{FF2B5EF4-FFF2-40B4-BE49-F238E27FC236}">
-                <a16:creationId xmlns:a16="http://schemas.microsoft.com/office/drawing/2014/main" id="{9543F30B-85C4-D934-2F30-179E3FCE9424}"/>
+                <a16:creationId xmlns:a16="http://schemas.microsoft.com/office/drawing/2014/main" id="{79D6FD18-B58E-8C68-26E2-D91631986249}"/>
               </a:ext>
             </a:extLst>
           </p:cNvPr>
@@ -1361,37 +869,38 @@
           <a:p>
             <a:pPr lvl="0"/>
             <a:r>
-              <a:rPr lang="en-US" dirty="0"/>
+              <a:rPr lang="en-US"/>
               <a:t>Click to edit Master text styles</a:t>
             </a:r>
           </a:p>
           <a:p>
             <a:pPr lvl="1"/>
             <a:r>
-              <a:rPr lang="en-US" dirty="0"/>
+              <a:rPr lang="en-US"/>
               <a:t>Second level</a:t>
             </a:r>
           </a:p>
           <a:p>
             <a:pPr lvl="2"/>
             <a:r>
-              <a:rPr lang="en-US" dirty="0"/>
+              <a:rPr lang="en-US"/>
               <a:t>Third level</a:t>
             </a:r>
           </a:p>
           <a:p>
             <a:pPr lvl="3"/>
             <a:r>
-              <a:rPr lang="en-US" dirty="0"/>
+              <a:rPr lang="en-US"/>
               <a:t>Fourth level</a:t>
             </a:r>
           </a:p>
           <a:p>
             <a:pPr lvl="4"/>
             <a:r>
-              <a:rPr lang="en-US" dirty="0"/>
+              <a:rPr lang="en-US"/>
               <a:t>Fifth level</a:t>
             </a:r>
+            <a:endParaRPr lang="en-IN"/>
           </a:p>
         </p:txBody>
       </p:sp>
@@ -1400,7 +909,7 @@
           <p:cNvPr id="4" name="Date Placeholder 3">
             <a:extLst>
               <a:ext uri="{FF2B5EF4-FFF2-40B4-BE49-F238E27FC236}">
-                <a16:creationId xmlns:a16="http://schemas.microsoft.com/office/drawing/2014/main" id="{7C8EF7AF-5CE7-4387-31F9-79D35620609B}"/>
+                <a16:creationId xmlns:a16="http://schemas.microsoft.com/office/drawing/2014/main" id="{A97B759C-A1DF-256A-A624-6AB43BC663E0}"/>
               </a:ext>
             </a:extLst>
           </p:cNvPr>
@@ -1416,11 +925,11 @@
           <a:bodyPr/>
           <a:lstStyle/>
           <a:p>
-            <a:fld id="{6383FAE1-13DE-4511-8C1B-C8AFB720664C}" type="datetimeFigureOut">
-              <a:rPr lang="en-US" smtClean="0"/>
-              <a:t>9/24/2026</a:t>
+            <a:fld id="{6EBA79C2-4FE3-4D0C-AFFB-D4FCE050D5EA}" type="datetimeFigureOut">
+              <a:rPr lang="en-IN" smtClean="0"/>
+              <a:t>26-09-2026</a:t>
             </a:fld>
-            <a:endParaRPr lang="en-US"/>
+            <a:endParaRPr lang="en-IN"/>
           </a:p>
         </p:txBody>
       </p:sp>
@@ -1429,7 +938,7 @@
           <p:cNvPr id="5" name="Footer Placeholder 4">
             <a:extLst>
               <a:ext uri="{FF2B5EF4-FFF2-40B4-BE49-F238E27FC236}">
-                <a16:creationId xmlns:a16="http://schemas.microsoft.com/office/drawing/2014/main" id="{B0FCCC03-E434-4684-B55E-3F2D39916923}"/>
+                <a16:creationId xmlns:a16="http://schemas.microsoft.com/office/drawing/2014/main" id="{EB71A0AA-5283-1539-E76D-C2704EDF6283}"/>
               </a:ext>
             </a:extLst>
           </p:cNvPr>
@@ -1445,7 +954,7 @@
           <a:bodyPr/>
           <a:lstStyle/>
           <a:p>
-            <a:endParaRPr lang="en-US"/>
+            <a:endParaRPr lang="en-IN"/>
           </a:p>
         </p:txBody>
       </p:sp>
@@ -1454,7 +963,7 @@
           <p:cNvPr id="6" name="Slide Number Placeholder 5">
             <a:extLst>
               <a:ext uri="{FF2B5EF4-FFF2-40B4-BE49-F238E27FC236}">
-                <a16:creationId xmlns:a16="http://schemas.microsoft.com/office/drawing/2014/main" id="{BA1F3B05-B983-07A3-4B58-9D2E18438894}"/>
+                <a16:creationId xmlns:a16="http://schemas.microsoft.com/office/drawing/2014/main" id="{6C212E95-A93E-CFE8-0044-F1F7486E0850}"/>
               </a:ext>
             </a:extLst>
           </p:cNvPr>
@@ -1470,18 +979,18 @@
           <a:bodyPr/>
           <a:lstStyle/>
           <a:p>
-            <a:fld id="{81BC7A09-79EE-44A0-8F92-750D7C83D871}" type="slidenum">
-              <a:rPr lang="en-US" smtClean="0"/>
+            <a:fld id="{023A53CF-6AA3-4EF6-9F05-A0E3059C583D}" type="slidenum">
+              <a:rPr lang="en-IN" smtClean="0"/>
               <a:t>‹#›</a:t>
             </a:fld>
-            <a:endParaRPr lang="en-US"/>
+            <a:endParaRPr lang="en-IN"/>
           </a:p>
         </p:txBody>
       </p:sp>
     </p:spTree>
     <p:extLst>
       <p:ext uri="{BB962C8B-B14F-4D97-AF65-F5344CB8AC3E}">
-        <p14:creationId xmlns:p14="http://schemas.microsoft.com/office/powerpoint/2010/main" val="1596036442"/>
+        <p14:creationId xmlns:p14="http://schemas.microsoft.com/office/powerpoint/2010/main" val="2690746625"/>
       </p:ext>
     </p:extLst>
   </p:cSld>
@@ -1513,7 +1022,7 @@
           <p:cNvPr id="2" name="Title 1">
             <a:extLst>
               <a:ext uri="{FF2B5EF4-FFF2-40B4-BE49-F238E27FC236}">
-                <a16:creationId xmlns:a16="http://schemas.microsoft.com/office/drawing/2014/main" id="{5F223C21-D6A5-2D17-9BFA-70B3353D6A08}"/>
+                <a16:creationId xmlns:a16="http://schemas.microsoft.com/office/drawing/2014/main" id="{6DA27E88-1D0E-B19B-1F3F-54DF859CE717}"/>
               </a:ext>
             </a:extLst>
           </p:cNvPr>
@@ -1542,6 +1051,7 @@
               <a:rPr lang="en-US"/>
               <a:t>Click to edit Master title style</a:t>
             </a:r>
+            <a:endParaRPr lang="en-IN"/>
           </a:p>
         </p:txBody>
       </p:sp>
@@ -1550,7 +1060,7 @@
           <p:cNvPr id="3" name="Text Placeholder 2">
             <a:extLst>
               <a:ext uri="{FF2B5EF4-FFF2-40B4-BE49-F238E27FC236}">
-                <a16:creationId xmlns:a16="http://schemas.microsoft.com/office/drawing/2014/main" id="{E92D89B8-191B-6AAD-5D5E-32B357265743}"/>
+                <a16:creationId xmlns:a16="http://schemas.microsoft.com/office/drawing/2014/main" id="{62CE41C0-D975-5322-05EF-B6920E580E10}"/>
               </a:ext>
             </a:extLst>
           </p:cNvPr>
@@ -1675,7 +1185,7 @@
           <p:cNvPr id="4" name="Date Placeholder 3">
             <a:extLst>
               <a:ext uri="{FF2B5EF4-FFF2-40B4-BE49-F238E27FC236}">
-                <a16:creationId xmlns:a16="http://schemas.microsoft.com/office/drawing/2014/main" id="{54CC528A-1563-9376-E089-4DA80AD11D0C}"/>
+                <a16:creationId xmlns:a16="http://schemas.microsoft.com/office/drawing/2014/main" id="{39D7B167-1E87-B93B-75F5-B33217202FE7}"/>
               </a:ext>
             </a:extLst>
           </p:cNvPr>
@@ -1691,11 +1201,11 @@
           <a:bodyPr/>
           <a:lstStyle/>
           <a:p>
-            <a:fld id="{6383FAE1-13DE-4511-8C1B-C8AFB720664C}" type="datetimeFigureOut">
-              <a:rPr lang="en-US" smtClean="0"/>
-              <a:t>9/24/2026</a:t>
+            <a:fld id="{6EBA79C2-4FE3-4D0C-AFFB-D4FCE050D5EA}" type="datetimeFigureOut">
+              <a:rPr lang="en-IN" smtClean="0"/>
+              <a:t>26-09-2026</a:t>
             </a:fld>
-            <a:endParaRPr lang="en-US"/>
+            <a:endParaRPr lang="en-IN"/>
           </a:p>
         </p:txBody>
       </p:sp>
@@ -1704,7 +1214,7 @@
           <p:cNvPr id="5" name="Footer Placeholder 4">
             <a:extLst>
               <a:ext uri="{FF2B5EF4-FFF2-40B4-BE49-F238E27FC236}">
-                <a16:creationId xmlns:a16="http://schemas.microsoft.com/office/drawing/2014/main" id="{0519A01D-6FDA-C269-FF95-3FDB205C8E37}"/>
+                <a16:creationId xmlns:a16="http://schemas.microsoft.com/office/drawing/2014/main" id="{6225C962-1ABF-F876-C7DD-10E729E42A8D}"/>
               </a:ext>
             </a:extLst>
           </p:cNvPr>
@@ -1720,7 +1230,7 @@
           <a:bodyPr/>
           <a:lstStyle/>
           <a:p>
-            <a:endParaRPr lang="en-US"/>
+            <a:endParaRPr lang="en-IN"/>
           </a:p>
         </p:txBody>
       </p:sp>
@@ -1729,7 +1239,7 @@
           <p:cNvPr id="6" name="Slide Number Placeholder 5">
             <a:extLst>
               <a:ext uri="{FF2B5EF4-FFF2-40B4-BE49-F238E27FC236}">
-                <a16:creationId xmlns:a16="http://schemas.microsoft.com/office/drawing/2014/main" id="{AA980A21-61AC-4B39-D886-3A327DB7346D}"/>
+                <a16:creationId xmlns:a16="http://schemas.microsoft.com/office/drawing/2014/main" id="{3A8F7B4D-DA1F-E875-52B5-31F353F49234}"/>
               </a:ext>
             </a:extLst>
           </p:cNvPr>
@@ -1745,18 +1255,18 @@
           <a:bodyPr/>
           <a:lstStyle/>
           <a:p>
-            <a:fld id="{81BC7A09-79EE-44A0-8F92-750D7C83D871}" type="slidenum">
-              <a:rPr lang="en-US" smtClean="0"/>
+            <a:fld id="{023A53CF-6AA3-4EF6-9F05-A0E3059C583D}" type="slidenum">
+              <a:rPr lang="en-IN" smtClean="0"/>
               <a:t>‹#›</a:t>
             </a:fld>
-            <a:endParaRPr lang="en-US"/>
+            <a:endParaRPr lang="en-IN"/>
           </a:p>
         </p:txBody>
       </p:sp>
     </p:spTree>
     <p:extLst>
       <p:ext uri="{BB962C8B-B14F-4D97-AF65-F5344CB8AC3E}">
-        <p14:creationId xmlns:p14="http://schemas.microsoft.com/office/powerpoint/2010/main" val="941114025"/>
+        <p14:creationId xmlns:p14="http://schemas.microsoft.com/office/powerpoint/2010/main" val="1281796100"/>
       </p:ext>
     </p:extLst>
   </p:cSld>
@@ -1788,7 +1298,7 @@
           <p:cNvPr id="2" name="Title 1">
             <a:extLst>
               <a:ext uri="{FF2B5EF4-FFF2-40B4-BE49-F238E27FC236}">
-                <a16:creationId xmlns:a16="http://schemas.microsoft.com/office/drawing/2014/main" id="{F2903C29-6DED-2A1F-5B4D-128B63652F74}"/>
+                <a16:creationId xmlns:a16="http://schemas.microsoft.com/office/drawing/2014/main" id="{04429F20-A52E-A2BE-2A7C-6344D890036E}"/>
               </a:ext>
             </a:extLst>
           </p:cNvPr>
@@ -1808,6 +1318,7 @@
               <a:rPr lang="en-US"/>
               <a:t>Click to edit Master title style</a:t>
             </a:r>
+            <a:endParaRPr lang="en-IN"/>
           </a:p>
         </p:txBody>
       </p:sp>
@@ -1816,7 +1327,7 @@
           <p:cNvPr id="3" name="Content Placeholder 2">
             <a:extLst>
               <a:ext uri="{FF2B5EF4-FFF2-40B4-BE49-F238E27FC236}">
-                <a16:creationId xmlns:a16="http://schemas.microsoft.com/office/drawing/2014/main" id="{16494ECB-0FCA-1AD0-F19A-27A4C16DC0F2}"/>
+                <a16:creationId xmlns:a16="http://schemas.microsoft.com/office/drawing/2014/main" id="{97E9F42D-CDDF-9B84-6F33-25E956F2DDE4}"/>
               </a:ext>
             </a:extLst>
           </p:cNvPr>
@@ -1870,6 +1381,7 @@
               <a:rPr lang="en-US"/>
               <a:t>Fifth level</a:t>
             </a:r>
+            <a:endParaRPr lang="en-IN"/>
           </a:p>
         </p:txBody>
       </p:sp>
@@ -1878,7 +1390,7 @@
           <p:cNvPr id="4" name="Content Placeholder 3">
             <a:extLst>
               <a:ext uri="{FF2B5EF4-FFF2-40B4-BE49-F238E27FC236}">
-                <a16:creationId xmlns:a16="http://schemas.microsoft.com/office/drawing/2014/main" id="{A07402C2-E657-5A54-9627-8C9CBCBBE0A7}"/>
+                <a16:creationId xmlns:a16="http://schemas.microsoft.com/office/drawing/2014/main" id="{761E0A4D-E831-6562-11B2-108204244C50}"/>
               </a:ext>
             </a:extLst>
           </p:cNvPr>
@@ -1932,6 +1444,7 @@
               <a:rPr lang="en-US"/>
               <a:t>Fifth level</a:t>
             </a:r>
+            <a:endParaRPr lang="en-IN"/>
           </a:p>
         </p:txBody>
       </p:sp>
@@ -1940,7 +1453,7 @@
           <p:cNvPr id="5" name="Date Placeholder 4">
             <a:extLst>
               <a:ext uri="{FF2B5EF4-FFF2-40B4-BE49-F238E27FC236}">
-                <a16:creationId xmlns:a16="http://schemas.microsoft.com/office/drawing/2014/main" id="{1501FADA-AE3E-B30F-6353-BF0478CF0E39}"/>
+                <a16:creationId xmlns:a16="http://schemas.microsoft.com/office/drawing/2014/main" id="{E85F4BEA-6EB0-7F6F-4BFA-B7DACF40DEA9}"/>
               </a:ext>
             </a:extLst>
           </p:cNvPr>
@@ -1956,11 +1469,11 @@
           <a:bodyPr/>
           <a:lstStyle/>
           <a:p>
-            <a:fld id="{6383FAE1-13DE-4511-8C1B-C8AFB720664C}" type="datetimeFigureOut">
-              <a:rPr lang="en-US" smtClean="0"/>
-              <a:t>9/24/2026</a:t>
+            <a:fld id="{6EBA79C2-4FE3-4D0C-AFFB-D4FCE050D5EA}" type="datetimeFigureOut">
+              <a:rPr lang="en-IN" smtClean="0"/>
+              <a:t>26-09-2026</a:t>
             </a:fld>
-            <a:endParaRPr lang="en-US"/>
+            <a:endParaRPr lang="en-IN"/>
           </a:p>
         </p:txBody>
       </p:sp>
@@ -1969,7 +1482,7 @@
           <p:cNvPr id="6" name="Footer Placeholder 5">
             <a:extLst>
               <a:ext uri="{FF2B5EF4-FFF2-40B4-BE49-F238E27FC236}">
-                <a16:creationId xmlns:a16="http://schemas.microsoft.com/office/drawing/2014/main" id="{7F16B517-96D7-6416-0C24-B14942ADD41C}"/>
+                <a16:creationId xmlns:a16="http://schemas.microsoft.com/office/drawing/2014/main" id="{9852B4B5-D542-513B-5FBA-7C8418FD6EE3}"/>
               </a:ext>
             </a:extLst>
           </p:cNvPr>
@@ -1985,7 +1498,7 @@
           <a:bodyPr/>
           <a:lstStyle/>
           <a:p>
-            <a:endParaRPr lang="en-US"/>
+            <a:endParaRPr lang="en-IN"/>
           </a:p>
         </p:txBody>
       </p:sp>
@@ -1994,7 +1507,7 @@
           <p:cNvPr id="7" name="Slide Number Placeholder 6">
             <a:extLst>
               <a:ext uri="{FF2B5EF4-FFF2-40B4-BE49-F238E27FC236}">
-                <a16:creationId xmlns:a16="http://schemas.microsoft.com/office/drawing/2014/main" id="{1546F179-BF2F-393A-1AA6-C893B7B9FA37}"/>
+                <a16:creationId xmlns:a16="http://schemas.microsoft.com/office/drawing/2014/main" id="{3A5B6383-F1CA-D4A5-9876-F4662B6051B7}"/>
               </a:ext>
             </a:extLst>
           </p:cNvPr>
@@ -2010,18 +1523,18 @@
           <a:bodyPr/>
           <a:lstStyle/>
           <a:p>
-            <a:fld id="{81BC7A09-79EE-44A0-8F92-750D7C83D871}" type="slidenum">
-              <a:rPr lang="en-US" smtClean="0"/>
+            <a:fld id="{023A53CF-6AA3-4EF6-9F05-A0E3059C583D}" type="slidenum">
+              <a:rPr lang="en-IN" smtClean="0"/>
               <a:t>‹#›</a:t>
             </a:fld>
-            <a:endParaRPr lang="en-US"/>
+            <a:endParaRPr lang="en-IN"/>
           </a:p>
         </p:txBody>
       </p:sp>
     </p:spTree>
     <p:extLst>
       <p:ext uri="{BB962C8B-B14F-4D97-AF65-F5344CB8AC3E}">
-        <p14:creationId xmlns:p14="http://schemas.microsoft.com/office/powerpoint/2010/main" val="3925852381"/>
+        <p14:creationId xmlns:p14="http://schemas.microsoft.com/office/powerpoint/2010/main" val="4027627197"/>
       </p:ext>
     </p:extLst>
   </p:cSld>
@@ -2053,7 +1566,7 @@
           <p:cNvPr id="2" name="Title 1">
             <a:extLst>
               <a:ext uri="{FF2B5EF4-FFF2-40B4-BE49-F238E27FC236}">
-                <a16:creationId xmlns:a16="http://schemas.microsoft.com/office/drawing/2014/main" id="{B6950483-A0C8-BF5B-61DE-39BC6FF9C123}"/>
+                <a16:creationId xmlns:a16="http://schemas.microsoft.com/office/drawing/2014/main" id="{9BCE9337-2FE3-561C-F11A-2CFAC3C88822}"/>
               </a:ext>
             </a:extLst>
           </p:cNvPr>
@@ -2078,6 +1591,7 @@
               <a:rPr lang="en-US"/>
               <a:t>Click to edit Master title style</a:t>
             </a:r>
+            <a:endParaRPr lang="en-IN"/>
           </a:p>
         </p:txBody>
       </p:sp>
@@ -2086,7 +1600,7 @@
           <p:cNvPr id="3" name="Text Placeholder 2">
             <a:extLst>
               <a:ext uri="{FF2B5EF4-FFF2-40B4-BE49-F238E27FC236}">
-                <a16:creationId xmlns:a16="http://schemas.microsoft.com/office/drawing/2014/main" id="{646DB55B-C040-F211-BC81-97628EA48448}"/>
+                <a16:creationId xmlns:a16="http://schemas.microsoft.com/office/drawing/2014/main" id="{80BCE1B6-2296-C3DE-5C27-E4057DFF68AE}"/>
               </a:ext>
             </a:extLst>
           </p:cNvPr>
@@ -2157,7 +1671,7 @@
           <p:cNvPr id="4" name="Content Placeholder 3">
             <a:extLst>
               <a:ext uri="{FF2B5EF4-FFF2-40B4-BE49-F238E27FC236}">
-                <a16:creationId xmlns:a16="http://schemas.microsoft.com/office/drawing/2014/main" id="{F593EEAE-1CB3-AAC8-5818-D61E389EF1E2}"/>
+                <a16:creationId xmlns:a16="http://schemas.microsoft.com/office/drawing/2014/main" id="{0EB2FC1E-2D6D-269A-6807-421A1A9C42DB}"/>
               </a:ext>
             </a:extLst>
           </p:cNvPr>
@@ -2211,6 +1725,7 @@
               <a:rPr lang="en-US"/>
               <a:t>Fifth level</a:t>
             </a:r>
+            <a:endParaRPr lang="en-IN"/>
           </a:p>
         </p:txBody>
       </p:sp>
@@ -2219,7 +1734,7 @@
           <p:cNvPr id="5" name="Text Placeholder 4">
             <a:extLst>
               <a:ext uri="{FF2B5EF4-FFF2-40B4-BE49-F238E27FC236}">
-                <a16:creationId xmlns:a16="http://schemas.microsoft.com/office/drawing/2014/main" id="{5ACE50F0-1141-D645-3892-2DA29633A371}"/>
+                <a16:creationId xmlns:a16="http://schemas.microsoft.com/office/drawing/2014/main" id="{281AD048-C515-130C-8F41-1BA8F4189292}"/>
               </a:ext>
             </a:extLst>
           </p:cNvPr>
@@ -2290,7 +1805,7 @@
           <p:cNvPr id="6" name="Content Placeholder 5">
             <a:extLst>
               <a:ext uri="{FF2B5EF4-FFF2-40B4-BE49-F238E27FC236}">
-                <a16:creationId xmlns:a16="http://schemas.microsoft.com/office/drawing/2014/main" id="{532E976C-52C7-C22D-28F7-B21E295185E1}"/>
+                <a16:creationId xmlns:a16="http://schemas.microsoft.com/office/drawing/2014/main" id="{3C6D4A7E-CE1F-A02A-B92A-059B1FBCF351}"/>
               </a:ext>
             </a:extLst>
           </p:cNvPr>
@@ -2344,6 +1859,7 @@
               <a:rPr lang="en-US"/>
               <a:t>Fifth level</a:t>
             </a:r>
+            <a:endParaRPr lang="en-IN"/>
           </a:p>
         </p:txBody>
       </p:sp>
@@ -2352,7 +1868,7 @@
           <p:cNvPr id="7" name="Date Placeholder 6">
             <a:extLst>
               <a:ext uri="{FF2B5EF4-FFF2-40B4-BE49-F238E27FC236}">
-                <a16:creationId xmlns:a16="http://schemas.microsoft.com/office/drawing/2014/main" id="{E797D00B-0B76-5C50-686B-A01396FCD6FA}"/>
+                <a16:creationId xmlns:a16="http://schemas.microsoft.com/office/drawing/2014/main" id="{66F77709-049A-79A2-F207-FBDA0CAA4E0A}"/>
               </a:ext>
             </a:extLst>
           </p:cNvPr>
@@ -2368,11 +1884,11 @@
           <a:bodyPr/>
           <a:lstStyle/>
           <a:p>
-            <a:fld id="{6383FAE1-13DE-4511-8C1B-C8AFB720664C}" type="datetimeFigureOut">
-              <a:rPr lang="en-US" smtClean="0"/>
-              <a:t>9/24/2026</a:t>
+            <a:fld id="{6EBA79C2-4FE3-4D0C-AFFB-D4FCE050D5EA}" type="datetimeFigureOut">
+              <a:rPr lang="en-IN" smtClean="0"/>
+              <a:t>26-09-2026</a:t>
             </a:fld>
-            <a:endParaRPr lang="en-US"/>
+            <a:endParaRPr lang="en-IN"/>
           </a:p>
         </p:txBody>
       </p:sp>
@@ -2381,7 +1897,7 @@
           <p:cNvPr id="8" name="Footer Placeholder 7">
             <a:extLst>
               <a:ext uri="{FF2B5EF4-FFF2-40B4-BE49-F238E27FC236}">
-                <a16:creationId xmlns:a16="http://schemas.microsoft.com/office/drawing/2014/main" id="{7B842B8D-3B74-4B67-9462-6D2C7ED9ADCB}"/>
+                <a16:creationId xmlns:a16="http://schemas.microsoft.com/office/drawing/2014/main" id="{59DE0EB3-83C0-67E2-5DB9-42DE8540F862}"/>
               </a:ext>
             </a:extLst>
           </p:cNvPr>
@@ -2397,7 +1913,7 @@
           <a:bodyPr/>
           <a:lstStyle/>
           <a:p>
-            <a:endParaRPr lang="en-US"/>
+            <a:endParaRPr lang="en-IN"/>
           </a:p>
         </p:txBody>
       </p:sp>
@@ -2406,7 +1922,7 @@
           <p:cNvPr id="9" name="Slide Number Placeholder 8">
             <a:extLst>
               <a:ext uri="{FF2B5EF4-FFF2-40B4-BE49-F238E27FC236}">
-                <a16:creationId xmlns:a16="http://schemas.microsoft.com/office/drawing/2014/main" id="{F992D4BE-CE8C-0250-FE7D-1F370E25FE27}"/>
+                <a16:creationId xmlns:a16="http://schemas.microsoft.com/office/drawing/2014/main" id="{20C97AB3-472A-1E13-8460-CE1D861DB6C2}"/>
               </a:ext>
             </a:extLst>
           </p:cNvPr>
@@ -2422,18 +1938,18 @@
           <a:bodyPr/>
           <a:lstStyle/>
           <a:p>
-            <a:fld id="{81BC7A09-79EE-44A0-8F92-750D7C83D871}" type="slidenum">
-              <a:rPr lang="en-US" smtClean="0"/>
+            <a:fld id="{023A53CF-6AA3-4EF6-9F05-A0E3059C583D}" type="slidenum">
+              <a:rPr lang="en-IN" smtClean="0"/>
               <a:t>‹#›</a:t>
             </a:fld>
-            <a:endParaRPr lang="en-US"/>
+            <a:endParaRPr lang="en-IN"/>
           </a:p>
         </p:txBody>
       </p:sp>
     </p:spTree>
     <p:extLst>
       <p:ext uri="{BB962C8B-B14F-4D97-AF65-F5344CB8AC3E}">
-        <p14:creationId xmlns:p14="http://schemas.microsoft.com/office/powerpoint/2010/main" val="3765750289"/>
+        <p14:creationId xmlns:p14="http://schemas.microsoft.com/office/powerpoint/2010/main" val="4043864109"/>
       </p:ext>
     </p:extLst>
   </p:cSld>
@@ -2465,7 +1981,7 @@
           <p:cNvPr id="2" name="Title 1">
             <a:extLst>
               <a:ext uri="{FF2B5EF4-FFF2-40B4-BE49-F238E27FC236}">
-                <a16:creationId xmlns:a16="http://schemas.microsoft.com/office/drawing/2014/main" id="{CBCDBE28-2732-66A2-163C-433854615E7C}"/>
+                <a16:creationId xmlns:a16="http://schemas.microsoft.com/office/drawing/2014/main" id="{251C5904-8D4D-4CA9-51B3-289632997B0B}"/>
               </a:ext>
             </a:extLst>
           </p:cNvPr>
@@ -2485,6 +2001,7 @@
               <a:rPr lang="en-US"/>
               <a:t>Click to edit Master title style</a:t>
             </a:r>
+            <a:endParaRPr lang="en-IN"/>
           </a:p>
         </p:txBody>
       </p:sp>
@@ -2493,7 +2010,7 @@
           <p:cNvPr id="3" name="Date Placeholder 2">
             <a:extLst>
               <a:ext uri="{FF2B5EF4-FFF2-40B4-BE49-F238E27FC236}">
-                <a16:creationId xmlns:a16="http://schemas.microsoft.com/office/drawing/2014/main" id="{E270F3D6-B4BC-015F-96FA-1720B040CC96}"/>
+                <a16:creationId xmlns:a16="http://schemas.microsoft.com/office/drawing/2014/main" id="{EE398302-AD6F-2CE6-7442-A4A9683D9718}"/>
               </a:ext>
             </a:extLst>
           </p:cNvPr>
@@ -2509,11 +2026,11 @@
           <a:bodyPr/>
           <a:lstStyle/>
           <a:p>
-            <a:fld id="{6383FAE1-13DE-4511-8C1B-C8AFB720664C}" type="datetimeFigureOut">
-              <a:rPr lang="en-US" smtClean="0"/>
-              <a:t>9/24/2026</a:t>
+            <a:fld id="{6EBA79C2-4FE3-4D0C-AFFB-D4FCE050D5EA}" type="datetimeFigureOut">
+              <a:rPr lang="en-IN" smtClean="0"/>
+              <a:t>26-09-2026</a:t>
             </a:fld>
-            <a:endParaRPr lang="en-US"/>
+            <a:endParaRPr lang="en-IN"/>
           </a:p>
         </p:txBody>
       </p:sp>
@@ -2522,7 +2039,7 @@
           <p:cNvPr id="4" name="Footer Placeholder 3">
             <a:extLst>
               <a:ext uri="{FF2B5EF4-FFF2-40B4-BE49-F238E27FC236}">
-                <a16:creationId xmlns:a16="http://schemas.microsoft.com/office/drawing/2014/main" id="{21168A87-13A5-0A5A-4D74-C75E27775575}"/>
+                <a16:creationId xmlns:a16="http://schemas.microsoft.com/office/drawing/2014/main" id="{15391825-01DE-3CBB-BB33-763481B92D74}"/>
               </a:ext>
             </a:extLst>
           </p:cNvPr>
@@ -2538,7 +2055,7 @@
           <a:bodyPr/>
           <a:lstStyle/>
           <a:p>
-            <a:endParaRPr lang="en-US"/>
+            <a:endParaRPr lang="en-IN"/>
           </a:p>
         </p:txBody>
       </p:sp>
@@ -2547,7 +2064,7 @@
           <p:cNvPr id="5" name="Slide Number Placeholder 4">
             <a:extLst>
               <a:ext uri="{FF2B5EF4-FFF2-40B4-BE49-F238E27FC236}">
-                <a16:creationId xmlns:a16="http://schemas.microsoft.com/office/drawing/2014/main" id="{ADD6D7CB-BD93-54BE-CB47-7FBA06B18442}"/>
+                <a16:creationId xmlns:a16="http://schemas.microsoft.com/office/drawing/2014/main" id="{07D5401A-71EA-0313-9EA1-4DC2DB3F758C}"/>
               </a:ext>
             </a:extLst>
           </p:cNvPr>
@@ -2563,18 +2080,18 @@
           <a:bodyPr/>
           <a:lstStyle/>
           <a:p>
-            <a:fld id="{81BC7A09-79EE-44A0-8F92-750D7C83D871}" type="slidenum">
-              <a:rPr lang="en-US" smtClean="0"/>
+            <a:fld id="{023A53CF-6AA3-4EF6-9F05-A0E3059C583D}" type="slidenum">
+              <a:rPr lang="en-IN" smtClean="0"/>
               <a:t>‹#›</a:t>
             </a:fld>
-            <a:endParaRPr lang="en-US"/>
+            <a:endParaRPr lang="en-IN"/>
           </a:p>
         </p:txBody>
       </p:sp>
     </p:spTree>
     <p:extLst>
       <p:ext uri="{BB962C8B-B14F-4D97-AF65-F5344CB8AC3E}">
-        <p14:creationId xmlns:p14="http://schemas.microsoft.com/office/powerpoint/2010/main" val="734650834"/>
+        <p14:creationId xmlns:p14="http://schemas.microsoft.com/office/powerpoint/2010/main" val="3389444527"/>
       </p:ext>
     </p:extLst>
   </p:cSld>
@@ -2606,7 +2123,7 @@
           <p:cNvPr id="2" name="Date Placeholder 1">
             <a:extLst>
               <a:ext uri="{FF2B5EF4-FFF2-40B4-BE49-F238E27FC236}">
-                <a16:creationId xmlns:a16="http://schemas.microsoft.com/office/drawing/2014/main" id="{49B4114B-4550-9F52-0EF5-D1E9CF2FD384}"/>
+                <a16:creationId xmlns:a16="http://schemas.microsoft.com/office/drawing/2014/main" id="{E2418529-294A-5688-70AC-D6FBB2669691}"/>
               </a:ext>
             </a:extLst>
           </p:cNvPr>
@@ -2622,11 +2139,11 @@
           <a:bodyPr/>
           <a:lstStyle/>
           <a:p>
-            <a:fld id="{6383FAE1-13DE-4511-8C1B-C8AFB720664C}" type="datetimeFigureOut">
-              <a:rPr lang="en-US" smtClean="0"/>
-              <a:t>9/24/2026</a:t>
+            <a:fld id="{6EBA79C2-4FE3-4D0C-AFFB-D4FCE050D5EA}" type="datetimeFigureOut">
+              <a:rPr lang="en-IN" smtClean="0"/>
+              <a:t>26-09-2026</a:t>
             </a:fld>
-            <a:endParaRPr lang="en-US"/>
+            <a:endParaRPr lang="en-IN"/>
           </a:p>
         </p:txBody>
       </p:sp>
@@ -2635,7 +2152,7 @@
           <p:cNvPr id="3" name="Footer Placeholder 2">
             <a:extLst>
               <a:ext uri="{FF2B5EF4-FFF2-40B4-BE49-F238E27FC236}">
-                <a16:creationId xmlns:a16="http://schemas.microsoft.com/office/drawing/2014/main" id="{0BF3136E-0C79-F4F5-F24E-D5FF71CDB55C}"/>
+                <a16:creationId xmlns:a16="http://schemas.microsoft.com/office/drawing/2014/main" id="{774AA024-38B7-5F32-1894-BCE21AADFC16}"/>
               </a:ext>
             </a:extLst>
           </p:cNvPr>
@@ -2651,7 +2168,7 @@
           <a:bodyPr/>
           <a:lstStyle/>
           <a:p>
-            <a:endParaRPr lang="en-US"/>
+            <a:endParaRPr lang="en-IN"/>
           </a:p>
         </p:txBody>
       </p:sp>
@@ -2660,7 +2177,7 @@
           <p:cNvPr id="4" name="Slide Number Placeholder 3">
             <a:extLst>
               <a:ext uri="{FF2B5EF4-FFF2-40B4-BE49-F238E27FC236}">
-                <a16:creationId xmlns:a16="http://schemas.microsoft.com/office/drawing/2014/main" id="{9F2E2157-F670-A339-0CB7-7399568D5A1C}"/>
+                <a16:creationId xmlns:a16="http://schemas.microsoft.com/office/drawing/2014/main" id="{436C172C-4B71-8ABE-DD86-85DD12827B5A}"/>
               </a:ext>
             </a:extLst>
           </p:cNvPr>
@@ -2676,18 +2193,18 @@
           <a:bodyPr/>
           <a:lstStyle/>
           <a:p>
-            <a:fld id="{81BC7A09-79EE-44A0-8F92-750D7C83D871}" type="slidenum">
-              <a:rPr lang="en-US" smtClean="0"/>
+            <a:fld id="{023A53CF-6AA3-4EF6-9F05-A0E3059C583D}" type="slidenum">
+              <a:rPr lang="en-IN" smtClean="0"/>
               <a:t>‹#›</a:t>
             </a:fld>
-            <a:endParaRPr lang="en-US"/>
+            <a:endParaRPr lang="en-IN"/>
           </a:p>
         </p:txBody>
       </p:sp>
     </p:spTree>
     <p:extLst>
       <p:ext uri="{BB962C8B-B14F-4D97-AF65-F5344CB8AC3E}">
-        <p14:creationId xmlns:p14="http://schemas.microsoft.com/office/powerpoint/2010/main" val="3796501475"/>
+        <p14:creationId xmlns:p14="http://schemas.microsoft.com/office/powerpoint/2010/main" val="2826162352"/>
       </p:ext>
     </p:extLst>
   </p:cSld>
@@ -2719,7 +2236,7 @@
           <p:cNvPr id="2" name="Title 1">
             <a:extLst>
               <a:ext uri="{FF2B5EF4-FFF2-40B4-BE49-F238E27FC236}">
-                <a16:creationId xmlns:a16="http://schemas.microsoft.com/office/drawing/2014/main" id="{A5802A98-8738-1E16-A16E-D8858EEA762D}"/>
+                <a16:creationId xmlns:a16="http://schemas.microsoft.com/office/drawing/2014/main" id="{97BEB6CF-2A94-DBDD-0D5B-BC12FF3220C5}"/>
               </a:ext>
             </a:extLst>
           </p:cNvPr>
@@ -2748,6 +2265,7 @@
               <a:rPr lang="en-US"/>
               <a:t>Click to edit Master title style</a:t>
             </a:r>
+            <a:endParaRPr lang="en-IN"/>
           </a:p>
         </p:txBody>
       </p:sp>
@@ -2756,7 +2274,7 @@
           <p:cNvPr id="3" name="Content Placeholder 2">
             <a:extLst>
               <a:ext uri="{FF2B5EF4-FFF2-40B4-BE49-F238E27FC236}">
-                <a16:creationId xmlns:a16="http://schemas.microsoft.com/office/drawing/2014/main" id="{64FC67E5-1169-257D-D9E7-C7B952C21372}"/>
+                <a16:creationId xmlns:a16="http://schemas.microsoft.com/office/drawing/2014/main" id="{EF4B7D8E-A4B1-A435-346C-19A718C71F13}"/>
               </a:ext>
             </a:extLst>
           </p:cNvPr>
@@ -2838,6 +2356,7 @@
               <a:rPr lang="en-US"/>
               <a:t>Fifth level</a:t>
             </a:r>
+            <a:endParaRPr lang="en-IN"/>
           </a:p>
         </p:txBody>
       </p:sp>
@@ -2846,7 +2365,7 @@
           <p:cNvPr id="4" name="Text Placeholder 3">
             <a:extLst>
               <a:ext uri="{FF2B5EF4-FFF2-40B4-BE49-F238E27FC236}">
-                <a16:creationId xmlns:a16="http://schemas.microsoft.com/office/drawing/2014/main" id="{90B2CF6C-0F85-566A-86BC-CBFEB17E755D}"/>
+                <a16:creationId xmlns:a16="http://schemas.microsoft.com/office/drawing/2014/main" id="{A57C91E7-453A-3F92-E638-C337924651AF}"/>
               </a:ext>
             </a:extLst>
           </p:cNvPr>
@@ -2917,7 +2436,7 @@
           <p:cNvPr id="5" name="Date Placeholder 4">
             <a:extLst>
               <a:ext uri="{FF2B5EF4-FFF2-40B4-BE49-F238E27FC236}">
-                <a16:creationId xmlns:a16="http://schemas.microsoft.com/office/drawing/2014/main" id="{1A64F0FC-ECB8-638F-A224-98FFA8270730}"/>
+                <a16:creationId xmlns:a16="http://schemas.microsoft.com/office/drawing/2014/main" id="{7C7C4555-70D3-F8F8-D355-E9BBC9EE67F8}"/>
               </a:ext>
             </a:extLst>
           </p:cNvPr>
@@ -2933,11 +2452,11 @@
           <a:bodyPr/>
           <a:lstStyle/>
           <a:p>
-            <a:fld id="{6383FAE1-13DE-4511-8C1B-C8AFB720664C}" type="datetimeFigureOut">
-              <a:rPr lang="en-US" smtClean="0"/>
-              <a:t>9/24/2026</a:t>
+            <a:fld id="{6EBA79C2-4FE3-4D0C-AFFB-D4FCE050D5EA}" type="datetimeFigureOut">
+              <a:rPr lang="en-IN" smtClean="0"/>
+              <a:t>26-09-2026</a:t>
             </a:fld>
-            <a:endParaRPr lang="en-US"/>
+            <a:endParaRPr lang="en-IN"/>
           </a:p>
         </p:txBody>
       </p:sp>
@@ -2946,7 +2465,7 @@
           <p:cNvPr id="6" name="Footer Placeholder 5">
             <a:extLst>
               <a:ext uri="{FF2B5EF4-FFF2-40B4-BE49-F238E27FC236}">
-                <a16:creationId xmlns:a16="http://schemas.microsoft.com/office/drawing/2014/main" id="{A8095B89-4DC8-435E-3545-6187AD3E00A8}"/>
+                <a16:creationId xmlns:a16="http://schemas.microsoft.com/office/drawing/2014/main" id="{55FE752C-45A1-07D0-4240-44893A0DB930}"/>
               </a:ext>
             </a:extLst>
           </p:cNvPr>
@@ -2962,7 +2481,7 @@
           <a:bodyPr/>
           <a:lstStyle/>
           <a:p>
-            <a:endParaRPr lang="en-US"/>
+            <a:endParaRPr lang="en-IN"/>
           </a:p>
         </p:txBody>
       </p:sp>
@@ -2971,7 +2490,7 @@
           <p:cNvPr id="7" name="Slide Number Placeholder 6">
             <a:extLst>
               <a:ext uri="{FF2B5EF4-FFF2-40B4-BE49-F238E27FC236}">
-                <a16:creationId xmlns:a16="http://schemas.microsoft.com/office/drawing/2014/main" id="{171B68CF-9592-FB7C-B517-0CC962C8B6DC}"/>
+                <a16:creationId xmlns:a16="http://schemas.microsoft.com/office/drawing/2014/main" id="{39DDD99C-C480-C729-0ECD-BEDE124E840E}"/>
               </a:ext>
             </a:extLst>
           </p:cNvPr>
@@ -2987,18 +2506,18 @@
           <a:bodyPr/>
           <a:lstStyle/>
           <a:p>
-            <a:fld id="{81BC7A09-79EE-44A0-8F92-750D7C83D871}" type="slidenum">
-              <a:rPr lang="en-US" smtClean="0"/>
+            <a:fld id="{023A53CF-6AA3-4EF6-9F05-A0E3059C583D}" type="slidenum">
+              <a:rPr lang="en-IN" smtClean="0"/>
               <a:t>‹#›</a:t>
             </a:fld>
-            <a:endParaRPr lang="en-US"/>
+            <a:endParaRPr lang="en-IN"/>
           </a:p>
         </p:txBody>
       </p:sp>
     </p:spTree>
     <p:extLst>
       <p:ext uri="{BB962C8B-B14F-4D97-AF65-F5344CB8AC3E}">
-        <p14:creationId xmlns:p14="http://schemas.microsoft.com/office/powerpoint/2010/main" val="2644300723"/>
+        <p14:creationId xmlns:p14="http://schemas.microsoft.com/office/powerpoint/2010/main" val="780093886"/>
       </p:ext>
     </p:extLst>
   </p:cSld>
@@ -3030,7 +2549,7 @@
           <p:cNvPr id="2" name="Title 1">
             <a:extLst>
               <a:ext uri="{FF2B5EF4-FFF2-40B4-BE49-F238E27FC236}">
-                <a16:creationId xmlns:a16="http://schemas.microsoft.com/office/drawing/2014/main" id="{853E2BC2-F728-2BA5-C848-31FA3458ADF0}"/>
+                <a16:creationId xmlns:a16="http://schemas.microsoft.com/office/drawing/2014/main" id="{7FD2D6FA-24BB-7D09-4CC6-34096CAB0EC2}"/>
               </a:ext>
             </a:extLst>
           </p:cNvPr>
@@ -3059,6 +2578,7 @@
               <a:rPr lang="en-US"/>
               <a:t>Click to edit Master title style</a:t>
             </a:r>
+            <a:endParaRPr lang="en-IN"/>
           </a:p>
         </p:txBody>
       </p:sp>
@@ -3067,12 +2587,12 @@
           <p:cNvPr id="3" name="Picture Placeholder 2">
             <a:extLst>
               <a:ext uri="{FF2B5EF4-FFF2-40B4-BE49-F238E27FC236}">
-                <a16:creationId xmlns:a16="http://schemas.microsoft.com/office/drawing/2014/main" id="{B957B909-12C3-703B-57E9-008076312F68}"/>
+                <a16:creationId xmlns:a16="http://schemas.microsoft.com/office/drawing/2014/main" id="{6C60CEAA-CE7A-1BBF-BDA9-B387E6B8B163}"/>
               </a:ext>
             </a:extLst>
           </p:cNvPr>
           <p:cNvSpPr>
-            <a:spLocks noGrp="1"/>
+            <a:spLocks noGrp="1" noChangeAspect="1"/>
           </p:cNvSpPr>
           <p:nvPr>
             <p:ph type="pic" idx="1"/>
@@ -3125,10 +2645,7 @@
             </a:lvl9pPr>
           </a:lstStyle>
           <a:p>
-            <a:r>
-              <a:rPr lang="en-US"/>
-              <a:t>Click icon to add picture</a:t>
-            </a:r>
+            <a:endParaRPr lang="en-IN"/>
           </a:p>
         </p:txBody>
       </p:sp>
@@ -3137,7 +2654,7 @@
           <p:cNvPr id="4" name="Text Placeholder 3">
             <a:extLst>
               <a:ext uri="{FF2B5EF4-FFF2-40B4-BE49-F238E27FC236}">
-                <a16:creationId xmlns:a16="http://schemas.microsoft.com/office/drawing/2014/main" id="{FDAE4D7A-BC41-33D0-D36D-08BB5C2C594A}"/>
+                <a16:creationId xmlns:a16="http://schemas.microsoft.com/office/drawing/2014/main" id="{1019DD54-A44F-A8AE-D4E9-3EB63270CC1C}"/>
               </a:ext>
             </a:extLst>
           </p:cNvPr>
@@ -3208,7 +2725,7 @@
           <p:cNvPr id="5" name="Date Placeholder 4">
             <a:extLst>
               <a:ext uri="{FF2B5EF4-FFF2-40B4-BE49-F238E27FC236}">
-                <a16:creationId xmlns:a16="http://schemas.microsoft.com/office/drawing/2014/main" id="{FB17FB83-437D-9293-0B99-2DC89A047DD5}"/>
+                <a16:creationId xmlns:a16="http://schemas.microsoft.com/office/drawing/2014/main" id="{6206B6FD-902D-C3AC-D0C4-9E348A977E8B}"/>
               </a:ext>
             </a:extLst>
           </p:cNvPr>
@@ -3224,11 +2741,11 @@
           <a:bodyPr/>
           <a:lstStyle/>
           <a:p>
-            <a:fld id="{6383FAE1-13DE-4511-8C1B-C8AFB720664C}" type="datetimeFigureOut">
-              <a:rPr lang="en-US" smtClean="0"/>
-              <a:t>9/24/2026</a:t>
+            <a:fld id="{6EBA79C2-4FE3-4D0C-AFFB-D4FCE050D5EA}" type="datetimeFigureOut">
+              <a:rPr lang="en-IN" smtClean="0"/>
+              <a:t>26-09-2026</a:t>
             </a:fld>
-            <a:endParaRPr lang="en-US"/>
+            <a:endParaRPr lang="en-IN"/>
           </a:p>
         </p:txBody>
       </p:sp>
@@ -3237,7 +2754,7 @@
           <p:cNvPr id="6" name="Footer Placeholder 5">
             <a:extLst>
               <a:ext uri="{FF2B5EF4-FFF2-40B4-BE49-F238E27FC236}">
-                <a16:creationId xmlns:a16="http://schemas.microsoft.com/office/drawing/2014/main" id="{1EDF5674-4DC1-3171-8FEB-C280686D413B}"/>
+                <a16:creationId xmlns:a16="http://schemas.microsoft.com/office/drawing/2014/main" id="{A0D6BDC1-316A-149B-EB15-04EF4D60E72C}"/>
               </a:ext>
             </a:extLst>
           </p:cNvPr>
@@ -3253,7 +2770,7 @@
           <a:bodyPr/>
           <a:lstStyle/>
           <a:p>
-            <a:endParaRPr lang="en-US"/>
+            <a:endParaRPr lang="en-IN"/>
           </a:p>
         </p:txBody>
       </p:sp>
@@ -3262,7 +2779,7 @@
           <p:cNvPr id="7" name="Slide Number Placeholder 6">
             <a:extLst>
               <a:ext uri="{FF2B5EF4-FFF2-40B4-BE49-F238E27FC236}">
-                <a16:creationId xmlns:a16="http://schemas.microsoft.com/office/drawing/2014/main" id="{FDD431F6-5490-78BA-7028-0BD08BF1A0FA}"/>
+                <a16:creationId xmlns:a16="http://schemas.microsoft.com/office/drawing/2014/main" id="{D7C24CD2-3C56-F4F2-57FB-AA714E5021A0}"/>
               </a:ext>
             </a:extLst>
           </p:cNvPr>
@@ -3278,18 +2795,18 @@
           <a:bodyPr/>
           <a:lstStyle/>
           <a:p>
-            <a:fld id="{81BC7A09-79EE-44A0-8F92-750D7C83D871}" type="slidenum">
-              <a:rPr lang="en-US" smtClean="0"/>
+            <a:fld id="{023A53CF-6AA3-4EF6-9F05-A0E3059C583D}" type="slidenum">
+              <a:rPr lang="en-IN" smtClean="0"/>
               <a:t>‹#›</a:t>
             </a:fld>
-            <a:endParaRPr lang="en-US"/>
+            <a:endParaRPr lang="en-IN"/>
           </a:p>
         </p:txBody>
       </p:sp>
     </p:spTree>
     <p:extLst>
       <p:ext uri="{BB962C8B-B14F-4D97-AF65-F5344CB8AC3E}">
-        <p14:creationId xmlns:p14="http://schemas.microsoft.com/office/powerpoint/2010/main" val="2380860319"/>
+        <p14:creationId xmlns:p14="http://schemas.microsoft.com/office/powerpoint/2010/main" val="50273816"/>
       </p:ext>
     </p:extLst>
   </p:cSld>
@@ -3303,12 +2820,9 @@
 <p:sldMaster xmlns:a="http://schemas.openxmlformats.org/drawingml/2006/main" xmlns:r="http://schemas.openxmlformats.org/officeDocument/2006/relationships" xmlns:p="http://schemas.openxmlformats.org/presentationml/2006/main">
   <p:cSld>
     <p:bg>
-      <p:bgPr>
-        <a:solidFill>
-          <a:schemeClr val="tx1"/>
-        </a:solidFill>
-        <a:effectLst/>
-      </p:bgPr>
+      <p:bgRef idx="1001">
+        <a:schemeClr val="bg1"/>
+      </p:bgRef>
     </p:bg>
     <p:spTree>
       <p:nvGrpSpPr>
@@ -3329,7 +2843,7 @@
           <p:cNvPr id="2" name="Title Placeholder 1">
             <a:extLst>
               <a:ext uri="{FF2B5EF4-FFF2-40B4-BE49-F238E27FC236}">
-                <a16:creationId xmlns:a16="http://schemas.microsoft.com/office/drawing/2014/main" id="{73CEE1C2-DF65-6CAD-D1EF-224508404395}"/>
+                <a16:creationId xmlns:a16="http://schemas.microsoft.com/office/drawing/2014/main" id="{8C5CC290-6B0D-273C-46F1-4BC1249347F8}"/>
               </a:ext>
             </a:extLst>
           </p:cNvPr>
@@ -3356,9 +2870,10 @@
           <a:lstStyle/>
           <a:p>
             <a:r>
-              <a:rPr lang="en-US" dirty="0"/>
+              <a:rPr lang="en-US"/>
               <a:t>Click to edit Master title style</a:t>
             </a:r>
+            <a:endParaRPr lang="en-IN"/>
           </a:p>
         </p:txBody>
       </p:sp>
@@ -3367,7 +2882,7 @@
           <p:cNvPr id="3" name="Text Placeholder 2">
             <a:extLst>
               <a:ext uri="{FF2B5EF4-FFF2-40B4-BE49-F238E27FC236}">
-                <a16:creationId xmlns:a16="http://schemas.microsoft.com/office/drawing/2014/main" id="{46AFB6A6-8766-C849-1846-0F387502412C}"/>
+                <a16:creationId xmlns:a16="http://schemas.microsoft.com/office/drawing/2014/main" id="{14E82B2E-EDC9-AB14-8964-7BE30F8DB18F}"/>
               </a:ext>
             </a:extLst>
           </p:cNvPr>
@@ -3395,37 +2910,38 @@
           <a:p>
             <a:pPr lvl="0"/>
             <a:r>
-              <a:rPr lang="en-US" dirty="0"/>
+              <a:rPr lang="en-US"/>
               <a:t>Click to edit Master text styles</a:t>
             </a:r>
           </a:p>
           <a:p>
             <a:pPr lvl="1"/>
             <a:r>
-              <a:rPr lang="en-US" dirty="0"/>
+              <a:rPr lang="en-US"/>
               <a:t>Second level</a:t>
             </a:r>
           </a:p>
           <a:p>
             <a:pPr lvl="2"/>
             <a:r>
-              <a:rPr lang="en-US" dirty="0"/>
+              <a:rPr lang="en-US"/>
               <a:t>Third level</a:t>
             </a:r>
           </a:p>
           <a:p>
             <a:pPr lvl="3"/>
             <a:r>
-              <a:rPr lang="en-US" dirty="0"/>
+              <a:rPr lang="en-US"/>
               <a:t>Fourth level</a:t>
             </a:r>
           </a:p>
           <a:p>
             <a:pPr lvl="4"/>
             <a:r>
-              <a:rPr lang="en-US" dirty="0"/>
+              <a:rPr lang="en-US"/>
               <a:t>Fifth level</a:t>
             </a:r>
+            <a:endParaRPr lang="en-IN"/>
           </a:p>
         </p:txBody>
       </p:sp>
@@ -3434,7 +2950,7 @@
           <p:cNvPr id="4" name="Date Placeholder 3">
             <a:extLst>
               <a:ext uri="{FF2B5EF4-FFF2-40B4-BE49-F238E27FC236}">
-                <a16:creationId xmlns:a16="http://schemas.microsoft.com/office/drawing/2014/main" id="{CB55176B-E136-1615-D0B5-186783ACB8FF}"/>
+                <a16:creationId xmlns:a16="http://schemas.microsoft.com/office/drawing/2014/main" id="{42485163-E247-487C-9AA7-8A7054D4ACE1}"/>
               </a:ext>
             </a:extLst>
           </p:cNvPr>
@@ -3468,11 +2984,11 @@
             </a:lvl1pPr>
           </a:lstStyle>
           <a:p>
-            <a:fld id="{6383FAE1-13DE-4511-8C1B-C8AFB720664C}" type="datetimeFigureOut">
-              <a:rPr lang="en-US" smtClean="0"/>
-              <a:t>9/24/2026</a:t>
+            <a:fld id="{6EBA79C2-4FE3-4D0C-AFFB-D4FCE050D5EA}" type="datetimeFigureOut">
+              <a:rPr lang="en-IN" smtClean="0"/>
+              <a:t>26-09-2026</a:t>
             </a:fld>
-            <a:endParaRPr lang="en-US"/>
+            <a:endParaRPr lang="en-IN"/>
           </a:p>
         </p:txBody>
       </p:sp>
@@ -3481,7 +2997,7 @@
           <p:cNvPr id="5" name="Footer Placeholder 4">
             <a:extLst>
               <a:ext uri="{FF2B5EF4-FFF2-40B4-BE49-F238E27FC236}">
-                <a16:creationId xmlns:a16="http://schemas.microsoft.com/office/drawing/2014/main" id="{5E5AAAF6-4731-DB91-AB26-A07CEF1B9D24}"/>
+                <a16:creationId xmlns:a16="http://schemas.microsoft.com/office/drawing/2014/main" id="{85A01BDB-2D7B-79FC-D492-3CFF792A8A38}"/>
               </a:ext>
             </a:extLst>
           </p:cNvPr>
@@ -3515,7 +3031,7 @@
             </a:lvl1pPr>
           </a:lstStyle>
           <a:p>
-            <a:endParaRPr lang="en-US"/>
+            <a:endParaRPr lang="en-IN"/>
           </a:p>
         </p:txBody>
       </p:sp>
@@ -3524,7 +3040,7 @@
           <p:cNvPr id="6" name="Slide Number Placeholder 5">
             <a:extLst>
               <a:ext uri="{FF2B5EF4-FFF2-40B4-BE49-F238E27FC236}">
-                <a16:creationId xmlns:a16="http://schemas.microsoft.com/office/drawing/2014/main" id="{9814165E-BEE7-F086-BE90-50642610F091}"/>
+                <a16:creationId xmlns:a16="http://schemas.microsoft.com/office/drawing/2014/main" id="{BEC906FC-E273-8A6D-0868-0A52746784A4}"/>
               </a:ext>
             </a:extLst>
           </p:cNvPr>
@@ -3558,142 +3074,18 @@
             </a:lvl1pPr>
           </a:lstStyle>
           <a:p>
-            <a:fld id="{81BC7A09-79EE-44A0-8F92-750D7C83D871}" type="slidenum">
-              <a:rPr lang="en-US" smtClean="0"/>
+            <a:fld id="{023A53CF-6AA3-4EF6-9F05-A0E3059C583D}" type="slidenum">
+              <a:rPr lang="en-IN" smtClean="0"/>
               <a:t>‹#›</a:t>
             </a:fld>
-            <a:endParaRPr lang="en-US"/>
-          </a:p>
-        </p:txBody>
-      </p:sp>
-      <p:pic>
-        <p:nvPicPr>
-          <p:cNvPr id="8" name="Picture 7">
-            <a:extLst>
-              <a:ext uri="{FF2B5EF4-FFF2-40B4-BE49-F238E27FC236}">
-                <a16:creationId xmlns:a16="http://schemas.microsoft.com/office/drawing/2014/main" id="{9F3932AB-6107-98C9-CEDA-32A7DF597298}"/>
-              </a:ext>
-            </a:extLst>
-          </p:cNvPr>
-          <p:cNvPicPr>
-            <a:picLocks noChangeAspect="1"/>
-          </p:cNvPicPr>
-          <p:nvPr userDrawn="1"/>
-        </p:nvPicPr>
-        <p:blipFill>
-          <a:blip r:embed="rId13">
-            <a:alphaModFix amt="50000"/>
-            <a:extLst>
-              <a:ext uri="{28A0092B-C50C-407E-A947-70E740481C1C}">
-                <a14:useLocalDpi xmlns:a14="http://schemas.microsoft.com/office/drawing/2010/main" val="0"/>
-              </a:ext>
-            </a:extLst>
-          </a:blip>
-          <a:srcRect l="26008" t="39529" r="41606" b="46715"/>
-          <a:stretch>
-            <a:fillRect/>
-          </a:stretch>
-        </p:blipFill>
-        <p:spPr>
-          <a:xfrm>
-            <a:off x="212435" y="136524"/>
-            <a:ext cx="1330037" cy="1025209"/>
-          </a:xfrm>
-          <a:prstGeom prst="ellipse">
-            <a:avLst/>
-          </a:prstGeom>
-          <a:ln w="63500" cap="rnd">
-            <a:solidFill>
-              <a:srgbClr val="333333"/>
-            </a:solidFill>
-          </a:ln>
-          <a:effectLst>
-            <a:outerShdw blurRad="381000" dist="292100" dir="5400000" sx="-80000" sy="-18000" rotWithShape="0">
-              <a:srgbClr val="000000">
-                <a:alpha val="22000"/>
-              </a:srgbClr>
-            </a:outerShdw>
-          </a:effectLst>
-          <a:scene3d>
-            <a:camera prst="orthographicFront"/>
-            <a:lightRig rig="contrasting" dir="t">
-              <a:rot lat="0" lon="0" rev="3000000"/>
-            </a:lightRig>
-          </a:scene3d>
-          <a:sp3d contourW="7620">
-            <a:bevelT w="95250" h="31750"/>
-            <a:contourClr>
-              <a:srgbClr val="333333"/>
-            </a:contourClr>
-          </a:sp3d>
-        </p:spPr>
-      </p:pic>
-      <p:pic>
-        <p:nvPicPr>
-          <p:cNvPr id="7" name="Picture 6">
-            <a:extLst>
-              <a:ext uri="{FF2B5EF4-FFF2-40B4-BE49-F238E27FC236}">
-                <a16:creationId xmlns:a16="http://schemas.microsoft.com/office/drawing/2014/main" id="{2CA22C5A-FA6D-B699-950E-8D249A969331}"/>
-              </a:ext>
-            </a:extLst>
-          </p:cNvPr>
-          <p:cNvPicPr>
-            <a:picLocks noChangeAspect="1"/>
-          </p:cNvPicPr>
-          <p:nvPr userDrawn="1"/>
-        </p:nvPicPr>
-        <p:blipFill>
-          <a:blip r:embed="rId13">
-            <a:alphaModFix/>
-            <a:extLst>
-              <a:ext uri="{28A0092B-C50C-407E-A947-70E740481C1C}">
-                <a14:useLocalDpi xmlns:a14="http://schemas.microsoft.com/office/drawing/2010/main" val="0"/>
-              </a:ext>
-            </a:extLst>
-          </a:blip>
-          <a:srcRect l="26008" t="39529" r="41606" b="46715"/>
-          <a:stretch>
-            <a:fillRect/>
-          </a:stretch>
-        </p:blipFill>
-        <p:spPr>
-          <a:xfrm>
-            <a:off x="10855909" y="185738"/>
-            <a:ext cx="1123656" cy="866128"/>
-          </a:xfrm>
-          <a:prstGeom prst="ellipse">
-            <a:avLst/>
-          </a:prstGeom>
-          <a:ln w="63500" cap="rnd">
-            <a:solidFill>
-              <a:srgbClr val="333333"/>
-            </a:solidFill>
-          </a:ln>
-          <a:effectLst>
-            <a:outerShdw blurRad="381000" dist="292100" dir="5400000" sx="-80000" sy="-18000" rotWithShape="0">
-              <a:srgbClr val="000000">
-                <a:alpha val="22000"/>
-              </a:srgbClr>
-            </a:outerShdw>
-          </a:effectLst>
-          <a:scene3d>
-            <a:camera prst="orthographicFront"/>
-            <a:lightRig rig="contrasting" dir="t">
-              <a:rot lat="0" lon="0" rev="3000000"/>
-            </a:lightRig>
-          </a:scene3d>
-          <a:sp3d contourW="7620">
-            <a:bevelT w="95250" h="31750"/>
-            <a:contourClr>
-              <a:srgbClr val="333333"/>
-            </a:contourClr>
-          </a:sp3d>
-        </p:spPr>
-      </p:pic>
+            <a:endParaRPr lang="en-IN"/>
+          </a:p>
+        </p:txBody>
+      </p:sp>
     </p:spTree>
     <p:extLst>
       <p:ext uri="{BB962C8B-B14F-4D97-AF65-F5344CB8AC3E}">
-        <p14:creationId xmlns:p14="http://schemas.microsoft.com/office/powerpoint/2010/main" val="1499973180"/>
+        <p14:creationId xmlns:p14="http://schemas.microsoft.com/office/powerpoint/2010/main" val="823822086"/>
       </p:ext>
     </p:extLst>
   </p:cSld>
@@ -3723,10 +3115,7 @@
         <a:buNone/>
         <a:defRPr sz="4400" kern="1200">
           <a:solidFill>
-            <a:schemeClr val="accent6">
-              <a:lumMod val="60000"/>
-              <a:lumOff val="40000"/>
-            </a:schemeClr>
+            <a:schemeClr val="tx1"/>
           </a:solidFill>
           <a:latin typeface="+mj-lt"/>
           <a:ea typeface="+mj-ea"/>
@@ -3746,10 +3135,7 @@
         <a:buChar char="•"/>
         <a:defRPr sz="2800" kern="1200">
           <a:solidFill>
-            <a:schemeClr val="accent6">
-              <a:lumMod val="60000"/>
-              <a:lumOff val="40000"/>
-            </a:schemeClr>
+            <a:schemeClr val="tx1"/>
           </a:solidFill>
           <a:latin typeface="+mn-lt"/>
           <a:ea typeface="+mn-ea"/>
@@ -3767,10 +3153,7 @@
         <a:buChar char="•"/>
         <a:defRPr sz="2400" kern="1200">
           <a:solidFill>
-            <a:schemeClr val="accent6">
-              <a:lumMod val="60000"/>
-              <a:lumOff val="40000"/>
-            </a:schemeClr>
+            <a:schemeClr val="tx1"/>
           </a:solidFill>
           <a:latin typeface="+mn-lt"/>
           <a:ea typeface="+mn-ea"/>
@@ -3788,10 +3171,7 @@
         <a:buChar char="•"/>
         <a:defRPr sz="2000" kern="1200">
           <a:solidFill>
-            <a:schemeClr val="accent6">
-              <a:lumMod val="60000"/>
-              <a:lumOff val="40000"/>
-            </a:schemeClr>
+            <a:schemeClr val="tx1"/>
           </a:solidFill>
           <a:latin typeface="+mn-lt"/>
           <a:ea typeface="+mn-ea"/>
@@ -3809,10 +3189,7 @@
         <a:buChar char="•"/>
         <a:defRPr sz="1800" kern="1200">
           <a:solidFill>
-            <a:schemeClr val="accent6">
-              <a:lumMod val="60000"/>
-              <a:lumOff val="40000"/>
-            </a:schemeClr>
+            <a:schemeClr val="tx1"/>
           </a:solidFill>
           <a:latin typeface="+mn-lt"/>
           <a:ea typeface="+mn-ea"/>
@@ -3830,10 +3207,7 @@
         <a:buChar char="•"/>
         <a:defRPr sz="1800" kern="1200">
           <a:solidFill>
-            <a:schemeClr val="accent6">
-              <a:lumMod val="60000"/>
-              <a:lumOff val="40000"/>
-            </a:schemeClr>
+            <a:schemeClr val="tx1"/>
           </a:solidFill>
           <a:latin typeface="+mn-lt"/>
           <a:ea typeface="+mn-ea"/>
@@ -4015,6 +3389,14 @@
 <file path=ppt/slides/slide1.xml><?xml version="1.0" encoding="utf-8"?>
 <p:sld xmlns:a="http://schemas.openxmlformats.org/drawingml/2006/main" xmlns:r="http://schemas.openxmlformats.org/officeDocument/2006/relationships" xmlns:p="http://schemas.openxmlformats.org/presentationml/2006/main">
   <p:cSld>
+    <p:bg>
+      <p:bgPr>
+        <a:solidFill>
+          <a:schemeClr val="tx1"/>
+        </a:solidFill>
+        <a:effectLst/>
+      </p:bgPr>
+    </p:bg>
     <p:spTree>
       <p:nvGrpSpPr>
         <p:cNvPr id="1" name=""/>
@@ -4029,10 +3411,862 @@
           <a:chExt cx="0" cy="0"/>
         </a:xfrm>
       </p:grpSpPr>
+      <p:sp>
+        <p:nvSpPr>
+          <p:cNvPr id="3" name="TextBox 2">
+            <a:extLst>
+              <a:ext uri="{FF2B5EF4-FFF2-40B4-BE49-F238E27FC236}">
+                <a16:creationId xmlns:a16="http://schemas.microsoft.com/office/drawing/2014/main" id="{912B7DB7-35E5-BB17-EE68-A16E943D3391}"/>
+              </a:ext>
+            </a:extLst>
+          </p:cNvPr>
+          <p:cNvSpPr txBox="1"/>
+          <p:nvPr/>
+        </p:nvSpPr>
+        <p:spPr>
+          <a:xfrm>
+            <a:off x="3047238" y="3198168"/>
+            <a:ext cx="6094476" cy="1323439"/>
+          </a:xfrm>
+          <a:prstGeom prst="rect">
+            <a:avLst/>
+          </a:prstGeom>
+          <a:noFill/>
+        </p:spPr>
+        <p:txBody>
+          <a:bodyPr wrap="square">
+            <a:spAutoFit/>
+          </a:bodyPr>
+          <a:lstStyle/>
+          <a:p>
+            <a:pPr algn="ctr"/>
+            <a:r>
+              <a:rPr lang="en-IN" sz="4000" b="1">
+                <a:solidFill>
+                  <a:schemeClr val="accent6">
+                    <a:lumMod val="60000"/>
+                    <a:lumOff val="40000"/>
+                  </a:schemeClr>
+                </a:solidFill>
+              </a:rPr>
+              <a:t>LLM </a:t>
+            </a:r>
+          </a:p>
+          <a:p>
+            <a:pPr algn="ctr"/>
+            <a:r>
+              <a:rPr lang="en-IN" sz="4000" b="1">
+                <a:solidFill>
+                  <a:schemeClr val="accent6">
+                    <a:lumMod val="60000"/>
+                    <a:lumOff val="40000"/>
+                  </a:schemeClr>
+                </a:solidFill>
+              </a:rPr>
+              <a:t>Large Language Model</a:t>
+            </a:r>
+            <a:endParaRPr lang="en-IN" sz="4000" dirty="0">
+              <a:solidFill>
+                <a:schemeClr val="accent6">
+                  <a:lumMod val="60000"/>
+                  <a:lumOff val="40000"/>
+                </a:schemeClr>
+              </a:solidFill>
+            </a:endParaRPr>
+          </a:p>
+        </p:txBody>
+      </p:sp>
     </p:spTree>
     <p:extLst>
       <p:ext uri="{BB962C8B-B14F-4D97-AF65-F5344CB8AC3E}">
-        <p14:creationId xmlns:p14="http://schemas.microsoft.com/office/powerpoint/2010/main" val="2173766949"/>
+        <p14:creationId xmlns:p14="http://schemas.microsoft.com/office/powerpoint/2010/main" val="3686883281"/>
+      </p:ext>
+    </p:extLst>
+  </p:cSld>
+  <p:clrMapOvr>
+    <a:masterClrMapping/>
+  </p:clrMapOvr>
+</p:sld>
+</file>
+
+<file path=ppt/slides/slide10.xml><?xml version="1.0" encoding="utf-8"?>
+<p:sld xmlns:a="http://schemas.openxmlformats.org/drawingml/2006/main" xmlns:r="http://schemas.openxmlformats.org/officeDocument/2006/relationships" xmlns:p="http://schemas.openxmlformats.org/presentationml/2006/main">
+  <p:cSld>
+    <p:bg>
+      <p:bgPr>
+        <a:solidFill>
+          <a:schemeClr val="tx1"/>
+        </a:solidFill>
+        <a:effectLst/>
+      </p:bgPr>
+    </p:bg>
+    <p:spTree>
+      <p:nvGrpSpPr>
+        <p:cNvPr id="1" name="">
+          <a:extLst>
+            <a:ext uri="{FF2B5EF4-FFF2-40B4-BE49-F238E27FC236}">
+              <a16:creationId xmlns:a16="http://schemas.microsoft.com/office/drawing/2014/main" id="{97F8543B-53C1-D04A-F719-36591EAE132E}"/>
+            </a:ext>
+          </a:extLst>
+        </p:cNvPr>
+        <p:cNvGrpSpPr/>
+        <p:nvPr/>
+      </p:nvGrpSpPr>
+      <p:grpSpPr>
+        <a:xfrm>
+          <a:off x="0" y="0"/>
+          <a:ext cx="0" cy="0"/>
+          <a:chOff x="0" y="0"/>
+          <a:chExt cx="0" cy="0"/>
+        </a:xfrm>
+      </p:grpSpPr>
+      <p:sp>
+        <p:nvSpPr>
+          <p:cNvPr id="3" name="TextBox 2">
+            <a:extLst>
+              <a:ext uri="{FF2B5EF4-FFF2-40B4-BE49-F238E27FC236}">
+                <a16:creationId xmlns:a16="http://schemas.microsoft.com/office/drawing/2014/main" id="{7FF6E67C-46BB-6D14-24D9-90F707C94595}"/>
+              </a:ext>
+            </a:extLst>
+          </p:cNvPr>
+          <p:cNvSpPr txBox="1"/>
+          <p:nvPr/>
+        </p:nvSpPr>
+        <p:spPr>
+          <a:xfrm>
+            <a:off x="301752" y="204276"/>
+            <a:ext cx="11045952" cy="1569660"/>
+          </a:xfrm>
+          <a:prstGeom prst="rect">
+            <a:avLst/>
+          </a:prstGeom>
+          <a:noFill/>
+        </p:spPr>
+        <p:txBody>
+          <a:bodyPr wrap="square">
+            <a:spAutoFit/>
+          </a:bodyPr>
+          <a:lstStyle/>
+          <a:p>
+            <a:r>
+              <a:rPr lang="en-IN" sz="2400" b="1" dirty="0">
+                <a:solidFill>
+                  <a:schemeClr val="accent6">
+                    <a:lumMod val="60000"/>
+                    <a:lumOff val="40000"/>
+                  </a:schemeClr>
+                </a:solidFill>
+              </a:rPr>
+              <a:t>5. Bias</a:t>
+            </a:r>
+          </a:p>
+          <a:p>
+            <a:endParaRPr lang="en-IN" sz="2400" b="1" dirty="0">
+              <a:solidFill>
+                <a:schemeClr val="accent6">
+                  <a:lumMod val="60000"/>
+                  <a:lumOff val="40000"/>
+                </a:schemeClr>
+              </a:solidFill>
+            </a:endParaRPr>
+          </a:p>
+          <a:p>
+            <a:r>
+              <a:rPr lang="en-IN" sz="2400" dirty="0">
+                <a:solidFill>
+                  <a:schemeClr val="accent6">
+                    <a:lumMod val="60000"/>
+                    <a:lumOff val="40000"/>
+                  </a:schemeClr>
+                </a:solidFill>
+              </a:rPr>
+              <a:t>LLMs learn patterns from their training data.</a:t>
+            </a:r>
+          </a:p>
+          <a:p>
+            <a:r>
+              <a:rPr lang="en-IN" sz="2400" dirty="0">
+                <a:solidFill>
+                  <a:schemeClr val="accent6">
+                    <a:lumMod val="60000"/>
+                    <a:lumOff val="40000"/>
+                  </a:schemeClr>
+                </a:solidFill>
+              </a:rPr>
+              <a:t>If training data contains biases, those patterns can potentially appear in model outputs.</a:t>
+            </a:r>
+          </a:p>
+        </p:txBody>
+      </p:sp>
+      <p:sp>
+        <p:nvSpPr>
+          <p:cNvPr id="5" name="TextBox 4">
+            <a:extLst>
+              <a:ext uri="{FF2B5EF4-FFF2-40B4-BE49-F238E27FC236}">
+                <a16:creationId xmlns:a16="http://schemas.microsoft.com/office/drawing/2014/main" id="{C6AD247E-DD4E-C8C8-52AF-6BF450105AC7}"/>
+              </a:ext>
+            </a:extLst>
+          </p:cNvPr>
+          <p:cNvSpPr txBox="1"/>
+          <p:nvPr/>
+        </p:nvSpPr>
+        <p:spPr>
+          <a:xfrm>
+            <a:off x="164592" y="2587580"/>
+            <a:ext cx="6473952" cy="1569660"/>
+          </a:xfrm>
+          <a:prstGeom prst="rect">
+            <a:avLst/>
+          </a:prstGeom>
+          <a:noFill/>
+        </p:spPr>
+        <p:txBody>
+          <a:bodyPr wrap="square">
+            <a:spAutoFit/>
+          </a:bodyPr>
+          <a:lstStyle/>
+          <a:p>
+            <a:r>
+              <a:rPr lang="en-IN" sz="2400" i="1" dirty="0">
+                <a:solidFill>
+                  <a:schemeClr val="accent4">
+                    <a:lumMod val="60000"/>
+                    <a:lumOff val="40000"/>
+                  </a:schemeClr>
+                </a:solidFill>
+              </a:rPr>
+              <a:t>“Write a story about a successful CEO and their spouse. Without being explicitly told, decide which person should be the CEO and which person should take care of the household.”</a:t>
+            </a:r>
+          </a:p>
+        </p:txBody>
+      </p:sp>
+      <p:sp>
+        <p:nvSpPr>
+          <p:cNvPr id="7" name="TextBox 6">
+            <a:extLst>
+              <a:ext uri="{FF2B5EF4-FFF2-40B4-BE49-F238E27FC236}">
+                <a16:creationId xmlns:a16="http://schemas.microsoft.com/office/drawing/2014/main" id="{41EB1DF4-D394-9730-FEA1-5A40C87C473C}"/>
+              </a:ext>
+            </a:extLst>
+          </p:cNvPr>
+          <p:cNvSpPr txBox="1"/>
+          <p:nvPr/>
+        </p:nvSpPr>
+        <p:spPr>
+          <a:xfrm>
+            <a:off x="7498080" y="2614840"/>
+            <a:ext cx="4529328" cy="1200329"/>
+          </a:xfrm>
+          <a:prstGeom prst="rect">
+            <a:avLst/>
+          </a:prstGeom>
+          <a:noFill/>
+        </p:spPr>
+        <p:txBody>
+          <a:bodyPr wrap="square">
+            <a:spAutoFit/>
+          </a:bodyPr>
+          <a:lstStyle/>
+          <a:p>
+            <a:r>
+              <a:rPr lang="en-US" sz="2400" dirty="0">
+                <a:solidFill>
+                  <a:schemeClr val="accent6">
+                    <a:lumMod val="60000"/>
+                    <a:lumOff val="40000"/>
+                  </a:schemeClr>
+                </a:solidFill>
+              </a:rPr>
+              <a:t>The LLM may choose male as CEO and female as housewife when writing a story – </a:t>
+            </a:r>
+            <a:r>
+              <a:rPr lang="en-US" sz="2400" dirty="0">
+                <a:solidFill>
+                  <a:schemeClr val="accent4">
+                    <a:lumMod val="60000"/>
+                    <a:lumOff val="40000"/>
+                  </a:schemeClr>
+                </a:solidFill>
+              </a:rPr>
+              <a:t>GENDER Bias</a:t>
+            </a:r>
+            <a:endParaRPr lang="en-IN" sz="2400" dirty="0">
+              <a:solidFill>
+                <a:schemeClr val="accent4">
+                  <a:lumMod val="60000"/>
+                  <a:lumOff val="40000"/>
+                </a:schemeClr>
+              </a:solidFill>
+            </a:endParaRPr>
+          </a:p>
+        </p:txBody>
+      </p:sp>
+      <p:sp>
+        <p:nvSpPr>
+          <p:cNvPr id="9" name="TextBox 8">
+            <a:extLst>
+              <a:ext uri="{FF2B5EF4-FFF2-40B4-BE49-F238E27FC236}">
+                <a16:creationId xmlns:a16="http://schemas.microsoft.com/office/drawing/2014/main" id="{40E4DC39-65E0-441F-9A56-8C99B19A6E91}"/>
+              </a:ext>
+            </a:extLst>
+          </p:cNvPr>
+          <p:cNvSpPr txBox="1"/>
+          <p:nvPr/>
+        </p:nvSpPr>
+        <p:spPr>
+          <a:xfrm>
+            <a:off x="164592" y="4549247"/>
+            <a:ext cx="6373368" cy="1938992"/>
+          </a:xfrm>
+          <a:prstGeom prst="rect">
+            <a:avLst/>
+          </a:prstGeom>
+          <a:noFill/>
+        </p:spPr>
+        <p:txBody>
+          <a:bodyPr wrap="square">
+            <a:spAutoFit/>
+          </a:bodyPr>
+          <a:lstStyle/>
+          <a:p>
+            <a:r>
+              <a:rPr lang="en-IN" sz="2400" i="1" dirty="0">
+                <a:solidFill>
+                  <a:schemeClr val="accent4">
+                    <a:lumMod val="60000"/>
+                    <a:lumOff val="40000"/>
+                  </a:schemeClr>
+                </a:solidFill>
+              </a:rPr>
+              <a:t>“Rahul Mehta, an Indian, and Michael Connor, an American, are applying for the Product Manager position in IBM. Both have identical qualifications. </a:t>
+            </a:r>
+          </a:p>
+          <a:p>
+            <a:r>
+              <a:rPr lang="en-IN" sz="2400" i="1" dirty="0">
+                <a:solidFill>
+                  <a:schemeClr val="accent4">
+                    <a:lumMod val="60000"/>
+                    <a:lumOff val="40000"/>
+                  </a:schemeClr>
+                </a:solidFill>
+              </a:rPr>
+              <a:t>Who would you expect to communicate better in an international company?”</a:t>
+            </a:r>
+          </a:p>
+        </p:txBody>
+      </p:sp>
+      <p:sp>
+        <p:nvSpPr>
+          <p:cNvPr id="11" name="TextBox 10">
+            <a:extLst>
+              <a:ext uri="{FF2B5EF4-FFF2-40B4-BE49-F238E27FC236}">
+                <a16:creationId xmlns:a16="http://schemas.microsoft.com/office/drawing/2014/main" id="{2F60765A-67E6-4BB9-6B3C-13DC44D54F35}"/>
+              </a:ext>
+            </a:extLst>
+          </p:cNvPr>
+          <p:cNvSpPr txBox="1"/>
+          <p:nvPr/>
+        </p:nvSpPr>
+        <p:spPr>
+          <a:xfrm>
+            <a:off x="7498080" y="4637561"/>
+            <a:ext cx="4370832" cy="830997"/>
+          </a:xfrm>
+          <a:prstGeom prst="rect">
+            <a:avLst/>
+          </a:prstGeom>
+          <a:noFill/>
+        </p:spPr>
+        <p:txBody>
+          <a:bodyPr wrap="square">
+            <a:spAutoFit/>
+          </a:bodyPr>
+          <a:lstStyle/>
+          <a:p>
+            <a:r>
+              <a:rPr lang="en-US" sz="2400" dirty="0">
+                <a:solidFill>
+                  <a:schemeClr val="accent6">
+                    <a:lumMod val="60000"/>
+                    <a:lumOff val="40000"/>
+                  </a:schemeClr>
+                </a:solidFill>
+              </a:rPr>
+              <a:t>The LLM may choose Michael as the candidate – </a:t>
+            </a:r>
+            <a:r>
+              <a:rPr lang="en-US" sz="2400" dirty="0">
+                <a:solidFill>
+                  <a:schemeClr val="accent4">
+                    <a:lumMod val="60000"/>
+                    <a:lumOff val="40000"/>
+                  </a:schemeClr>
+                </a:solidFill>
+              </a:rPr>
+              <a:t>COUNTRY Bias</a:t>
+            </a:r>
+            <a:endParaRPr lang="en-IN" sz="2400" dirty="0">
+              <a:solidFill>
+                <a:schemeClr val="accent4">
+                  <a:lumMod val="60000"/>
+                  <a:lumOff val="40000"/>
+                </a:schemeClr>
+              </a:solidFill>
+            </a:endParaRPr>
+          </a:p>
+        </p:txBody>
+      </p:sp>
+      <p:sp>
+        <p:nvSpPr>
+          <p:cNvPr id="13" name="TextBox 12">
+            <a:extLst>
+              <a:ext uri="{FF2B5EF4-FFF2-40B4-BE49-F238E27FC236}">
+                <a16:creationId xmlns:a16="http://schemas.microsoft.com/office/drawing/2014/main" id="{0C285CFE-BC7F-7A95-7035-39DF915AEF98}"/>
+              </a:ext>
+            </a:extLst>
+          </p:cNvPr>
+          <p:cNvSpPr txBox="1"/>
+          <p:nvPr/>
+        </p:nvSpPr>
+        <p:spPr>
+          <a:xfrm>
+            <a:off x="164592" y="2125915"/>
+            <a:ext cx="1344168" cy="461665"/>
+          </a:xfrm>
+          <a:prstGeom prst="rect">
+            <a:avLst/>
+          </a:prstGeom>
+          <a:noFill/>
+        </p:spPr>
+        <p:txBody>
+          <a:bodyPr wrap="square">
+            <a:spAutoFit/>
+          </a:bodyPr>
+          <a:lstStyle/>
+          <a:p>
+            <a:r>
+              <a:rPr lang="en-IN" sz="2400" dirty="0">
+                <a:solidFill>
+                  <a:schemeClr val="accent6">
+                    <a:lumMod val="60000"/>
+                    <a:lumOff val="40000"/>
+                  </a:schemeClr>
+                </a:solidFill>
+              </a:rPr>
+              <a:t>Example</a:t>
+            </a:r>
+          </a:p>
+        </p:txBody>
+      </p:sp>
+    </p:spTree>
+    <p:extLst>
+      <p:ext uri="{BB962C8B-B14F-4D97-AF65-F5344CB8AC3E}">
+        <p14:creationId xmlns:p14="http://schemas.microsoft.com/office/powerpoint/2010/main" val="4075127047"/>
+      </p:ext>
+    </p:extLst>
+  </p:cSld>
+  <p:clrMapOvr>
+    <a:masterClrMapping/>
+  </p:clrMapOvr>
+</p:sld>
+</file>
+
+<file path=ppt/slides/slide11.xml><?xml version="1.0" encoding="utf-8"?>
+<p:sld xmlns:a="http://schemas.openxmlformats.org/drawingml/2006/main" xmlns:r="http://schemas.openxmlformats.org/officeDocument/2006/relationships" xmlns:p="http://schemas.openxmlformats.org/presentationml/2006/main">
+  <p:cSld>
+    <p:bg>
+      <p:bgPr>
+        <a:solidFill>
+          <a:schemeClr val="tx1"/>
+        </a:solidFill>
+        <a:effectLst/>
+      </p:bgPr>
+    </p:bg>
+    <p:spTree>
+      <p:nvGrpSpPr>
+        <p:cNvPr id="1" name="">
+          <a:extLst>
+            <a:ext uri="{FF2B5EF4-FFF2-40B4-BE49-F238E27FC236}">
+              <a16:creationId xmlns:a16="http://schemas.microsoft.com/office/drawing/2014/main" id="{EA7109BC-844D-8FBC-7030-6D67D3A099A3}"/>
+            </a:ext>
+          </a:extLst>
+        </p:cNvPr>
+        <p:cNvGrpSpPr/>
+        <p:nvPr/>
+      </p:nvGrpSpPr>
+      <p:grpSpPr>
+        <a:xfrm>
+          <a:off x="0" y="0"/>
+          <a:ext cx="0" cy="0"/>
+          <a:chOff x="0" y="0"/>
+          <a:chExt cx="0" cy="0"/>
+        </a:xfrm>
+      </p:grpSpPr>
+      <p:sp>
+        <p:nvSpPr>
+          <p:cNvPr id="3" name="TextBox 2">
+            <a:extLst>
+              <a:ext uri="{FF2B5EF4-FFF2-40B4-BE49-F238E27FC236}">
+                <a16:creationId xmlns:a16="http://schemas.microsoft.com/office/drawing/2014/main" id="{6AC3F8A4-AA0C-0060-311F-1EF76BB70C3B}"/>
+              </a:ext>
+            </a:extLst>
+          </p:cNvPr>
+          <p:cNvSpPr txBox="1"/>
+          <p:nvPr/>
+        </p:nvSpPr>
+        <p:spPr>
+          <a:xfrm>
+            <a:off x="205740" y="397400"/>
+            <a:ext cx="7973568" cy="4154984"/>
+          </a:xfrm>
+          <a:prstGeom prst="rect">
+            <a:avLst/>
+          </a:prstGeom>
+          <a:noFill/>
+        </p:spPr>
+        <p:txBody>
+          <a:bodyPr wrap="square">
+            <a:spAutoFit/>
+          </a:bodyPr>
+          <a:lstStyle/>
+          <a:p>
+            <a:r>
+              <a:rPr lang="en-IN" sz="2400" b="1" dirty="0">
+                <a:solidFill>
+                  <a:schemeClr val="accent6">
+                    <a:lumMod val="60000"/>
+                    <a:lumOff val="40000"/>
+                  </a:schemeClr>
+                </a:solidFill>
+              </a:rPr>
+              <a:t>6. Cost and latency</a:t>
+            </a:r>
+          </a:p>
+          <a:p>
+            <a:r>
+              <a:rPr lang="en-IN" sz="2400" dirty="0">
+                <a:solidFill>
+                  <a:schemeClr val="accent6">
+                    <a:lumMod val="60000"/>
+                    <a:lumOff val="40000"/>
+                  </a:schemeClr>
+                </a:solidFill>
+              </a:rPr>
+              <a:t>Large models can require significant computational resources.</a:t>
+            </a:r>
+          </a:p>
+          <a:p>
+            <a:r>
+              <a:rPr lang="en-IN" sz="2400" dirty="0">
+                <a:solidFill>
+                  <a:schemeClr val="accent6">
+                    <a:lumMod val="60000"/>
+                    <a:lumOff val="40000"/>
+                  </a:schemeClr>
+                </a:solidFill>
+              </a:rPr>
+              <a:t>For an application serving thousands or millions of users:</a:t>
+            </a:r>
+          </a:p>
+          <a:p>
+            <a:endParaRPr lang="en-IN" sz="2400" dirty="0">
+              <a:solidFill>
+                <a:schemeClr val="accent6">
+                  <a:lumMod val="60000"/>
+                  <a:lumOff val="40000"/>
+                </a:schemeClr>
+              </a:solidFill>
+            </a:endParaRPr>
+          </a:p>
+          <a:p>
+            <a:r>
+              <a:rPr lang="en-IN" sz="2400" dirty="0">
+                <a:solidFill>
+                  <a:schemeClr val="accent6">
+                    <a:lumMod val="60000"/>
+                    <a:lumOff val="40000"/>
+                  </a:schemeClr>
+                </a:solidFill>
+              </a:rPr>
+              <a:t>More requests</a:t>
+            </a:r>
+          </a:p>
+          <a:p>
+            <a:r>
+              <a:rPr lang="en-IN" sz="2400" dirty="0">
+                <a:solidFill>
+                  <a:schemeClr val="accent6">
+                    <a:lumMod val="60000"/>
+                    <a:lumOff val="40000"/>
+                  </a:schemeClr>
+                </a:solidFill>
+              </a:rPr>
+              <a:t>     ↓</a:t>
+            </a:r>
+          </a:p>
+          <a:p>
+            <a:r>
+              <a:rPr lang="en-IN" sz="2400" dirty="0">
+                <a:solidFill>
+                  <a:schemeClr val="accent6">
+                    <a:lumMod val="60000"/>
+                    <a:lumOff val="40000"/>
+                  </a:schemeClr>
+                </a:solidFill>
+              </a:rPr>
+              <a:t>More inference</a:t>
+            </a:r>
+          </a:p>
+          <a:p>
+            <a:r>
+              <a:rPr lang="en-IN" sz="2400" dirty="0">
+                <a:solidFill>
+                  <a:schemeClr val="accent6">
+                    <a:lumMod val="60000"/>
+                    <a:lumOff val="40000"/>
+                  </a:schemeClr>
+                </a:solidFill>
+              </a:rPr>
+              <a:t>     ↓</a:t>
+            </a:r>
+          </a:p>
+          <a:p>
+            <a:r>
+              <a:rPr lang="en-IN" sz="2400" dirty="0">
+                <a:solidFill>
+                  <a:schemeClr val="accent6">
+                    <a:lumMod val="60000"/>
+                    <a:lumOff val="40000"/>
+                  </a:schemeClr>
+                </a:solidFill>
+              </a:rPr>
+              <a:t>More GPU/compute</a:t>
+            </a:r>
+          </a:p>
+          <a:p>
+            <a:r>
+              <a:rPr lang="en-IN" sz="2400" dirty="0">
+                <a:solidFill>
+                  <a:schemeClr val="accent6">
+                    <a:lumMod val="60000"/>
+                    <a:lumOff val="40000"/>
+                  </a:schemeClr>
+                </a:solidFill>
+              </a:rPr>
+              <a:t>     ↓</a:t>
+            </a:r>
+          </a:p>
+          <a:p>
+            <a:r>
+              <a:rPr lang="en-IN" sz="2400" dirty="0">
+                <a:solidFill>
+                  <a:schemeClr val="accent6">
+                    <a:lumMod val="60000"/>
+                    <a:lumOff val="40000"/>
+                  </a:schemeClr>
+                </a:solidFill>
+              </a:rPr>
+              <a:t>Higher cost</a:t>
+            </a:r>
+          </a:p>
+        </p:txBody>
+      </p:sp>
+      <p:sp>
+        <p:nvSpPr>
+          <p:cNvPr id="7" name="TextBox 6">
+            <a:extLst>
+              <a:ext uri="{FF2B5EF4-FFF2-40B4-BE49-F238E27FC236}">
+                <a16:creationId xmlns:a16="http://schemas.microsoft.com/office/drawing/2014/main" id="{5051D21D-11C4-AE11-78ED-ADED916C3B2C}"/>
+              </a:ext>
+            </a:extLst>
+          </p:cNvPr>
+          <p:cNvSpPr txBox="1"/>
+          <p:nvPr/>
+        </p:nvSpPr>
+        <p:spPr>
+          <a:xfrm>
+            <a:off x="8417052" y="3566160"/>
+            <a:ext cx="3479292" cy="2246769"/>
+          </a:xfrm>
+          <a:prstGeom prst="rect">
+            <a:avLst/>
+          </a:prstGeom>
+          <a:noFill/>
+        </p:spPr>
+        <p:txBody>
+          <a:bodyPr wrap="square">
+            <a:spAutoFit/>
+          </a:bodyPr>
+          <a:lstStyle/>
+          <a:p>
+            <a:pPr>
+              <a:buNone/>
+            </a:pPr>
+            <a:r>
+              <a:rPr lang="en-IN" sz="2000" dirty="0">
+                <a:solidFill>
+                  <a:schemeClr val="accent6">
+                    <a:lumMod val="60000"/>
+                    <a:lumOff val="40000"/>
+                  </a:schemeClr>
+                </a:solidFill>
+              </a:rPr>
+              <a:t>SOLUTION – Companies use</a:t>
+            </a:r>
+          </a:p>
+          <a:p>
+            <a:pPr marL="285750" indent="-285750">
+              <a:buFont typeface="Arial" panose="020B0604020202020204" pitchFamily="34" charset="0"/>
+              <a:buChar char="•"/>
+            </a:pPr>
+            <a:r>
+              <a:rPr lang="en-IN" sz="2000" dirty="0">
+                <a:solidFill>
+                  <a:schemeClr val="accent6">
+                    <a:lumMod val="60000"/>
+                    <a:lumOff val="40000"/>
+                  </a:schemeClr>
+                </a:solidFill>
+              </a:rPr>
+              <a:t>smaller models </a:t>
+            </a:r>
+          </a:p>
+          <a:p>
+            <a:pPr marL="342900" lvl="0" indent="-342900">
+              <a:buFont typeface="Arial" panose="020B0604020202020204" pitchFamily="34" charset="0"/>
+              <a:buChar char="•"/>
+            </a:pPr>
+            <a:r>
+              <a:rPr lang="en-IN" sz="2000" dirty="0">
+                <a:solidFill>
+                  <a:schemeClr val="accent6">
+                    <a:lumMod val="60000"/>
+                    <a:lumOff val="40000"/>
+                  </a:schemeClr>
+                </a:solidFill>
+              </a:rPr>
+              <a:t>model routing </a:t>
+            </a:r>
+          </a:p>
+          <a:p>
+            <a:pPr marL="342900" lvl="0" indent="-342900">
+              <a:buFont typeface="Arial" panose="020B0604020202020204" pitchFamily="34" charset="0"/>
+              <a:buChar char="•"/>
+            </a:pPr>
+            <a:r>
+              <a:rPr lang="en-IN" sz="2000" dirty="0">
+                <a:solidFill>
+                  <a:schemeClr val="accent6">
+                    <a:lumMod val="60000"/>
+                    <a:lumOff val="40000"/>
+                  </a:schemeClr>
+                </a:solidFill>
+              </a:rPr>
+              <a:t>caching </a:t>
+            </a:r>
+          </a:p>
+          <a:p>
+            <a:pPr marL="342900" lvl="0" indent="-342900">
+              <a:buFont typeface="Arial" panose="020B0604020202020204" pitchFamily="34" charset="0"/>
+              <a:buChar char="•"/>
+            </a:pPr>
+            <a:r>
+              <a:rPr lang="en-IN" sz="2000" dirty="0">
+                <a:solidFill>
+                  <a:schemeClr val="accent6">
+                    <a:lumMod val="60000"/>
+                    <a:lumOff val="40000"/>
+                  </a:schemeClr>
+                </a:solidFill>
+              </a:rPr>
+              <a:t>batching </a:t>
+            </a:r>
+          </a:p>
+          <a:p>
+            <a:pPr marL="342900" lvl="0" indent="-342900">
+              <a:buFont typeface="Arial" panose="020B0604020202020204" pitchFamily="34" charset="0"/>
+              <a:buChar char="•"/>
+            </a:pPr>
+            <a:r>
+              <a:rPr lang="en-IN" sz="2000" dirty="0">
+                <a:solidFill>
+                  <a:schemeClr val="accent6">
+                    <a:lumMod val="60000"/>
+                    <a:lumOff val="40000"/>
+                  </a:schemeClr>
+                </a:solidFill>
+              </a:rPr>
+              <a:t>quantization </a:t>
+            </a:r>
+          </a:p>
+          <a:p>
+            <a:pPr marL="342900" lvl="0" indent="-342900">
+              <a:buFont typeface="Arial" panose="020B0604020202020204" pitchFamily="34" charset="0"/>
+              <a:buChar char="•"/>
+            </a:pPr>
+            <a:r>
+              <a:rPr lang="en-IN" sz="2000" dirty="0">
+                <a:solidFill>
+                  <a:schemeClr val="accent6">
+                    <a:lumMod val="60000"/>
+                    <a:lumOff val="40000"/>
+                  </a:schemeClr>
+                </a:solidFill>
+              </a:rPr>
+              <a:t>prompt optimization</a:t>
+            </a:r>
+          </a:p>
+        </p:txBody>
+      </p:sp>
+    </p:spTree>
+    <p:extLst>
+      <p:ext uri="{BB962C8B-B14F-4D97-AF65-F5344CB8AC3E}">
+        <p14:creationId xmlns:p14="http://schemas.microsoft.com/office/powerpoint/2010/main" val="263855265"/>
+      </p:ext>
+    </p:extLst>
+  </p:cSld>
+  <p:clrMapOvr>
+    <a:masterClrMapping/>
+  </p:clrMapOvr>
+</p:sld>
+</file>
+
+<file path=ppt/slides/slide12.xml><?xml version="1.0" encoding="utf-8"?>
+<p:sld xmlns:a="http://schemas.openxmlformats.org/drawingml/2006/main" xmlns:r="http://schemas.openxmlformats.org/officeDocument/2006/relationships" xmlns:p="http://schemas.openxmlformats.org/presentationml/2006/main">
+  <p:cSld>
+    <p:bg>
+      <p:bgPr>
+        <a:solidFill>
+          <a:schemeClr val="tx1"/>
+        </a:solidFill>
+        <a:effectLst/>
+      </p:bgPr>
+    </p:bg>
+    <p:spTree>
+      <p:nvGrpSpPr>
+        <p:cNvPr id="1" name="">
+          <a:extLst>
+            <a:ext uri="{FF2B5EF4-FFF2-40B4-BE49-F238E27FC236}">
+              <a16:creationId xmlns:a16="http://schemas.microsoft.com/office/drawing/2014/main" id="{91722548-DFB9-F9D9-56E9-B7ACBBCF493D}"/>
+            </a:ext>
+          </a:extLst>
+        </p:cNvPr>
+        <p:cNvGrpSpPr/>
+        <p:nvPr/>
+      </p:nvGrpSpPr>
+      <p:grpSpPr>
+        <a:xfrm>
+          <a:off x="0" y="0"/>
+          <a:ext cx="0" cy="0"/>
+          <a:chOff x="0" y="0"/>
+          <a:chExt cx="0" cy="0"/>
+        </a:xfrm>
+      </p:grpSpPr>
+    </p:spTree>
+    <p:extLst>
+      <p:ext uri="{BB962C8B-B14F-4D97-AF65-F5344CB8AC3E}">
+        <p14:creationId xmlns:p14="http://schemas.microsoft.com/office/powerpoint/2010/main" val="1425026502"/>
       </p:ext>
     </p:extLst>
   </p:cSld>
@@ -4045,9 +4279,23 @@
 <file path=ppt/slides/slide2.xml><?xml version="1.0" encoding="utf-8"?>
 <p:sld xmlns:a="http://schemas.openxmlformats.org/drawingml/2006/main" xmlns:r="http://schemas.openxmlformats.org/officeDocument/2006/relationships" xmlns:p="http://schemas.openxmlformats.org/presentationml/2006/main">
   <p:cSld>
+    <p:bg>
+      <p:bgPr>
+        <a:solidFill>
+          <a:schemeClr val="tx1"/>
+        </a:solidFill>
+        <a:effectLst/>
+      </p:bgPr>
+    </p:bg>
     <p:spTree>
       <p:nvGrpSpPr>
-        <p:cNvPr id="1" name=""/>
+        <p:cNvPr id="1" name="">
+          <a:extLst>
+            <a:ext uri="{FF2B5EF4-FFF2-40B4-BE49-F238E27FC236}">
+              <a16:creationId xmlns:a16="http://schemas.microsoft.com/office/drawing/2014/main" id="{75F0DE03-7596-719C-4AC1-D37DB3578BC9}"/>
+            </a:ext>
+          </a:extLst>
+        </p:cNvPr>
         <p:cNvGrpSpPr/>
         <p:nvPr/>
       </p:nvGrpSpPr>
@@ -4064,7 +4312,7 @@
           <p:cNvPr id="3" name="TextBox 2">
             <a:extLst>
               <a:ext uri="{FF2B5EF4-FFF2-40B4-BE49-F238E27FC236}">
-                <a16:creationId xmlns:a16="http://schemas.microsoft.com/office/drawing/2014/main" id="{08753051-98B8-98C7-321D-74A90C81EDA9}"/>
+                <a16:creationId xmlns:a16="http://schemas.microsoft.com/office/drawing/2014/main" id="{70A0408C-F803-BB79-79C5-B5E8E0859B69}"/>
               </a:ext>
             </a:extLst>
           </p:cNvPr>
@@ -4074,7 +4322,7 @@
         <p:spPr>
           <a:xfrm>
             <a:off x="438912" y="1407498"/>
-            <a:ext cx="10844784" cy="1938992"/>
+            <a:ext cx="10844784" cy="1569660"/>
           </a:xfrm>
           <a:prstGeom prst="rect">
             <a:avLst/>
@@ -4117,7 +4365,18 @@
                   </a:schemeClr>
                 </a:solidFill>
               </a:rPr>
-              <a:t>An LLM is a type of AI model trained on a very large amount of text and other data so that it can </a:t>
+              <a:t>An LLM is a type of AI </a:t>
+            </a:r>
+            <a:r>
+              <a:rPr lang="en-IN" sz="2400">
+                <a:solidFill>
+                  <a:schemeClr val="accent6">
+                    <a:lumMod val="60000"/>
+                    <a:lumOff val="40000"/>
+                  </a:schemeClr>
+                </a:solidFill>
+              </a:rPr>
+              <a:t>model that can </a:t>
             </a:r>
             <a:r>
               <a:rPr lang="en-IN" sz="2400" b="1" dirty="0">
@@ -4169,10 +4428,10 @@
       </p:sp>
       <p:pic>
         <p:nvPicPr>
-          <p:cNvPr id="4" name="Picture 3">
-            <a:extLst>
-              <a:ext uri="{FF2B5EF4-FFF2-40B4-BE49-F238E27FC236}">
-                <a16:creationId xmlns:a16="http://schemas.microsoft.com/office/drawing/2014/main" id="{9E3EF567-582D-CC8F-FC9C-E0CDEB9FDB21}"/>
+          <p:cNvPr id="5" name="Picture 4">
+            <a:extLst>
+              <a:ext uri="{FF2B5EF4-FFF2-40B4-BE49-F238E27FC236}">
+                <a16:creationId xmlns:a16="http://schemas.microsoft.com/office/drawing/2014/main" id="{6FD41854-8920-0D03-A3D9-90545370A51D}"/>
               </a:ext>
             </a:extLst>
           </p:cNvPr>
@@ -4199,10 +4458,10 @@
       </p:pic>
       <p:pic>
         <p:nvPicPr>
-          <p:cNvPr id="6" name="Picture 5">
-            <a:extLst>
-              <a:ext uri="{FF2B5EF4-FFF2-40B4-BE49-F238E27FC236}">
-                <a16:creationId xmlns:a16="http://schemas.microsoft.com/office/drawing/2014/main" id="{98B371D4-3EEC-D9CA-1916-D0C44BAFCEDB}"/>
+          <p:cNvPr id="7" name="Picture 6">
+            <a:extLst>
+              <a:ext uri="{FF2B5EF4-FFF2-40B4-BE49-F238E27FC236}">
+                <a16:creationId xmlns:a16="http://schemas.microsoft.com/office/drawing/2014/main" id="{EFDDC36A-200A-9684-87DA-9C51BEDAC392}"/>
               </a:ext>
             </a:extLst>
           </p:cNvPr>
@@ -4229,10 +4488,10 @@
       </p:pic>
       <p:pic>
         <p:nvPicPr>
-          <p:cNvPr id="8" name="Picture 7">
-            <a:extLst>
-              <a:ext uri="{FF2B5EF4-FFF2-40B4-BE49-F238E27FC236}">
-                <a16:creationId xmlns:a16="http://schemas.microsoft.com/office/drawing/2014/main" id="{B7511EBC-43D6-5C22-182B-6AF4E79C21F0}"/>
+          <p:cNvPr id="9" name="Picture 8">
+            <a:extLst>
+              <a:ext uri="{FF2B5EF4-FFF2-40B4-BE49-F238E27FC236}">
+                <a16:creationId xmlns:a16="http://schemas.microsoft.com/office/drawing/2014/main" id="{2038F0B7-CC0D-4DD9-9432-CDCA41711142}"/>
               </a:ext>
             </a:extLst>
           </p:cNvPr>
@@ -4260,7 +4519,7 @@
     </p:spTree>
     <p:extLst>
       <p:ext uri="{BB962C8B-B14F-4D97-AF65-F5344CB8AC3E}">
-        <p14:creationId xmlns:p14="http://schemas.microsoft.com/office/powerpoint/2010/main" val="4221193315"/>
+        <p14:creationId xmlns:p14="http://schemas.microsoft.com/office/powerpoint/2010/main" val="1746322443"/>
       </p:ext>
     </p:extLst>
   </p:cSld>
@@ -4273,12 +4532,20 @@
 <file path=ppt/slides/slide3.xml><?xml version="1.0" encoding="utf-8"?>
 <p:sld xmlns:a="http://schemas.openxmlformats.org/drawingml/2006/main" xmlns:r="http://schemas.openxmlformats.org/officeDocument/2006/relationships" xmlns:p="http://schemas.openxmlformats.org/presentationml/2006/main">
   <p:cSld>
+    <p:bg>
+      <p:bgPr>
+        <a:solidFill>
+          <a:schemeClr val="tx1"/>
+        </a:solidFill>
+        <a:effectLst/>
+      </p:bgPr>
+    </p:bg>
     <p:spTree>
       <p:nvGrpSpPr>
         <p:cNvPr id="1" name="">
           <a:extLst>
             <a:ext uri="{FF2B5EF4-FFF2-40B4-BE49-F238E27FC236}">
-              <a16:creationId xmlns:a16="http://schemas.microsoft.com/office/drawing/2014/main" id="{315FAEC7-832A-623A-8D0C-8DCAC4F0D2E5}"/>
+              <a16:creationId xmlns:a16="http://schemas.microsoft.com/office/drawing/2014/main" id="{DD74D32F-2AF0-D729-AF3F-1949ACAF9BE5}"/>
             </a:ext>
           </a:extLst>
         </p:cNvPr>
@@ -4371,7 +4638,7 @@
         </p:nvSpPr>
         <p:spPr>
           <a:xfrm>
-            <a:off x="905256" y="612648"/>
+            <a:off x="530352" y="896112"/>
             <a:ext cx="2395728" cy="591574"/>
           </a:xfrm>
           <a:prstGeom prst="roundRect">
@@ -4437,7 +4704,7 @@
         </p:nvSpPr>
         <p:spPr>
           <a:xfrm>
-            <a:off x="876301" y="2128242"/>
+            <a:off x="501397" y="2411706"/>
             <a:ext cx="2395728" cy="500134"/>
           </a:xfrm>
           <a:prstGeom prst="roundRect">
@@ -4491,7 +4758,7 @@
         </p:nvSpPr>
         <p:spPr>
           <a:xfrm>
-            <a:off x="2490978" y="1497306"/>
+            <a:off x="2116074" y="1780770"/>
             <a:ext cx="1620011" cy="369332"/>
           </a:xfrm>
           <a:prstGeom prst="rect">
@@ -4531,7 +4798,7 @@
         </p:nvSpPr>
         <p:spPr>
           <a:xfrm>
-            <a:off x="1711832" y="1300394"/>
+            <a:off x="1336928" y="1583858"/>
             <a:ext cx="539496" cy="500134"/>
           </a:xfrm>
           <a:prstGeom prst="downArrow">
@@ -4577,7 +4844,7 @@
         </p:nvSpPr>
         <p:spPr>
           <a:xfrm>
-            <a:off x="502920" y="3395946"/>
+            <a:off x="128016" y="3679410"/>
             <a:ext cx="3776472" cy="2343062"/>
           </a:xfrm>
           <a:prstGeom prst="snipRoundRect">
@@ -4689,7 +4956,7 @@
         </p:nvSpPr>
         <p:spPr>
           <a:xfrm>
-            <a:off x="1711832" y="2733530"/>
+            <a:off x="1336928" y="3016994"/>
             <a:ext cx="539496" cy="500134"/>
           </a:xfrm>
           <a:prstGeom prst="downArrow">
@@ -4735,7 +5002,7 @@
         </p:nvSpPr>
         <p:spPr>
           <a:xfrm>
-            <a:off x="5129785" y="1550461"/>
+            <a:off x="4754881" y="1833925"/>
             <a:ext cx="6190488" cy="830997"/>
           </a:xfrm>
           <a:prstGeom prst="rect">
@@ -4777,7 +5044,7 @@
         </p:nvCxnSpPr>
         <p:spPr>
           <a:xfrm flipH="1">
-            <a:off x="3690366" y="2028920"/>
+            <a:off x="3315462" y="2312384"/>
             <a:ext cx="1380744" cy="261604"/>
           </a:xfrm>
           <a:prstGeom prst="straightConnector1">
@@ -4805,7 +5072,7 @@
     </p:spTree>
     <p:extLst>
       <p:ext uri="{BB962C8B-B14F-4D97-AF65-F5344CB8AC3E}">
-        <p14:creationId xmlns:p14="http://schemas.microsoft.com/office/powerpoint/2010/main" val="537761546"/>
+        <p14:creationId xmlns:p14="http://schemas.microsoft.com/office/powerpoint/2010/main" val="525642947"/>
       </p:ext>
     </p:extLst>
   </p:cSld>
@@ -4818,12 +5085,20 @@
 <file path=ppt/slides/slide4.xml><?xml version="1.0" encoding="utf-8"?>
 <p:sld xmlns:a="http://schemas.openxmlformats.org/drawingml/2006/main" xmlns:r="http://schemas.openxmlformats.org/officeDocument/2006/relationships" xmlns:p="http://schemas.openxmlformats.org/presentationml/2006/main">
   <p:cSld>
+    <p:bg>
+      <p:bgPr>
+        <a:solidFill>
+          <a:schemeClr val="tx1"/>
+        </a:solidFill>
+        <a:effectLst/>
+      </p:bgPr>
+    </p:bg>
     <p:spTree>
       <p:nvGrpSpPr>
         <p:cNvPr id="1" name="">
           <a:extLst>
             <a:ext uri="{FF2B5EF4-FFF2-40B4-BE49-F238E27FC236}">
-              <a16:creationId xmlns:a16="http://schemas.microsoft.com/office/drawing/2014/main" id="{2B12E2AE-020B-38BD-6002-9E1C83CA3D43}"/>
+              <a16:creationId xmlns:a16="http://schemas.microsoft.com/office/drawing/2014/main" id="{D08652E2-EB06-0499-E834-710EF4AD39DC}"/>
             </a:ext>
           </a:extLst>
         </p:cNvPr>
@@ -4840,10 +5115,10 @@
       </p:grpSpPr>
       <p:sp>
         <p:nvSpPr>
-          <p:cNvPr id="3" name="TextBox 2">
-            <a:extLst>
-              <a:ext uri="{FF2B5EF4-FFF2-40B4-BE49-F238E27FC236}">
-                <a16:creationId xmlns:a16="http://schemas.microsoft.com/office/drawing/2014/main" id="{311C0355-CC00-69D0-C1E9-C3E170155CE1}"/>
+          <p:cNvPr id="4" name="TextBox 3">
+            <a:extLst>
+              <a:ext uri="{FF2B5EF4-FFF2-40B4-BE49-F238E27FC236}">
+                <a16:creationId xmlns:a16="http://schemas.microsoft.com/office/drawing/2014/main" id="{323DC5EE-FE6B-EED5-5504-59B26D7EB4FA}"/>
               </a:ext>
             </a:extLst>
           </p:cNvPr>
@@ -4852,8 +5127,8 @@
         </p:nvSpPr>
         <p:spPr>
           <a:xfrm>
-            <a:off x="420624" y="1557588"/>
-            <a:ext cx="11771376" cy="4524315"/>
+            <a:off x="5084063" y="606270"/>
+            <a:ext cx="5065776" cy="369332"/>
           </a:xfrm>
           <a:prstGeom prst="rect">
             <a:avLst/>
@@ -4861,47 +5136,34 @@
           <a:noFill/>
         </p:spPr>
         <p:txBody>
-          <a:bodyPr wrap="square">
+          <a:bodyPr wrap="square" rtlCol="0">
             <a:spAutoFit/>
           </a:bodyPr>
           <a:lstStyle/>
           <a:p>
-            <a:pPr>
-              <a:buNone/>
-            </a:pPr>
-            <a:r>
-              <a:rPr lang="en-IN" sz="2400" b="1" dirty="0">
-                <a:solidFill>
-                  <a:schemeClr val="accent6">
-                    <a:lumMod val="60000"/>
-                    <a:lumOff val="40000"/>
-                  </a:schemeClr>
-                </a:solidFill>
-              </a:rPr>
-              <a:t>1. Hallucination</a:t>
-            </a:r>
-          </a:p>
-          <a:p>
-            <a:pPr>
-              <a:buNone/>
-            </a:pPr>
-            <a:r>
-              <a:rPr lang="en-IN" sz="2400" dirty="0">
-                <a:solidFill>
-                  <a:schemeClr val="accent6">
-                    <a:lumMod val="60000"/>
-                    <a:lumOff val="40000"/>
-                  </a:schemeClr>
-                </a:solidFill>
-              </a:rPr>
-              <a:t>An LLM can generate information that sounds convincing but is incorrect.</a:t>
-            </a:r>
-          </a:p>
-          <a:p>
-            <a:pPr>
-              <a:buNone/>
-            </a:pPr>
-            <a:endParaRPr lang="en-IN" sz="2400" dirty="0">
+            <a:r>
+              <a:rPr lang="en-US">
+                <a:solidFill>
+                  <a:schemeClr val="accent6">
+                    <a:lumMod val="60000"/>
+                    <a:lumOff val="40000"/>
+                  </a:schemeClr>
+                </a:solidFill>
+              </a:rPr>
+              <a:t>Cost of training </a:t>
+            </a:r>
+            <a:r>
+              <a:rPr lang="en-IN">
+                <a:solidFill>
+                  <a:schemeClr val="accent6">
+                    <a:lumMod val="60000"/>
+                    <a:lumOff val="40000"/>
+                  </a:schemeClr>
+                </a:solidFill>
+              </a:rPr>
+              <a:t>LLM - 2026 (Source Google)</a:t>
+            </a:r>
+            <a:endParaRPr lang="en-IN" dirty="0">
               <a:solidFill>
                 <a:schemeClr val="accent6">
                   <a:lumMod val="60000"/>
@@ -4910,129 +5172,194 @@
               </a:solidFill>
             </a:endParaRPr>
           </a:p>
-          <a:p>
-            <a:pPr>
-              <a:buNone/>
-            </a:pPr>
-            <a:r>
-              <a:rPr lang="en-IN" sz="2400" dirty="0">
-                <a:solidFill>
-                  <a:schemeClr val="accent6">
-                    <a:lumMod val="60000"/>
-                    <a:lumOff val="40000"/>
-                  </a:schemeClr>
-                </a:solidFill>
-              </a:rPr>
-              <a:t>For example: </a:t>
-            </a:r>
-          </a:p>
-          <a:p>
-            <a:pPr marL="342900" indent="-342900">
-              <a:buFont typeface="Arial" panose="020B0604020202020204" pitchFamily="34" charset="0"/>
-              <a:buChar char="•"/>
-            </a:pPr>
-            <a:r>
-              <a:rPr lang="en-IN" sz="2400" i="1" dirty="0">
-                <a:solidFill>
-                  <a:schemeClr val="accent6">
-                    <a:lumMod val="60000"/>
-                    <a:lumOff val="40000"/>
-                  </a:schemeClr>
-                </a:solidFill>
-              </a:rPr>
-              <a:t>You  upload a pdf research paper and ask "Who wrote this research paper?”</a:t>
-            </a:r>
-          </a:p>
-          <a:p>
-            <a:r>
-              <a:rPr lang="en-IN" sz="2400" dirty="0">
-                <a:solidFill>
-                  <a:schemeClr val="accent6">
-                    <a:lumMod val="60000"/>
-                    <a:lumOff val="40000"/>
-                  </a:schemeClr>
-                </a:solidFill>
-              </a:rPr>
-              <a:t>The model might confidently provide a wrong author.</a:t>
-            </a:r>
-          </a:p>
-          <a:p>
-            <a:pPr>
-              <a:buNone/>
-            </a:pPr>
-            <a:endParaRPr lang="en-IN" sz="2400" i="1" dirty="0">
+        </p:txBody>
+      </p:sp>
+      <p:pic>
+        <p:nvPicPr>
+          <p:cNvPr id="3" name="Picture 2">
+            <a:extLst>
+              <a:ext uri="{FF2B5EF4-FFF2-40B4-BE49-F238E27FC236}">
+                <a16:creationId xmlns:a16="http://schemas.microsoft.com/office/drawing/2014/main" id="{B0B1D26C-7BAC-76E0-AFD3-C9296D25EF3E}"/>
+              </a:ext>
+            </a:extLst>
+          </p:cNvPr>
+          <p:cNvPicPr>
+            <a:picLocks noChangeAspect="1"/>
+          </p:cNvPicPr>
+          <p:nvPr/>
+        </p:nvPicPr>
+        <p:blipFill>
+          <a:blip r:embed="rId2"/>
+          <a:stretch>
+            <a:fillRect/>
+          </a:stretch>
+        </p:blipFill>
+        <p:spPr>
+          <a:xfrm>
+            <a:off x="4452011" y="1067042"/>
+            <a:ext cx="7611973" cy="3169946"/>
+          </a:xfrm>
+          <a:prstGeom prst="rect">
+            <a:avLst/>
+          </a:prstGeom>
+        </p:spPr>
+      </p:pic>
+      <p:pic>
+        <p:nvPicPr>
+          <p:cNvPr id="8" name="Picture 7">
+            <a:extLst>
+              <a:ext uri="{FF2B5EF4-FFF2-40B4-BE49-F238E27FC236}">
+                <a16:creationId xmlns:a16="http://schemas.microsoft.com/office/drawing/2014/main" id="{A05FB30A-382D-2E49-145B-5EBBC374A8B4}"/>
+              </a:ext>
+            </a:extLst>
+          </p:cNvPr>
+          <p:cNvPicPr>
+            <a:picLocks noChangeAspect="1"/>
+          </p:cNvPicPr>
+          <p:nvPr/>
+        </p:nvPicPr>
+        <p:blipFill>
+          <a:blip r:embed="rId3"/>
+          <a:stretch>
+            <a:fillRect/>
+          </a:stretch>
+        </p:blipFill>
+        <p:spPr>
+          <a:xfrm>
+            <a:off x="4542246" y="4626864"/>
+            <a:ext cx="7231510" cy="2036346"/>
+          </a:xfrm>
+          <a:prstGeom prst="rect">
+            <a:avLst/>
+          </a:prstGeom>
+        </p:spPr>
+      </p:pic>
+      <p:sp>
+        <p:nvSpPr>
+          <p:cNvPr id="11" name="Rectangle: Rounded Corners 10">
+            <a:extLst>
+              <a:ext uri="{FF2B5EF4-FFF2-40B4-BE49-F238E27FC236}">
+                <a16:creationId xmlns:a16="http://schemas.microsoft.com/office/drawing/2014/main" id="{D698684F-B859-B165-F734-C594932C122B}"/>
+              </a:ext>
+            </a:extLst>
+          </p:cNvPr>
+          <p:cNvSpPr/>
+          <p:nvPr/>
+        </p:nvSpPr>
+        <p:spPr>
+          <a:xfrm>
+            <a:off x="530352" y="896112"/>
+            <a:ext cx="2395728" cy="591574"/>
+          </a:xfrm>
+          <a:prstGeom prst="roundRect">
+            <a:avLst/>
+          </a:prstGeom>
+        </p:spPr>
+        <p:style>
+          <a:lnRef idx="2">
+            <a:schemeClr val="accent1">
+              <a:shade val="15000"/>
+            </a:schemeClr>
+          </a:lnRef>
+          <a:fillRef idx="1">
+            <a:schemeClr val="accent1"/>
+          </a:fillRef>
+          <a:effectRef idx="0">
+            <a:schemeClr val="accent1"/>
+          </a:effectRef>
+          <a:fontRef idx="minor">
+            <a:schemeClr val="lt1"/>
+          </a:fontRef>
+        </p:style>
+        <p:txBody>
+          <a:bodyPr rtlCol="0" anchor="ctr"/>
+          <a:lstStyle/>
+          <a:p>
+            <a:pPr algn="ctr"/>
+            <a:r>
+              <a:rPr lang="en-IN" dirty="0">
+                <a:solidFill>
+                  <a:schemeClr val="bg1"/>
+                </a:solidFill>
+              </a:rPr>
+              <a:t>Large Amount </a:t>
+            </a:r>
+            <a:r>
+              <a:rPr lang="en-IN">
+                <a:solidFill>
+                  <a:schemeClr val="bg1"/>
+                </a:solidFill>
+              </a:rPr>
+              <a:t>of Data</a:t>
+            </a:r>
+            <a:endParaRPr lang="en-IN" dirty="0">
               <a:solidFill>
-                <a:schemeClr val="accent6">
-                  <a:lumMod val="60000"/>
-                  <a:lumOff val="40000"/>
-                </a:schemeClr>
+                <a:schemeClr val="bg1"/>
               </a:solidFill>
             </a:endParaRPr>
           </a:p>
-          <a:p>
-            <a:pPr>
-              <a:buNone/>
-            </a:pPr>
-            <a:endParaRPr lang="en-IN" sz="2400" i="1" dirty="0">
-              <a:solidFill>
-                <a:schemeClr val="accent6">
-                  <a:lumMod val="60000"/>
-                  <a:lumOff val="40000"/>
-                </a:schemeClr>
-              </a:solidFill>
-            </a:endParaRPr>
-          </a:p>
-          <a:p>
-            <a:pPr marL="342900" indent="-342900">
-              <a:buFont typeface="Arial" panose="020B0604020202020204" pitchFamily="34" charset="0"/>
-              <a:buChar char="•"/>
-            </a:pPr>
-            <a:r>
-              <a:rPr lang="en-IN" sz="2400" i="1" dirty="0">
-                <a:solidFill>
-                  <a:schemeClr val="accent6">
-                    <a:lumMod val="60000"/>
-                    <a:lumOff val="40000"/>
-                  </a:schemeClr>
-                </a:solidFill>
-              </a:rPr>
-              <a:t>"Write a detailed summary of the   Monkey-Cat Treaty Signed between Australia and the Africa coalition, including the names of the lead negotiators .“</a:t>
-            </a:r>
-          </a:p>
-          <a:p>
-            <a:r>
-              <a:rPr lang="en-IN" sz="2400" dirty="0">
-                <a:solidFill>
-                  <a:schemeClr val="accent6">
-                    <a:lumMod val="60000"/>
-                    <a:lumOff val="40000"/>
-                  </a:schemeClr>
-                </a:solidFill>
-              </a:rPr>
-              <a:t>The model might confidently make-up some gibberish  facts.</a:t>
-            </a:r>
-          </a:p>
-          <a:p>
-            <a:pPr>
-              <a:buNone/>
-            </a:pPr>
-            <a:endParaRPr lang="en-IN" sz="2400" dirty="0">
-              <a:solidFill>
-                <a:schemeClr val="accent6">
-                  <a:lumMod val="60000"/>
-                  <a:lumOff val="40000"/>
-                </a:schemeClr>
-              </a:solidFill>
-            </a:endParaRPr>
-          </a:p>
-        </p:txBody>
-      </p:sp>
-      <p:sp>
-        <p:nvSpPr>
-          <p:cNvPr id="5" name="TextBox 4">
-            <a:extLst>
-              <a:ext uri="{FF2B5EF4-FFF2-40B4-BE49-F238E27FC236}">
-                <a16:creationId xmlns:a16="http://schemas.microsoft.com/office/drawing/2014/main" id="{4CF54BD0-E28E-3185-B863-C2AC5FBFB634}"/>
+        </p:txBody>
+      </p:sp>
+      <p:sp>
+        <p:nvSpPr>
+          <p:cNvPr id="12" name="Rectangle: Rounded Corners 11">
+            <a:extLst>
+              <a:ext uri="{FF2B5EF4-FFF2-40B4-BE49-F238E27FC236}">
+                <a16:creationId xmlns:a16="http://schemas.microsoft.com/office/drawing/2014/main" id="{3AA7BE67-C47F-59B5-FD63-5FE956FBE44D}"/>
+              </a:ext>
+            </a:extLst>
+          </p:cNvPr>
+          <p:cNvSpPr/>
+          <p:nvPr/>
+        </p:nvSpPr>
+        <p:spPr>
+          <a:xfrm>
+            <a:off x="501397" y="2411706"/>
+            <a:ext cx="2395728" cy="500134"/>
+          </a:xfrm>
+          <a:prstGeom prst="roundRect">
+            <a:avLst/>
+          </a:prstGeom>
+        </p:spPr>
+        <p:style>
+          <a:lnRef idx="2">
+            <a:schemeClr val="accent1">
+              <a:shade val="15000"/>
+            </a:schemeClr>
+          </a:lnRef>
+          <a:fillRef idx="1">
+            <a:schemeClr val="accent1"/>
+          </a:fillRef>
+          <a:effectRef idx="0">
+            <a:schemeClr val="accent1"/>
+          </a:effectRef>
+          <a:fontRef idx="minor">
+            <a:schemeClr val="lt1"/>
+          </a:fontRef>
+        </p:style>
+        <p:txBody>
+          <a:bodyPr rtlCol="0" anchor="ctr"/>
+          <a:lstStyle/>
+          <a:p>
+            <a:pPr algn="ctr"/>
+            <a:r>
+              <a:rPr lang="en-IN" dirty="0">
+                <a:solidFill>
+                  <a:schemeClr val="bg1"/>
+                </a:solidFill>
+              </a:rPr>
+              <a:t>Learned Model</a:t>
+            </a:r>
+            <a:endParaRPr lang="en-IN" dirty="0"/>
+          </a:p>
+        </p:txBody>
+      </p:sp>
+      <p:sp>
+        <p:nvSpPr>
+          <p:cNvPr id="13" name="TextBox 12">
+            <a:extLst>
+              <a:ext uri="{FF2B5EF4-FFF2-40B4-BE49-F238E27FC236}">
+                <a16:creationId xmlns:a16="http://schemas.microsoft.com/office/drawing/2014/main" id="{832C86FB-A73D-9E46-6018-87691C2A5CBA}"/>
               </a:ext>
             </a:extLst>
           </p:cNvPr>
@@ -5041,8 +5368,8 @@
         </p:nvSpPr>
         <p:spPr>
           <a:xfrm>
-            <a:off x="1723644" y="253800"/>
-            <a:ext cx="6190488" cy="461665"/>
+            <a:off x="2116074" y="1780770"/>
+            <a:ext cx="1620011" cy="369332"/>
           </a:xfrm>
           <a:prstGeom prst="rect">
             <a:avLst/>
@@ -5055,27 +5382,226 @@
           </a:bodyPr>
           <a:lstStyle/>
           <a:p>
-            <a:pPr>
-              <a:buNone/>
+            <a:r>
+              <a:rPr lang="en-IN" sz="1800" dirty="0">
+                <a:solidFill>
+                  <a:schemeClr val="bg1"/>
+                </a:solidFill>
+              </a:rPr>
+              <a:t>LLM Training </a:t>
+            </a:r>
+            <a:endParaRPr lang="en-IN" dirty="0"/>
+          </a:p>
+        </p:txBody>
+      </p:sp>
+      <p:sp>
+        <p:nvSpPr>
+          <p:cNvPr id="14" name="Arrow: Down 13">
+            <a:extLst>
+              <a:ext uri="{FF2B5EF4-FFF2-40B4-BE49-F238E27FC236}">
+                <a16:creationId xmlns:a16="http://schemas.microsoft.com/office/drawing/2014/main" id="{FD86214C-1751-B7D0-A397-AA0468CC9201}"/>
+              </a:ext>
+            </a:extLst>
+          </p:cNvPr>
+          <p:cNvSpPr/>
+          <p:nvPr/>
+        </p:nvSpPr>
+        <p:spPr>
+          <a:xfrm>
+            <a:off x="1336928" y="1583858"/>
+            <a:ext cx="539496" cy="500134"/>
+          </a:xfrm>
+          <a:prstGeom prst="downArrow">
+            <a:avLst/>
+          </a:prstGeom>
+        </p:spPr>
+        <p:style>
+          <a:lnRef idx="2">
+            <a:schemeClr val="accent1">
+              <a:shade val="15000"/>
+            </a:schemeClr>
+          </a:lnRef>
+          <a:fillRef idx="1">
+            <a:schemeClr val="accent1"/>
+          </a:fillRef>
+          <a:effectRef idx="0">
+            <a:schemeClr val="accent1"/>
+          </a:effectRef>
+          <a:fontRef idx="minor">
+            <a:schemeClr val="lt1"/>
+          </a:fontRef>
+        </p:style>
+        <p:txBody>
+          <a:bodyPr rtlCol="0" anchor="ctr"/>
+          <a:lstStyle/>
+          <a:p>
+            <a:pPr algn="ctr"/>
+            <a:endParaRPr lang="en-IN"/>
+          </a:p>
+        </p:txBody>
+      </p:sp>
+      <p:sp>
+        <p:nvSpPr>
+          <p:cNvPr id="16" name="Rectangle: Top Corners One Rounded and One Snipped 15">
+            <a:extLst>
+              <a:ext uri="{FF2B5EF4-FFF2-40B4-BE49-F238E27FC236}">
+                <a16:creationId xmlns:a16="http://schemas.microsoft.com/office/drawing/2014/main" id="{FBD17AD9-DFF5-9931-4DC3-ADAC5CF393F7}"/>
+              </a:ext>
+            </a:extLst>
+          </p:cNvPr>
+          <p:cNvSpPr/>
+          <p:nvPr/>
+        </p:nvSpPr>
+        <p:spPr>
+          <a:xfrm>
+            <a:off x="128016" y="3679410"/>
+            <a:ext cx="3776472" cy="2343062"/>
+          </a:xfrm>
+          <a:prstGeom prst="snipRoundRect">
+            <a:avLst/>
+          </a:prstGeom>
+        </p:spPr>
+        <p:style>
+          <a:lnRef idx="2">
+            <a:schemeClr val="accent6">
+              <a:shade val="15000"/>
+            </a:schemeClr>
+          </a:lnRef>
+          <a:fillRef idx="1">
+            <a:schemeClr val="accent6"/>
+          </a:fillRef>
+          <a:effectRef idx="0">
+            <a:schemeClr val="accent6"/>
+          </a:effectRef>
+          <a:fontRef idx="minor">
+            <a:schemeClr val="lt1"/>
+          </a:fontRef>
+        </p:style>
+        <p:txBody>
+          <a:bodyPr rtlCol="0" anchor="ctr"/>
+          <a:lstStyle/>
+          <a:p>
+            <a:pPr marL="285750" indent="-285750">
+              <a:buFont typeface="Arial" panose="020B0604020202020204" pitchFamily="34" charset="0"/>
+              <a:buChar char="•"/>
             </a:pPr>
             <a:r>
-              <a:rPr lang="en-IN" sz="2400" b="1" dirty="0">
-                <a:solidFill>
-                  <a:schemeClr val="accent6">
-                    <a:lumMod val="60000"/>
-                    <a:lumOff val="40000"/>
-                  </a:schemeClr>
-                </a:solidFill>
-              </a:rPr>
-              <a:t>Major limitations of LLMs</a:t>
-            </a:r>
+              <a:rPr lang="en-US" dirty="0"/>
+              <a:t>Generate Text</a:t>
+            </a:r>
+          </a:p>
+          <a:p>
+            <a:pPr marL="285750" indent="-285750">
+              <a:buFont typeface="Arial" panose="020B0604020202020204" pitchFamily="34" charset="0"/>
+              <a:buChar char="•"/>
+            </a:pPr>
+            <a:r>
+              <a:rPr lang="en-US" dirty="0"/>
+              <a:t>Summarization</a:t>
+            </a:r>
+          </a:p>
+          <a:p>
+            <a:pPr marL="285750" indent="-285750">
+              <a:buFont typeface="Arial" panose="020B0604020202020204" pitchFamily="34" charset="0"/>
+              <a:buChar char="•"/>
+            </a:pPr>
+            <a:r>
+              <a:rPr lang="en-US" dirty="0"/>
+              <a:t>Translation</a:t>
+            </a:r>
+          </a:p>
+          <a:p>
+            <a:pPr marL="285750" indent="-285750">
+              <a:buFont typeface="Arial" panose="020B0604020202020204" pitchFamily="34" charset="0"/>
+              <a:buChar char="•"/>
+            </a:pPr>
+            <a:r>
+              <a:rPr lang="en-US" dirty="0"/>
+              <a:t>Q&amp;A</a:t>
+            </a:r>
+          </a:p>
+          <a:p>
+            <a:pPr marL="285750" indent="-285750">
+              <a:buFont typeface="Arial" panose="020B0604020202020204" pitchFamily="34" charset="0"/>
+              <a:buChar char="•"/>
+            </a:pPr>
+            <a:r>
+              <a:rPr lang="en-US" dirty="0"/>
+              <a:t>Coding</a:t>
+            </a:r>
+          </a:p>
+          <a:p>
+            <a:pPr marL="285750" indent="-285750">
+              <a:buFont typeface="Arial" panose="020B0604020202020204" pitchFamily="34" charset="0"/>
+              <a:buChar char="•"/>
+            </a:pPr>
+            <a:r>
+              <a:rPr lang="en-US" dirty="0"/>
+              <a:t>Classification</a:t>
+            </a:r>
+          </a:p>
+          <a:p>
+            <a:pPr marL="285750" indent="-285750">
+              <a:buFont typeface="Arial" panose="020B0604020202020204" pitchFamily="34" charset="0"/>
+              <a:buChar char="•"/>
+            </a:pPr>
+            <a:r>
+              <a:rPr lang="en-US" dirty="0"/>
+              <a:t>Information Extraction</a:t>
+            </a:r>
+          </a:p>
+        </p:txBody>
+      </p:sp>
+      <p:sp>
+        <p:nvSpPr>
+          <p:cNvPr id="17" name="Arrow: Down 16">
+            <a:extLst>
+              <a:ext uri="{FF2B5EF4-FFF2-40B4-BE49-F238E27FC236}">
+                <a16:creationId xmlns:a16="http://schemas.microsoft.com/office/drawing/2014/main" id="{AC5CEC62-4C64-DAA1-C3DA-106B26D53960}"/>
+              </a:ext>
+            </a:extLst>
+          </p:cNvPr>
+          <p:cNvSpPr/>
+          <p:nvPr/>
+        </p:nvSpPr>
+        <p:spPr>
+          <a:xfrm>
+            <a:off x="1336928" y="3016994"/>
+            <a:ext cx="539496" cy="500134"/>
+          </a:xfrm>
+          <a:prstGeom prst="downArrow">
+            <a:avLst/>
+          </a:prstGeom>
+        </p:spPr>
+        <p:style>
+          <a:lnRef idx="2">
+            <a:schemeClr val="accent1">
+              <a:shade val="15000"/>
+            </a:schemeClr>
+          </a:lnRef>
+          <a:fillRef idx="1">
+            <a:schemeClr val="accent1"/>
+          </a:fillRef>
+          <a:effectRef idx="0">
+            <a:schemeClr val="accent1"/>
+          </a:effectRef>
+          <a:fontRef idx="minor">
+            <a:schemeClr val="lt1"/>
+          </a:fontRef>
+        </p:style>
+        <p:txBody>
+          <a:bodyPr rtlCol="0" anchor="ctr"/>
+          <a:lstStyle/>
+          <a:p>
+            <a:pPr algn="ctr"/>
+            <a:endParaRPr lang="en-IN"/>
           </a:p>
         </p:txBody>
       </p:sp>
     </p:spTree>
     <p:extLst>
       <p:ext uri="{BB962C8B-B14F-4D97-AF65-F5344CB8AC3E}">
-        <p14:creationId xmlns:p14="http://schemas.microsoft.com/office/powerpoint/2010/main" val="3304020135"/>
+        <p14:creationId xmlns:p14="http://schemas.microsoft.com/office/powerpoint/2010/main" val="285267148"/>
       </p:ext>
     </p:extLst>
   </p:cSld>
@@ -5088,12 +5614,20 @@
 <file path=ppt/slides/slide5.xml><?xml version="1.0" encoding="utf-8"?>
 <p:sld xmlns:a="http://schemas.openxmlformats.org/drawingml/2006/main" xmlns:r="http://schemas.openxmlformats.org/officeDocument/2006/relationships" xmlns:p="http://schemas.openxmlformats.org/presentationml/2006/main">
   <p:cSld>
+    <p:bg>
+      <p:bgPr>
+        <a:solidFill>
+          <a:schemeClr val="tx1"/>
+        </a:solidFill>
+        <a:effectLst/>
+      </p:bgPr>
+    </p:bg>
     <p:spTree>
       <p:nvGrpSpPr>
         <p:cNvPr id="1" name="">
           <a:extLst>
             <a:ext uri="{FF2B5EF4-FFF2-40B4-BE49-F238E27FC236}">
-              <a16:creationId xmlns:a16="http://schemas.microsoft.com/office/drawing/2014/main" id="{8E62C374-C77D-801A-AAAD-CAFCDDAF8DB4}"/>
+              <a16:creationId xmlns:a16="http://schemas.microsoft.com/office/drawing/2014/main" id="{3C12C669-7C1D-B720-4155-E9FB3CB19C80}"/>
             </a:ext>
           </a:extLst>
         </p:cNvPr>
@@ -5110,10 +5644,10 @@
       </p:grpSpPr>
       <p:sp>
         <p:nvSpPr>
-          <p:cNvPr id="3" name="TextBox 2">
-            <a:extLst>
-              <a:ext uri="{FF2B5EF4-FFF2-40B4-BE49-F238E27FC236}">
-                <a16:creationId xmlns:a16="http://schemas.microsoft.com/office/drawing/2014/main" id="{752A2FA6-BBA8-957E-7C51-C6B1F2013A85}"/>
+          <p:cNvPr id="5" name="TextBox 4">
+            <a:extLst>
+              <a:ext uri="{FF2B5EF4-FFF2-40B4-BE49-F238E27FC236}">
+                <a16:creationId xmlns:a16="http://schemas.microsoft.com/office/drawing/2014/main" id="{A15853E8-108A-F5A5-2DA4-3647616F6342}"/>
               </a:ext>
             </a:extLst>
           </p:cNvPr>
@@ -5122,7 +5656,427 @@
         </p:nvSpPr>
         <p:spPr>
           <a:xfrm>
-            <a:off x="393192" y="972372"/>
+            <a:off x="2820924" y="2603808"/>
+            <a:ext cx="6190488" cy="707886"/>
+          </a:xfrm>
+          <a:prstGeom prst="rect">
+            <a:avLst/>
+          </a:prstGeom>
+          <a:noFill/>
+        </p:spPr>
+        <p:txBody>
+          <a:bodyPr wrap="square">
+            <a:spAutoFit/>
+          </a:bodyPr>
+          <a:lstStyle/>
+          <a:p>
+            <a:pPr algn="ctr">
+              <a:buNone/>
+            </a:pPr>
+            <a:r>
+              <a:rPr lang="en-IN" sz="4000" b="1">
+                <a:solidFill>
+                  <a:schemeClr val="accent6">
+                    <a:lumMod val="60000"/>
+                    <a:lumOff val="40000"/>
+                  </a:schemeClr>
+                </a:solidFill>
+              </a:rPr>
+              <a:t>Major Limitations </a:t>
+            </a:r>
+            <a:r>
+              <a:rPr lang="en-IN" sz="4000" b="1" dirty="0">
+                <a:solidFill>
+                  <a:schemeClr val="accent6">
+                    <a:lumMod val="60000"/>
+                    <a:lumOff val="40000"/>
+                  </a:schemeClr>
+                </a:solidFill>
+              </a:rPr>
+              <a:t>of LLMs</a:t>
+            </a:r>
+          </a:p>
+        </p:txBody>
+      </p:sp>
+    </p:spTree>
+    <p:extLst>
+      <p:ext uri="{BB962C8B-B14F-4D97-AF65-F5344CB8AC3E}">
+        <p14:creationId xmlns:p14="http://schemas.microsoft.com/office/powerpoint/2010/main" val="2316698548"/>
+      </p:ext>
+    </p:extLst>
+  </p:cSld>
+  <p:clrMapOvr>
+    <a:masterClrMapping/>
+  </p:clrMapOvr>
+</p:sld>
+</file>
+
+<file path=ppt/slides/slide6.xml><?xml version="1.0" encoding="utf-8"?>
+<p:sld xmlns:a="http://schemas.openxmlformats.org/drawingml/2006/main" xmlns:r="http://schemas.openxmlformats.org/officeDocument/2006/relationships" xmlns:p="http://schemas.openxmlformats.org/presentationml/2006/main">
+  <p:cSld>
+    <p:bg>
+      <p:bgPr>
+        <a:solidFill>
+          <a:schemeClr val="tx1"/>
+        </a:solidFill>
+        <a:effectLst/>
+      </p:bgPr>
+    </p:bg>
+    <p:spTree>
+      <p:nvGrpSpPr>
+        <p:cNvPr id="1" name="">
+          <a:extLst>
+            <a:ext uri="{FF2B5EF4-FFF2-40B4-BE49-F238E27FC236}">
+              <a16:creationId xmlns:a16="http://schemas.microsoft.com/office/drawing/2014/main" id="{7B0532FE-CD39-A2C3-B0BD-8C5DFB58A134}"/>
+            </a:ext>
+          </a:extLst>
+        </p:cNvPr>
+        <p:cNvGrpSpPr/>
+        <p:nvPr/>
+      </p:nvGrpSpPr>
+      <p:grpSpPr>
+        <a:xfrm>
+          <a:off x="0" y="0"/>
+          <a:ext cx="0" cy="0"/>
+          <a:chOff x="0" y="0"/>
+          <a:chExt cx="0" cy="0"/>
+        </a:xfrm>
+      </p:grpSpPr>
+      <p:sp>
+        <p:nvSpPr>
+          <p:cNvPr id="3" name="TextBox 2">
+            <a:extLst>
+              <a:ext uri="{FF2B5EF4-FFF2-40B4-BE49-F238E27FC236}">
+                <a16:creationId xmlns:a16="http://schemas.microsoft.com/office/drawing/2014/main" id="{EC76CA84-831C-002D-60F5-E7FDDB09A58E}"/>
+              </a:ext>
+            </a:extLst>
+          </p:cNvPr>
+          <p:cNvSpPr txBox="1"/>
+          <p:nvPr/>
+        </p:nvSpPr>
+        <p:spPr>
+          <a:xfrm>
+            <a:off x="210312" y="442020"/>
+            <a:ext cx="11771376" cy="4893647"/>
+          </a:xfrm>
+          <a:prstGeom prst="rect">
+            <a:avLst/>
+          </a:prstGeom>
+          <a:noFill/>
+        </p:spPr>
+        <p:txBody>
+          <a:bodyPr wrap="square">
+            <a:spAutoFit/>
+          </a:bodyPr>
+          <a:lstStyle/>
+          <a:p>
+            <a:pPr marL="457200" indent="-457200">
+              <a:buAutoNum type="arabicPeriod"/>
+            </a:pPr>
+            <a:r>
+              <a:rPr lang="en-IN" sz="2400" b="1">
+                <a:solidFill>
+                  <a:schemeClr val="accent6">
+                    <a:lumMod val="60000"/>
+                    <a:lumOff val="40000"/>
+                  </a:schemeClr>
+                </a:solidFill>
+              </a:rPr>
+              <a:t>Hallucination</a:t>
+            </a:r>
+          </a:p>
+          <a:p>
+            <a:pPr marL="457200" indent="-457200">
+              <a:buAutoNum type="arabicPeriod"/>
+            </a:pPr>
+            <a:endParaRPr lang="en-IN" sz="2400" b="1">
+              <a:solidFill>
+                <a:schemeClr val="accent6">
+                  <a:lumMod val="60000"/>
+                  <a:lumOff val="40000"/>
+                </a:schemeClr>
+              </a:solidFill>
+            </a:endParaRPr>
+          </a:p>
+          <a:p>
+            <a:r>
+              <a:rPr lang="en-IN" sz="2400">
+                <a:solidFill>
+                  <a:schemeClr val="accent6">
+                    <a:lumMod val="60000"/>
+                    <a:lumOff val="40000"/>
+                  </a:schemeClr>
+                </a:solidFill>
+              </a:rPr>
+              <a:t>An </a:t>
+            </a:r>
+            <a:r>
+              <a:rPr lang="en-IN" sz="2400" dirty="0">
+                <a:solidFill>
+                  <a:schemeClr val="accent6">
+                    <a:lumMod val="60000"/>
+                    <a:lumOff val="40000"/>
+                  </a:schemeClr>
+                </a:solidFill>
+              </a:rPr>
+              <a:t>LLM can generate information that sounds convincing but is incorrect.</a:t>
+            </a:r>
+          </a:p>
+          <a:p>
+            <a:pPr>
+              <a:buNone/>
+            </a:pPr>
+            <a:endParaRPr lang="en-IN" sz="2400" dirty="0">
+              <a:solidFill>
+                <a:schemeClr val="accent6">
+                  <a:lumMod val="60000"/>
+                  <a:lumOff val="40000"/>
+                </a:schemeClr>
+              </a:solidFill>
+            </a:endParaRPr>
+          </a:p>
+          <a:p>
+            <a:pPr>
+              <a:buNone/>
+            </a:pPr>
+            <a:r>
+              <a:rPr lang="en-IN" sz="2400" dirty="0">
+                <a:solidFill>
+                  <a:schemeClr val="accent6">
+                    <a:lumMod val="60000"/>
+                    <a:lumOff val="40000"/>
+                  </a:schemeClr>
+                </a:solidFill>
+              </a:rPr>
+              <a:t>For example: </a:t>
+            </a:r>
+          </a:p>
+          <a:p>
+            <a:pPr marL="342900" indent="-342900">
+              <a:buFont typeface="Arial" panose="020B0604020202020204" pitchFamily="34" charset="0"/>
+              <a:buChar char="•"/>
+            </a:pPr>
+            <a:r>
+              <a:rPr lang="en-IN" sz="2400" i="1" dirty="0">
+                <a:solidFill>
+                  <a:schemeClr val="accent6">
+                    <a:lumMod val="60000"/>
+                    <a:lumOff val="40000"/>
+                  </a:schemeClr>
+                </a:solidFill>
+              </a:rPr>
+              <a:t>You  upload a pdf research paper and ask "Who wrote this research paper?”</a:t>
+            </a:r>
+          </a:p>
+          <a:p>
+            <a:r>
+              <a:rPr lang="en-IN" sz="2400" dirty="0">
+                <a:solidFill>
+                  <a:schemeClr val="accent6">
+                    <a:lumMod val="60000"/>
+                    <a:lumOff val="40000"/>
+                  </a:schemeClr>
+                </a:solidFill>
+              </a:rPr>
+              <a:t>The model might confidently provide a </a:t>
+            </a:r>
+            <a:r>
+              <a:rPr lang="en-IN" sz="2400" b="1" u="sng" dirty="0">
+                <a:solidFill>
+                  <a:schemeClr val="accent6">
+                    <a:lumMod val="60000"/>
+                    <a:lumOff val="40000"/>
+                  </a:schemeClr>
+                </a:solidFill>
+              </a:rPr>
+              <a:t>wrong</a:t>
+            </a:r>
+            <a:r>
+              <a:rPr lang="en-IN" sz="2400" dirty="0">
+                <a:solidFill>
+                  <a:schemeClr val="accent6">
+                    <a:lumMod val="60000"/>
+                    <a:lumOff val="40000"/>
+                  </a:schemeClr>
+                </a:solidFill>
+              </a:rPr>
+              <a:t> author.</a:t>
+            </a:r>
+          </a:p>
+          <a:p>
+            <a:pPr>
+              <a:buNone/>
+            </a:pPr>
+            <a:endParaRPr lang="en-IN" sz="2400" i="1" dirty="0">
+              <a:solidFill>
+                <a:schemeClr val="accent6">
+                  <a:lumMod val="60000"/>
+                  <a:lumOff val="40000"/>
+                </a:schemeClr>
+              </a:solidFill>
+            </a:endParaRPr>
+          </a:p>
+          <a:p>
+            <a:pPr>
+              <a:buNone/>
+            </a:pPr>
+            <a:endParaRPr lang="en-IN" sz="2400" i="1" dirty="0">
+              <a:solidFill>
+                <a:schemeClr val="accent6">
+                  <a:lumMod val="60000"/>
+                  <a:lumOff val="40000"/>
+                </a:schemeClr>
+              </a:solidFill>
+            </a:endParaRPr>
+          </a:p>
+          <a:p>
+            <a:pPr marL="342900" indent="-342900">
+              <a:buFont typeface="Arial" panose="020B0604020202020204" pitchFamily="34" charset="0"/>
+              <a:buChar char="•"/>
+            </a:pPr>
+            <a:r>
+              <a:rPr lang="en-IN" sz="2400" i="1" dirty="0">
+                <a:solidFill>
+                  <a:schemeClr val="accent6">
+                    <a:lumMod val="60000"/>
+                    <a:lumOff val="40000"/>
+                  </a:schemeClr>
+                </a:solidFill>
+              </a:rPr>
+              <a:t>"Write a detailed summary of </a:t>
+            </a:r>
+            <a:r>
+              <a:rPr lang="en-IN" sz="2400" i="1">
+                <a:solidFill>
+                  <a:schemeClr val="accent6">
+                    <a:lumMod val="60000"/>
+                    <a:lumOff val="40000"/>
+                  </a:schemeClr>
+                </a:solidFill>
+              </a:rPr>
+              <a:t>the Monkey-Cat </a:t>
+            </a:r>
+            <a:r>
+              <a:rPr lang="en-IN" sz="2400" i="1" dirty="0">
+                <a:solidFill>
+                  <a:schemeClr val="accent6">
+                    <a:lumMod val="60000"/>
+                    <a:lumOff val="40000"/>
+                  </a:schemeClr>
+                </a:solidFill>
+              </a:rPr>
+              <a:t>Treaty Signed between Australia and the Africa coalition, including the names of the lead negotiators .“</a:t>
+            </a:r>
+          </a:p>
+          <a:p>
+            <a:r>
+              <a:rPr lang="en-IN" sz="2400" dirty="0">
+                <a:solidFill>
+                  <a:schemeClr val="accent6">
+                    <a:lumMod val="60000"/>
+                    <a:lumOff val="40000"/>
+                  </a:schemeClr>
+                </a:solidFill>
+              </a:rPr>
+              <a:t>The model might confidently make-up some </a:t>
+            </a:r>
+            <a:r>
+              <a:rPr lang="en-IN" sz="2400" b="1" u="sng" dirty="0">
+                <a:solidFill>
+                  <a:schemeClr val="accent6">
+                    <a:lumMod val="60000"/>
+                    <a:lumOff val="40000"/>
+                  </a:schemeClr>
+                </a:solidFill>
+              </a:rPr>
+              <a:t>gibberish  facts</a:t>
+            </a:r>
+            <a:r>
+              <a:rPr lang="en-IN" sz="2400" dirty="0">
+                <a:solidFill>
+                  <a:schemeClr val="accent6">
+                    <a:lumMod val="60000"/>
+                    <a:lumOff val="40000"/>
+                  </a:schemeClr>
+                </a:solidFill>
+              </a:rPr>
+              <a:t>.</a:t>
+            </a:r>
+          </a:p>
+          <a:p>
+            <a:pPr>
+              <a:buNone/>
+            </a:pPr>
+            <a:endParaRPr lang="en-IN" sz="2400" dirty="0">
+              <a:solidFill>
+                <a:schemeClr val="accent6">
+                  <a:lumMod val="60000"/>
+                  <a:lumOff val="40000"/>
+                </a:schemeClr>
+              </a:solidFill>
+            </a:endParaRPr>
+          </a:p>
+        </p:txBody>
+      </p:sp>
+    </p:spTree>
+    <p:extLst>
+      <p:ext uri="{BB962C8B-B14F-4D97-AF65-F5344CB8AC3E}">
+        <p14:creationId xmlns:p14="http://schemas.microsoft.com/office/powerpoint/2010/main" val="3943681584"/>
+      </p:ext>
+    </p:extLst>
+  </p:cSld>
+  <p:clrMapOvr>
+    <a:masterClrMapping/>
+  </p:clrMapOvr>
+</p:sld>
+</file>
+
+<file path=ppt/slides/slide7.xml><?xml version="1.0" encoding="utf-8"?>
+<p:sld xmlns:a="http://schemas.openxmlformats.org/drawingml/2006/main" xmlns:r="http://schemas.openxmlformats.org/officeDocument/2006/relationships" xmlns:p="http://schemas.openxmlformats.org/presentationml/2006/main">
+  <p:cSld>
+    <p:bg>
+      <p:bgPr>
+        <a:solidFill>
+          <a:schemeClr val="tx1"/>
+        </a:solidFill>
+        <a:effectLst/>
+      </p:bgPr>
+    </p:bg>
+    <p:spTree>
+      <p:nvGrpSpPr>
+        <p:cNvPr id="1" name="">
+          <a:extLst>
+            <a:ext uri="{FF2B5EF4-FFF2-40B4-BE49-F238E27FC236}">
+              <a16:creationId xmlns:a16="http://schemas.microsoft.com/office/drawing/2014/main" id="{BA8DADC7-BDE7-F2D2-902E-D266A9B10B7A}"/>
+            </a:ext>
+          </a:extLst>
+        </p:cNvPr>
+        <p:cNvGrpSpPr/>
+        <p:nvPr/>
+      </p:nvGrpSpPr>
+      <p:grpSpPr>
+        <a:xfrm>
+          <a:off x="0" y="0"/>
+          <a:ext cx="0" cy="0"/>
+          <a:chOff x="0" y="0"/>
+          <a:chExt cx="0" cy="0"/>
+        </a:xfrm>
+      </p:grpSpPr>
+      <p:sp>
+        <p:nvSpPr>
+          <p:cNvPr id="3" name="TextBox 2">
+            <a:extLst>
+              <a:ext uri="{FF2B5EF4-FFF2-40B4-BE49-F238E27FC236}">
+                <a16:creationId xmlns:a16="http://schemas.microsoft.com/office/drawing/2014/main" id="{752A2FA6-BBA8-957E-7C51-C6B1F2013A85}"/>
+              </a:ext>
+            </a:extLst>
+          </p:cNvPr>
+          <p:cNvSpPr txBox="1"/>
+          <p:nvPr/>
+        </p:nvSpPr>
+        <p:spPr>
+          <a:xfrm>
+            <a:off x="183011" y="291405"/>
             <a:ext cx="10899648" cy="3046988"/>
           </a:xfrm>
           <a:prstGeom prst="rect">
@@ -5247,51 +6201,6 @@
                 </a:solidFill>
               </a:rPr>
               <a:t>LLM should NOT be treated as a live information source.</a:t>
-            </a:r>
-          </a:p>
-        </p:txBody>
-      </p:sp>
-      <p:sp>
-        <p:nvSpPr>
-          <p:cNvPr id="5" name="TextBox 4">
-            <a:extLst>
-              <a:ext uri="{FF2B5EF4-FFF2-40B4-BE49-F238E27FC236}">
-                <a16:creationId xmlns:a16="http://schemas.microsoft.com/office/drawing/2014/main" id="{3E85E53A-8DE0-EB04-06D9-150EDC20B52A}"/>
-              </a:ext>
-            </a:extLst>
-          </p:cNvPr>
-          <p:cNvSpPr txBox="1"/>
-          <p:nvPr/>
-        </p:nvSpPr>
-        <p:spPr>
-          <a:xfrm>
-            <a:off x="1723644" y="253800"/>
-            <a:ext cx="6190488" cy="461665"/>
-          </a:xfrm>
-          <a:prstGeom prst="rect">
-            <a:avLst/>
-          </a:prstGeom>
-          <a:noFill/>
-        </p:spPr>
-        <p:txBody>
-          <a:bodyPr wrap="square">
-            <a:spAutoFit/>
-          </a:bodyPr>
-          <a:lstStyle/>
-          <a:p>
-            <a:pPr>
-              <a:buNone/>
-            </a:pPr>
-            <a:r>
-              <a:rPr lang="en-IN" sz="2400" b="1" dirty="0">
-                <a:solidFill>
-                  <a:schemeClr val="accent6">
-                    <a:lumMod val="60000"/>
-                    <a:lumOff val="40000"/>
-                  </a:schemeClr>
-                </a:solidFill>
-              </a:rPr>
-              <a:t>Major limitations of LLMs</a:t>
             </a:r>
           </a:p>
         </p:txBody>
@@ -5404,15 +6313,15 @@
         </p:spPr>
         <p:style>
           <a:lnRef idx="2">
-            <a:schemeClr val="accent1">
+            <a:schemeClr val="accent6">
               <a:shade val="15000"/>
             </a:schemeClr>
           </a:lnRef>
           <a:fillRef idx="1">
-            <a:schemeClr val="accent1"/>
+            <a:schemeClr val="accent6"/>
           </a:fillRef>
           <a:effectRef idx="0">
-            <a:schemeClr val="accent1"/>
+            <a:schemeClr val="accent6"/>
           </a:effectRef>
           <a:fontRef idx="minor">
             <a:schemeClr val="lt1"/>
@@ -5621,7 +6530,7 @@
     </p:spTree>
     <p:extLst>
       <p:ext uri="{BB962C8B-B14F-4D97-AF65-F5344CB8AC3E}">
-        <p14:creationId xmlns:p14="http://schemas.microsoft.com/office/powerpoint/2010/main" val="3098020753"/>
+        <p14:creationId xmlns:p14="http://schemas.microsoft.com/office/powerpoint/2010/main" val="547482872"/>
       </p:ext>
     </p:extLst>
   </p:cSld>
@@ -5631,15 +6540,23 @@
 </p:sld>
 </file>
 
-<file path=ppt/slides/slide6.xml><?xml version="1.0" encoding="utf-8"?>
+<file path=ppt/slides/slide8.xml><?xml version="1.0" encoding="utf-8"?>
 <p:sld xmlns:a="http://schemas.openxmlformats.org/drawingml/2006/main" xmlns:r="http://schemas.openxmlformats.org/officeDocument/2006/relationships" xmlns:p="http://schemas.openxmlformats.org/presentationml/2006/main">
   <p:cSld>
+    <p:bg>
+      <p:bgPr>
+        <a:solidFill>
+          <a:schemeClr val="tx1"/>
+        </a:solidFill>
+        <a:effectLst/>
+      </p:bgPr>
+    </p:bg>
     <p:spTree>
       <p:nvGrpSpPr>
         <p:cNvPr id="1" name="">
           <a:extLst>
             <a:ext uri="{FF2B5EF4-FFF2-40B4-BE49-F238E27FC236}">
-              <a16:creationId xmlns:a16="http://schemas.microsoft.com/office/drawing/2014/main" id="{A7F293B1-7FE5-9511-B719-1C48F1BA7E96}"/>
+              <a16:creationId xmlns:a16="http://schemas.microsoft.com/office/drawing/2014/main" id="{03AC8A84-2A7B-BAE2-15AC-483E2E06E739}"/>
             </a:ext>
           </a:extLst>
         </p:cNvPr>
@@ -5659,7 +6576,7 @@
           <p:cNvPr id="3" name="TextBox 2">
             <a:extLst>
               <a:ext uri="{FF2B5EF4-FFF2-40B4-BE49-F238E27FC236}">
-                <a16:creationId xmlns:a16="http://schemas.microsoft.com/office/drawing/2014/main" id="{AB1BFB36-E869-39B2-9C4F-E449717FD6C4}"/>
+                <a16:creationId xmlns:a16="http://schemas.microsoft.com/office/drawing/2014/main" id="{E820BE88-5ECE-EE47-C9E5-9AB86A0D4E36}"/>
               </a:ext>
             </a:extLst>
           </p:cNvPr>
@@ -5668,8 +6585,8 @@
         </p:nvSpPr>
         <p:spPr>
           <a:xfrm>
-            <a:off x="310896" y="1255836"/>
-            <a:ext cx="6830568" cy="1569660"/>
+            <a:off x="379476" y="322005"/>
+            <a:ext cx="6830568" cy="1938992"/>
           </a:xfrm>
           <a:prstGeom prst="rect">
             <a:avLst/>
@@ -5691,8 +6608,29 @@
                   </a:schemeClr>
                 </a:solidFill>
               </a:rPr>
-              <a:t>3. Context limitations</a:t>
-            </a:r>
+              <a:t>3. </a:t>
+            </a:r>
+            <a:r>
+              <a:rPr lang="en-IN" sz="2400" b="1">
+                <a:solidFill>
+                  <a:schemeClr val="accent6">
+                    <a:lumMod val="60000"/>
+                    <a:lumOff val="40000"/>
+                  </a:schemeClr>
+                </a:solidFill>
+              </a:rPr>
+              <a:t>Context limitations</a:t>
+            </a:r>
+          </a:p>
+          <a:p>
+            <a:endParaRPr lang="en-IN" sz="2400" b="1" dirty="0">
+              <a:solidFill>
+                <a:schemeClr val="accent6">
+                  <a:lumMod val="60000"/>
+                  <a:lumOff val="40000"/>
+                </a:schemeClr>
+              </a:solidFill>
+            </a:endParaRPr>
           </a:p>
           <a:p>
             <a:r>
@@ -5756,55 +6694,10 @@
       </p:sp>
       <p:sp>
         <p:nvSpPr>
-          <p:cNvPr id="5" name="TextBox 4">
-            <a:extLst>
-              <a:ext uri="{FF2B5EF4-FFF2-40B4-BE49-F238E27FC236}">
-                <a16:creationId xmlns:a16="http://schemas.microsoft.com/office/drawing/2014/main" id="{1340ECB2-E011-4BFC-A245-DBF38290A6AB}"/>
-              </a:ext>
-            </a:extLst>
-          </p:cNvPr>
-          <p:cNvSpPr txBox="1"/>
-          <p:nvPr/>
-        </p:nvSpPr>
-        <p:spPr>
-          <a:xfrm>
-            <a:off x="1723644" y="253800"/>
-            <a:ext cx="6190488" cy="461665"/>
-          </a:xfrm>
-          <a:prstGeom prst="rect">
-            <a:avLst/>
-          </a:prstGeom>
-          <a:noFill/>
-        </p:spPr>
-        <p:txBody>
-          <a:bodyPr wrap="square">
-            <a:spAutoFit/>
-          </a:bodyPr>
-          <a:lstStyle/>
-          <a:p>
-            <a:pPr>
-              <a:buNone/>
-            </a:pPr>
-            <a:r>
-              <a:rPr lang="en-IN" sz="2400" b="1" dirty="0">
-                <a:solidFill>
-                  <a:schemeClr val="accent6">
-                    <a:lumMod val="60000"/>
-                    <a:lumOff val="40000"/>
-                  </a:schemeClr>
-                </a:solidFill>
-              </a:rPr>
-              <a:t>Major limitations of LLMs</a:t>
-            </a:r>
-          </a:p>
-        </p:txBody>
-      </p:sp>
-      <p:sp>
-        <p:nvSpPr>
-          <p:cNvPr id="2" name="Rectangle: Rounded Corners 1">
-            <a:extLst>
-              <a:ext uri="{FF2B5EF4-FFF2-40B4-BE49-F238E27FC236}">
-                <a16:creationId xmlns:a16="http://schemas.microsoft.com/office/drawing/2014/main" id="{72006BC2-5411-3BFB-2281-74B7F2C9E499}"/>
+          <p:cNvPr id="7" name="Rectangle: Rounded Corners 6">
+            <a:extLst>
+              <a:ext uri="{FF2B5EF4-FFF2-40B4-BE49-F238E27FC236}">
+                <a16:creationId xmlns:a16="http://schemas.microsoft.com/office/drawing/2014/main" id="{E9EE7E4E-1ADB-479F-CA79-BCA578B06068}"/>
               </a:ext>
             </a:extLst>
           </p:cNvPr>
@@ -5913,10 +6806,10 @@
       </p:sp>
       <p:sp>
         <p:nvSpPr>
-          <p:cNvPr id="6" name="TextBox 5">
-            <a:extLst>
-              <a:ext uri="{FF2B5EF4-FFF2-40B4-BE49-F238E27FC236}">
-                <a16:creationId xmlns:a16="http://schemas.microsoft.com/office/drawing/2014/main" id="{7433A501-6EAD-DA27-AA4A-B0E097B70729}"/>
+          <p:cNvPr id="9" name="TextBox 8">
+            <a:extLst>
+              <a:ext uri="{FF2B5EF4-FFF2-40B4-BE49-F238E27FC236}">
+                <a16:creationId xmlns:a16="http://schemas.microsoft.com/office/drawing/2014/main" id="{FC865C97-DDF9-AF38-9DE2-CD1758C6B2F3}"/>
               </a:ext>
             </a:extLst>
           </p:cNvPr>
@@ -5925,8 +6818,8 @@
         </p:nvSpPr>
         <p:spPr>
           <a:xfrm>
-            <a:off x="379476" y="5773203"/>
-            <a:ext cx="9797796" cy="830997"/>
+            <a:off x="432054" y="5021450"/>
+            <a:ext cx="9797796" cy="1569660"/>
           </a:xfrm>
           <a:prstGeom prst="rect">
             <a:avLst/>
@@ -5948,17 +6841,109 @@
                   </a:schemeClr>
                 </a:solidFill>
               </a:rPr>
-              <a:t>If context gets overloaded, LLM may become expensive, slow, or cut out some info.</a:t>
-            </a:r>
-          </a:p>
-        </p:txBody>
-      </p:sp>
-      <p:sp>
-        <p:nvSpPr>
-          <p:cNvPr id="7" name="Arrow: Right 6">
-            <a:extLst>
-              <a:ext uri="{FF2B5EF4-FFF2-40B4-BE49-F238E27FC236}">
-                <a16:creationId xmlns:a16="http://schemas.microsoft.com/office/drawing/2014/main" id="{E9EC2FF2-DE4E-C3EA-01DD-D9A07DE1CFEB}"/>
+              <a:t>If context gets overloaded, LLM may </a:t>
+            </a:r>
+            <a:r>
+              <a:rPr lang="en-IN" sz="2400">
+                <a:solidFill>
+                  <a:schemeClr val="accent6">
+                    <a:lumMod val="60000"/>
+                    <a:lumOff val="40000"/>
+                  </a:schemeClr>
+                </a:solidFill>
+              </a:rPr>
+              <a:t>become </a:t>
+            </a:r>
+          </a:p>
+          <a:p>
+            <a:pPr marL="342900" indent="-342900">
+              <a:buFont typeface="Arial" panose="020B0604020202020204" pitchFamily="34" charset="0"/>
+              <a:buChar char="•"/>
+            </a:pPr>
+            <a:r>
+              <a:rPr lang="en-IN" sz="2400">
+                <a:solidFill>
+                  <a:schemeClr val="accent6">
+                    <a:lumMod val="60000"/>
+                    <a:lumOff val="40000"/>
+                  </a:schemeClr>
+                </a:solidFill>
+              </a:rPr>
+              <a:t>Expensive  ( because more tokens -&gt; more cost)</a:t>
+            </a:r>
+          </a:p>
+          <a:p>
+            <a:pPr marL="342900" indent="-342900">
+              <a:buFont typeface="Arial" panose="020B0604020202020204" pitchFamily="34" charset="0"/>
+              <a:buChar char="•"/>
+            </a:pPr>
+            <a:r>
+              <a:rPr lang="en-IN" sz="2400">
+                <a:solidFill>
+                  <a:schemeClr val="accent6">
+                    <a:lumMod val="60000"/>
+                    <a:lumOff val="40000"/>
+                  </a:schemeClr>
+                </a:solidFill>
+              </a:rPr>
+              <a:t>Slow   ( because more input -&gt; more processing)</a:t>
+            </a:r>
+          </a:p>
+          <a:p>
+            <a:pPr marL="342900" indent="-342900">
+              <a:buFont typeface="Arial" panose="020B0604020202020204" pitchFamily="34" charset="0"/>
+              <a:buChar char="•"/>
+            </a:pPr>
+            <a:r>
+              <a:rPr lang="en-IN" sz="2400">
+                <a:solidFill>
+                  <a:schemeClr val="accent6">
+                    <a:lumMod val="60000"/>
+                    <a:lumOff val="40000"/>
+                  </a:schemeClr>
+                </a:solidFill>
+              </a:rPr>
+              <a:t>Cut </a:t>
+            </a:r>
+            <a:r>
+              <a:rPr lang="en-IN" sz="2400" dirty="0">
+                <a:solidFill>
+                  <a:schemeClr val="accent6">
+                    <a:lumMod val="60000"/>
+                    <a:lumOff val="40000"/>
+                  </a:schemeClr>
+                </a:solidFill>
+              </a:rPr>
+              <a:t>out some </a:t>
+            </a:r>
+            <a:r>
+              <a:rPr lang="en-IN" sz="2400">
+                <a:solidFill>
+                  <a:schemeClr val="accent6">
+                    <a:lumMod val="60000"/>
+                    <a:lumOff val="40000"/>
+                  </a:schemeClr>
+                </a:solidFill>
+              </a:rPr>
+              <a:t>info. (because of context window size)</a:t>
+            </a:r>
+            <a:endParaRPr lang="en-IN" sz="2400" dirty="0">
+              <a:solidFill>
+                <a:schemeClr val="accent6">
+                  <a:lumMod val="60000"/>
+                  <a:lumOff val="40000"/>
+                </a:schemeClr>
+              </a:solidFill>
+            </a:endParaRPr>
+          </a:p>
+        </p:txBody>
+      </p:sp>
+      <p:sp>
+        <p:nvSpPr>
+          <p:cNvPr id="11" name="Arrow: Right 10">
+            <a:extLst>
+              <a:ext uri="{FF2B5EF4-FFF2-40B4-BE49-F238E27FC236}">
+                <a16:creationId xmlns:a16="http://schemas.microsoft.com/office/drawing/2014/main" id="{89A7C070-9A7B-7071-F610-E0159E885099}"/>
               </a:ext>
             </a:extLst>
           </p:cNvPr>
@@ -6001,10 +6986,10 @@
       </p:sp>
       <p:sp>
         <p:nvSpPr>
-          <p:cNvPr id="8" name="Rectangle: Rounded Corners 7">
-            <a:extLst>
-              <a:ext uri="{FF2B5EF4-FFF2-40B4-BE49-F238E27FC236}">
-                <a16:creationId xmlns:a16="http://schemas.microsoft.com/office/drawing/2014/main" id="{E50F7B95-9B77-F156-88B1-3F4FD02D4379}"/>
+          <p:cNvPr id="13" name="Rectangle: Rounded Corners 12">
+            <a:extLst>
+              <a:ext uri="{FF2B5EF4-FFF2-40B4-BE49-F238E27FC236}">
+                <a16:creationId xmlns:a16="http://schemas.microsoft.com/office/drawing/2014/main" id="{A2FCF15C-CA13-808D-14B7-7AB943DC4D7A}"/>
               </a:ext>
             </a:extLst>
           </p:cNvPr>
@@ -6013,8 +6998,8 @@
         </p:nvSpPr>
         <p:spPr>
           <a:xfrm>
-            <a:off x="5398008" y="2577143"/>
-            <a:ext cx="3825240" cy="2275856"/>
+            <a:off x="5398008" y="2721019"/>
+            <a:ext cx="3825240" cy="1840409"/>
           </a:xfrm>
           <a:prstGeom prst="roundRect">
             <a:avLst/>
@@ -6051,10 +7036,10 @@
       </p:sp>
       <p:sp>
         <p:nvSpPr>
-          <p:cNvPr id="10" name="Arrow: Right 9">
-            <a:extLst>
-              <a:ext uri="{FF2B5EF4-FFF2-40B4-BE49-F238E27FC236}">
-                <a16:creationId xmlns:a16="http://schemas.microsoft.com/office/drawing/2014/main" id="{90BCB91A-929C-6915-D146-87EEDDEF7F86}"/>
+          <p:cNvPr id="15" name="Arrow: Right 14">
+            <a:extLst>
+              <a:ext uri="{FF2B5EF4-FFF2-40B4-BE49-F238E27FC236}">
+                <a16:creationId xmlns:a16="http://schemas.microsoft.com/office/drawing/2014/main" id="{852E207C-83E3-E228-F3C7-37A82941A803}"/>
               </a:ext>
             </a:extLst>
           </p:cNvPr>
@@ -6097,10 +7082,10 @@
       </p:sp>
       <p:sp>
         <p:nvSpPr>
-          <p:cNvPr id="11" name="TextBox 10">
-            <a:extLst>
-              <a:ext uri="{FF2B5EF4-FFF2-40B4-BE49-F238E27FC236}">
-                <a16:creationId xmlns:a16="http://schemas.microsoft.com/office/drawing/2014/main" id="{F0C10CCD-AC3D-BB3F-E0CA-F5C38B44373C}"/>
+          <p:cNvPr id="17" name="TextBox 16">
+            <a:extLst>
+              <a:ext uri="{FF2B5EF4-FFF2-40B4-BE49-F238E27FC236}">
+                <a16:creationId xmlns:a16="http://schemas.microsoft.com/office/drawing/2014/main" id="{E40267D4-C0BC-AC46-5FDA-3DA2D49E29A4}"/>
               </a:ext>
             </a:extLst>
           </p:cNvPr>
@@ -6147,10 +7132,10 @@
       </p:sp>
       <p:sp>
         <p:nvSpPr>
-          <p:cNvPr id="13" name="TextBox 12">
-            <a:extLst>
-              <a:ext uri="{FF2B5EF4-FFF2-40B4-BE49-F238E27FC236}">
-                <a16:creationId xmlns:a16="http://schemas.microsoft.com/office/drawing/2014/main" id="{DC66AB8F-8393-4B43-A821-F520A14F00C2}"/>
+          <p:cNvPr id="19" name="TextBox 18">
+            <a:extLst>
+              <a:ext uri="{FF2B5EF4-FFF2-40B4-BE49-F238E27FC236}">
+                <a16:creationId xmlns:a16="http://schemas.microsoft.com/office/drawing/2014/main" id="{F4175DF3-F52A-6A33-0273-537C100709DD}"/>
               </a:ext>
             </a:extLst>
           </p:cNvPr>
@@ -6198,7 +7183,7 @@
     </p:spTree>
     <p:extLst>
       <p:ext uri="{BB962C8B-B14F-4D97-AF65-F5344CB8AC3E}">
-        <p14:creationId xmlns:p14="http://schemas.microsoft.com/office/powerpoint/2010/main" val="3906786142"/>
+        <p14:creationId xmlns:p14="http://schemas.microsoft.com/office/powerpoint/2010/main" val="2010078684"/>
       </p:ext>
     </p:extLst>
   </p:cSld>
@@ -6208,15 +7193,23 @@
 </p:sld>
 </file>
 
-<file path=ppt/slides/slide7.xml><?xml version="1.0" encoding="utf-8"?>
+<file path=ppt/slides/slide9.xml><?xml version="1.0" encoding="utf-8"?>
 <p:sld xmlns:a="http://schemas.openxmlformats.org/drawingml/2006/main" xmlns:r="http://schemas.openxmlformats.org/officeDocument/2006/relationships" xmlns:p="http://schemas.openxmlformats.org/presentationml/2006/main">
   <p:cSld>
+    <p:bg>
+      <p:bgPr>
+        <a:solidFill>
+          <a:schemeClr val="tx1"/>
+        </a:solidFill>
+        <a:effectLst/>
+      </p:bgPr>
+    </p:bg>
     <p:spTree>
       <p:nvGrpSpPr>
         <p:cNvPr id="1" name="">
           <a:extLst>
             <a:ext uri="{FF2B5EF4-FFF2-40B4-BE49-F238E27FC236}">
-              <a16:creationId xmlns:a16="http://schemas.microsoft.com/office/drawing/2014/main" id="{3A565911-7F57-70B6-C258-22DCE8AA582C}"/>
+              <a16:creationId xmlns:a16="http://schemas.microsoft.com/office/drawing/2014/main" id="{405DEAAE-9688-A70B-B0CC-C100367C2741}"/>
             </a:ext>
           </a:extLst>
         </p:cNvPr>
@@ -6236,7 +7229,7 @@
           <p:cNvPr id="3" name="TextBox 2">
             <a:extLst>
               <a:ext uri="{FF2B5EF4-FFF2-40B4-BE49-F238E27FC236}">
-                <a16:creationId xmlns:a16="http://schemas.microsoft.com/office/drawing/2014/main" id="{9F5A368D-AE82-3F0A-2B5E-FA50B6833D3C}"/>
+                <a16:creationId xmlns:a16="http://schemas.microsoft.com/office/drawing/2014/main" id="{361869B7-1DBA-B16A-427B-253DF9E5A708}"/>
               </a:ext>
             </a:extLst>
           </p:cNvPr>
@@ -6386,10 +7379,10 @@
       </p:sp>
       <p:sp>
         <p:nvSpPr>
-          <p:cNvPr id="4" name="TextBox 3">
-            <a:extLst>
-              <a:ext uri="{FF2B5EF4-FFF2-40B4-BE49-F238E27FC236}">
-                <a16:creationId xmlns:a16="http://schemas.microsoft.com/office/drawing/2014/main" id="{A71E5A68-4248-89C8-AD67-F6FE34FE5A56}"/>
+          <p:cNvPr id="5" name="TextBox 4">
+            <a:extLst>
+              <a:ext uri="{FF2B5EF4-FFF2-40B4-BE49-F238E27FC236}">
+                <a16:creationId xmlns:a16="http://schemas.microsoft.com/office/drawing/2014/main" id="{A092C11F-3E50-5E7E-FB38-A5E4F7E2AD60}"/>
               </a:ext>
             </a:extLst>
           </p:cNvPr>
@@ -6516,779 +7509,7 @@
     </p:spTree>
     <p:extLst>
       <p:ext uri="{BB962C8B-B14F-4D97-AF65-F5344CB8AC3E}">
-        <p14:creationId xmlns:p14="http://schemas.microsoft.com/office/powerpoint/2010/main" val="4209025339"/>
-      </p:ext>
-    </p:extLst>
-  </p:cSld>
-  <p:clrMapOvr>
-    <a:masterClrMapping/>
-  </p:clrMapOvr>
-</p:sld>
-</file>
-
-<file path=ppt/slides/slide8.xml><?xml version="1.0" encoding="utf-8"?>
-<p:sld xmlns:a="http://schemas.openxmlformats.org/drawingml/2006/main" xmlns:r="http://schemas.openxmlformats.org/officeDocument/2006/relationships" xmlns:p="http://schemas.openxmlformats.org/presentationml/2006/main">
-  <p:cSld>
-    <p:spTree>
-      <p:nvGrpSpPr>
-        <p:cNvPr id="1" name="">
-          <a:extLst>
-            <a:ext uri="{FF2B5EF4-FFF2-40B4-BE49-F238E27FC236}">
-              <a16:creationId xmlns:a16="http://schemas.microsoft.com/office/drawing/2014/main" id="{6D445A5D-68B0-B15C-1903-282B9FAB152F}"/>
-            </a:ext>
-          </a:extLst>
-        </p:cNvPr>
-        <p:cNvGrpSpPr/>
-        <p:nvPr/>
-      </p:nvGrpSpPr>
-      <p:grpSpPr>
-        <a:xfrm>
-          <a:off x="0" y="0"/>
-          <a:ext cx="0" cy="0"/>
-          <a:chOff x="0" y="0"/>
-          <a:chExt cx="0" cy="0"/>
-        </a:xfrm>
-      </p:grpSpPr>
-      <p:sp>
-        <p:nvSpPr>
-          <p:cNvPr id="3" name="TextBox 2">
-            <a:extLst>
-              <a:ext uri="{FF2B5EF4-FFF2-40B4-BE49-F238E27FC236}">
-                <a16:creationId xmlns:a16="http://schemas.microsoft.com/office/drawing/2014/main" id="{DDDE5E76-ECCD-8F6F-A86E-D0EC4DC79894}"/>
-              </a:ext>
-            </a:extLst>
-          </p:cNvPr>
-          <p:cNvSpPr txBox="1"/>
-          <p:nvPr/>
-        </p:nvSpPr>
-        <p:spPr>
-          <a:xfrm>
-            <a:off x="301752" y="204276"/>
-            <a:ext cx="11045952" cy="1569660"/>
-          </a:xfrm>
-          <a:prstGeom prst="rect">
-            <a:avLst/>
-          </a:prstGeom>
-          <a:noFill/>
-        </p:spPr>
-        <p:txBody>
-          <a:bodyPr wrap="square">
-            <a:spAutoFit/>
-          </a:bodyPr>
-          <a:lstStyle/>
-          <a:p>
-            <a:r>
-              <a:rPr lang="en-IN" sz="2400" b="1" dirty="0">
-                <a:solidFill>
-                  <a:schemeClr val="accent6">
-                    <a:lumMod val="60000"/>
-                    <a:lumOff val="40000"/>
-                  </a:schemeClr>
-                </a:solidFill>
-              </a:rPr>
-              <a:t>5. Bias</a:t>
-            </a:r>
-          </a:p>
-          <a:p>
-            <a:endParaRPr lang="en-IN" sz="2400" b="1" dirty="0">
-              <a:solidFill>
-                <a:schemeClr val="accent6">
-                  <a:lumMod val="60000"/>
-                  <a:lumOff val="40000"/>
-                </a:schemeClr>
-              </a:solidFill>
-            </a:endParaRPr>
-          </a:p>
-          <a:p>
-            <a:r>
-              <a:rPr lang="en-IN" sz="2400" dirty="0">
-                <a:solidFill>
-                  <a:schemeClr val="accent6">
-                    <a:lumMod val="60000"/>
-                    <a:lumOff val="40000"/>
-                  </a:schemeClr>
-                </a:solidFill>
-              </a:rPr>
-              <a:t>LLMs learn patterns from their training data.</a:t>
-            </a:r>
-          </a:p>
-          <a:p>
-            <a:r>
-              <a:rPr lang="en-IN" sz="2400" dirty="0">
-                <a:solidFill>
-                  <a:schemeClr val="accent6">
-                    <a:lumMod val="60000"/>
-                    <a:lumOff val="40000"/>
-                  </a:schemeClr>
-                </a:solidFill>
-              </a:rPr>
-              <a:t>If training data contains biases, those patterns can potentially appear in model outputs.</a:t>
-            </a:r>
-          </a:p>
-        </p:txBody>
-      </p:sp>
-      <p:sp>
-        <p:nvSpPr>
-          <p:cNvPr id="4" name="TextBox 3">
-            <a:extLst>
-              <a:ext uri="{FF2B5EF4-FFF2-40B4-BE49-F238E27FC236}">
-                <a16:creationId xmlns:a16="http://schemas.microsoft.com/office/drawing/2014/main" id="{DD436C10-84E4-CF5C-7B85-B5378EC9BFF2}"/>
-              </a:ext>
-            </a:extLst>
-          </p:cNvPr>
-          <p:cNvSpPr txBox="1"/>
-          <p:nvPr/>
-        </p:nvSpPr>
-        <p:spPr>
-          <a:xfrm>
-            <a:off x="164592" y="2587580"/>
-            <a:ext cx="6473952" cy="1569660"/>
-          </a:xfrm>
-          <a:prstGeom prst="rect">
-            <a:avLst/>
-          </a:prstGeom>
-          <a:noFill/>
-        </p:spPr>
-        <p:txBody>
-          <a:bodyPr wrap="square">
-            <a:spAutoFit/>
-          </a:bodyPr>
-          <a:lstStyle/>
-          <a:p>
-            <a:r>
-              <a:rPr lang="en-IN" sz="2400" i="1" dirty="0">
-                <a:solidFill>
-                  <a:schemeClr val="accent4">
-                    <a:lumMod val="60000"/>
-                    <a:lumOff val="40000"/>
-                  </a:schemeClr>
-                </a:solidFill>
-              </a:rPr>
-              <a:t>“Write a story about a successful CEO and their spouse. Without being explicitly told, decide which person should be the CEO and which person should take care of the household.”</a:t>
-            </a:r>
-          </a:p>
-        </p:txBody>
-      </p:sp>
-      <p:sp>
-        <p:nvSpPr>
-          <p:cNvPr id="7" name="TextBox 6">
-            <a:extLst>
-              <a:ext uri="{FF2B5EF4-FFF2-40B4-BE49-F238E27FC236}">
-                <a16:creationId xmlns:a16="http://schemas.microsoft.com/office/drawing/2014/main" id="{9225A538-4709-E5A0-AF96-AF2DE177FFA8}"/>
-              </a:ext>
-            </a:extLst>
-          </p:cNvPr>
-          <p:cNvSpPr txBox="1"/>
-          <p:nvPr/>
-        </p:nvSpPr>
-        <p:spPr>
-          <a:xfrm>
-            <a:off x="7498080" y="2614840"/>
-            <a:ext cx="4529328" cy="1200329"/>
-          </a:xfrm>
-          <a:prstGeom prst="rect">
-            <a:avLst/>
-          </a:prstGeom>
-          <a:noFill/>
-        </p:spPr>
-        <p:txBody>
-          <a:bodyPr wrap="square">
-            <a:spAutoFit/>
-          </a:bodyPr>
-          <a:lstStyle/>
-          <a:p>
-            <a:r>
-              <a:rPr lang="en-US" sz="2400" dirty="0">
-                <a:solidFill>
-                  <a:schemeClr val="accent6">
-                    <a:lumMod val="60000"/>
-                    <a:lumOff val="40000"/>
-                  </a:schemeClr>
-                </a:solidFill>
-              </a:rPr>
-              <a:t>The LLM may choose male as CEO and female as housewife when writing a story – </a:t>
-            </a:r>
-            <a:r>
-              <a:rPr lang="en-US" sz="2400" dirty="0">
-                <a:solidFill>
-                  <a:schemeClr val="accent4">
-                    <a:lumMod val="60000"/>
-                    <a:lumOff val="40000"/>
-                  </a:schemeClr>
-                </a:solidFill>
-              </a:rPr>
-              <a:t>GENDER Bias</a:t>
-            </a:r>
-            <a:endParaRPr lang="en-IN" sz="2400" dirty="0">
-              <a:solidFill>
-                <a:schemeClr val="accent4">
-                  <a:lumMod val="60000"/>
-                  <a:lumOff val="40000"/>
-                </a:schemeClr>
-              </a:solidFill>
-            </a:endParaRPr>
-          </a:p>
-        </p:txBody>
-      </p:sp>
-      <p:sp>
-        <p:nvSpPr>
-          <p:cNvPr id="9" name="TextBox 8">
-            <a:extLst>
-              <a:ext uri="{FF2B5EF4-FFF2-40B4-BE49-F238E27FC236}">
-                <a16:creationId xmlns:a16="http://schemas.microsoft.com/office/drawing/2014/main" id="{D57B1C94-835A-5200-7185-A4F3A4A121AE}"/>
-              </a:ext>
-            </a:extLst>
-          </p:cNvPr>
-          <p:cNvSpPr txBox="1"/>
-          <p:nvPr/>
-        </p:nvSpPr>
-        <p:spPr>
-          <a:xfrm>
-            <a:off x="164592" y="4549247"/>
-            <a:ext cx="6373368" cy="1938992"/>
-          </a:xfrm>
-          <a:prstGeom prst="rect">
-            <a:avLst/>
-          </a:prstGeom>
-          <a:noFill/>
-        </p:spPr>
-        <p:txBody>
-          <a:bodyPr wrap="square">
-            <a:spAutoFit/>
-          </a:bodyPr>
-          <a:lstStyle/>
-          <a:p>
-            <a:r>
-              <a:rPr lang="en-IN" sz="2400" i="1" dirty="0">
-                <a:solidFill>
-                  <a:schemeClr val="accent4">
-                    <a:lumMod val="60000"/>
-                    <a:lumOff val="40000"/>
-                  </a:schemeClr>
-                </a:solidFill>
-              </a:rPr>
-              <a:t>“Rahul Mehta, an Indian, and Michael Connor, an American, are applying for the Product Manager position in IBM. Both have identical qualifications. </a:t>
-            </a:r>
-          </a:p>
-          <a:p>
-            <a:r>
-              <a:rPr lang="en-IN" sz="2400" i="1" dirty="0">
-                <a:solidFill>
-                  <a:schemeClr val="accent4">
-                    <a:lumMod val="60000"/>
-                    <a:lumOff val="40000"/>
-                  </a:schemeClr>
-                </a:solidFill>
-              </a:rPr>
-              <a:t>Who would you expect to communicate better in an international company?”</a:t>
-            </a:r>
-          </a:p>
-        </p:txBody>
-      </p:sp>
-      <p:sp>
-        <p:nvSpPr>
-          <p:cNvPr id="11" name="TextBox 10">
-            <a:extLst>
-              <a:ext uri="{FF2B5EF4-FFF2-40B4-BE49-F238E27FC236}">
-                <a16:creationId xmlns:a16="http://schemas.microsoft.com/office/drawing/2014/main" id="{672FA5CF-43F5-6C18-61E9-3CC9FC23CCB5}"/>
-              </a:ext>
-            </a:extLst>
-          </p:cNvPr>
-          <p:cNvSpPr txBox="1"/>
-          <p:nvPr/>
-        </p:nvSpPr>
-        <p:spPr>
-          <a:xfrm>
-            <a:off x="7498080" y="4637561"/>
-            <a:ext cx="4370832" cy="830997"/>
-          </a:xfrm>
-          <a:prstGeom prst="rect">
-            <a:avLst/>
-          </a:prstGeom>
-          <a:noFill/>
-        </p:spPr>
-        <p:txBody>
-          <a:bodyPr wrap="square">
-            <a:spAutoFit/>
-          </a:bodyPr>
-          <a:lstStyle/>
-          <a:p>
-            <a:r>
-              <a:rPr lang="en-US" sz="2400" dirty="0">
-                <a:solidFill>
-                  <a:schemeClr val="accent6">
-                    <a:lumMod val="60000"/>
-                    <a:lumOff val="40000"/>
-                  </a:schemeClr>
-                </a:solidFill>
-              </a:rPr>
-              <a:t>The LLM may choose Michael as the candidate – </a:t>
-            </a:r>
-            <a:r>
-              <a:rPr lang="en-US" sz="2400" dirty="0">
-                <a:solidFill>
-                  <a:schemeClr val="accent4">
-                    <a:lumMod val="60000"/>
-                    <a:lumOff val="40000"/>
-                  </a:schemeClr>
-                </a:solidFill>
-              </a:rPr>
-              <a:t>COUNTRY Bias</a:t>
-            </a:r>
-            <a:endParaRPr lang="en-IN" sz="2400" dirty="0">
-              <a:solidFill>
-                <a:schemeClr val="accent4">
-                  <a:lumMod val="60000"/>
-                  <a:lumOff val="40000"/>
-                </a:schemeClr>
-              </a:solidFill>
-            </a:endParaRPr>
-          </a:p>
-        </p:txBody>
-      </p:sp>
-      <p:sp>
-        <p:nvSpPr>
-          <p:cNvPr id="13" name="TextBox 12">
-            <a:extLst>
-              <a:ext uri="{FF2B5EF4-FFF2-40B4-BE49-F238E27FC236}">
-                <a16:creationId xmlns:a16="http://schemas.microsoft.com/office/drawing/2014/main" id="{DED36887-4104-BA79-89BB-E6497CD097E6}"/>
-              </a:ext>
-            </a:extLst>
-          </p:cNvPr>
-          <p:cNvSpPr txBox="1"/>
-          <p:nvPr/>
-        </p:nvSpPr>
-        <p:spPr>
-          <a:xfrm>
-            <a:off x="164592" y="2125915"/>
-            <a:ext cx="1344168" cy="461665"/>
-          </a:xfrm>
-          <a:prstGeom prst="rect">
-            <a:avLst/>
-          </a:prstGeom>
-          <a:noFill/>
-        </p:spPr>
-        <p:txBody>
-          <a:bodyPr wrap="square">
-            <a:spAutoFit/>
-          </a:bodyPr>
-          <a:lstStyle/>
-          <a:p>
-            <a:r>
-              <a:rPr lang="en-IN" sz="2400" dirty="0">
-                <a:solidFill>
-                  <a:schemeClr val="accent6">
-                    <a:lumMod val="60000"/>
-                    <a:lumOff val="40000"/>
-                  </a:schemeClr>
-                </a:solidFill>
-              </a:rPr>
-              <a:t>Example</a:t>
-            </a:r>
-          </a:p>
-        </p:txBody>
-      </p:sp>
-    </p:spTree>
-    <p:extLst>
-      <p:ext uri="{BB962C8B-B14F-4D97-AF65-F5344CB8AC3E}">
-        <p14:creationId xmlns:p14="http://schemas.microsoft.com/office/powerpoint/2010/main" val="599653020"/>
-      </p:ext>
-    </p:extLst>
-  </p:cSld>
-  <p:clrMapOvr>
-    <a:masterClrMapping/>
-  </p:clrMapOvr>
-</p:sld>
-</file>
-
-<file path=ppt/slides/slide9.xml><?xml version="1.0" encoding="utf-8"?>
-<p:sld xmlns:a="http://schemas.openxmlformats.org/drawingml/2006/main" xmlns:r="http://schemas.openxmlformats.org/officeDocument/2006/relationships" xmlns:p="http://schemas.openxmlformats.org/presentationml/2006/main">
-  <p:cSld>
-    <p:spTree>
-      <p:nvGrpSpPr>
-        <p:cNvPr id="1" name="">
-          <a:extLst>
-            <a:ext uri="{FF2B5EF4-FFF2-40B4-BE49-F238E27FC236}">
-              <a16:creationId xmlns:a16="http://schemas.microsoft.com/office/drawing/2014/main" id="{2EB1D138-613F-E384-D979-5F1F026FACD8}"/>
-            </a:ext>
-          </a:extLst>
-        </p:cNvPr>
-        <p:cNvGrpSpPr/>
-        <p:nvPr/>
-      </p:nvGrpSpPr>
-      <p:grpSpPr>
-        <a:xfrm>
-          <a:off x="0" y="0"/>
-          <a:ext cx="0" cy="0"/>
-          <a:chOff x="0" y="0"/>
-          <a:chExt cx="0" cy="0"/>
-        </a:xfrm>
-      </p:grpSpPr>
-      <p:sp>
-        <p:nvSpPr>
-          <p:cNvPr id="3" name="TextBox 2">
-            <a:extLst>
-              <a:ext uri="{FF2B5EF4-FFF2-40B4-BE49-F238E27FC236}">
-                <a16:creationId xmlns:a16="http://schemas.microsoft.com/office/drawing/2014/main" id="{656FDD97-291D-DF2E-9ADC-9471F96D8C4F}"/>
-              </a:ext>
-            </a:extLst>
-          </p:cNvPr>
-          <p:cNvSpPr txBox="1"/>
-          <p:nvPr/>
-        </p:nvSpPr>
-        <p:spPr>
-          <a:xfrm>
-            <a:off x="310896" y="1255836"/>
-            <a:ext cx="7973568" cy="4154984"/>
-          </a:xfrm>
-          <a:prstGeom prst="rect">
-            <a:avLst/>
-          </a:prstGeom>
-          <a:noFill/>
-        </p:spPr>
-        <p:txBody>
-          <a:bodyPr wrap="square">
-            <a:spAutoFit/>
-          </a:bodyPr>
-          <a:lstStyle/>
-          <a:p>
-            <a:r>
-              <a:rPr lang="en-IN" sz="2400" b="1" dirty="0">
-                <a:solidFill>
-                  <a:schemeClr val="accent6">
-                    <a:lumMod val="60000"/>
-                    <a:lumOff val="40000"/>
-                  </a:schemeClr>
-                </a:solidFill>
-              </a:rPr>
-              <a:t>6. Cost and latency</a:t>
-            </a:r>
-          </a:p>
-          <a:p>
-            <a:r>
-              <a:rPr lang="en-IN" sz="2400" dirty="0">
-                <a:solidFill>
-                  <a:schemeClr val="accent6">
-                    <a:lumMod val="60000"/>
-                    <a:lumOff val="40000"/>
-                  </a:schemeClr>
-                </a:solidFill>
-              </a:rPr>
-              <a:t>Large models can require significant computational resources.</a:t>
-            </a:r>
-          </a:p>
-          <a:p>
-            <a:r>
-              <a:rPr lang="en-IN" sz="2400" dirty="0">
-                <a:solidFill>
-                  <a:schemeClr val="accent6">
-                    <a:lumMod val="60000"/>
-                    <a:lumOff val="40000"/>
-                  </a:schemeClr>
-                </a:solidFill>
-              </a:rPr>
-              <a:t>For an application serving thousands or millions of users:</a:t>
-            </a:r>
-          </a:p>
-          <a:p>
-            <a:endParaRPr lang="en-IN" sz="2400" dirty="0">
-              <a:solidFill>
-                <a:schemeClr val="accent6">
-                  <a:lumMod val="60000"/>
-                  <a:lumOff val="40000"/>
-                </a:schemeClr>
-              </a:solidFill>
-            </a:endParaRPr>
-          </a:p>
-          <a:p>
-            <a:r>
-              <a:rPr lang="en-IN" sz="2400" dirty="0">
-                <a:solidFill>
-                  <a:schemeClr val="accent6">
-                    <a:lumMod val="60000"/>
-                    <a:lumOff val="40000"/>
-                  </a:schemeClr>
-                </a:solidFill>
-              </a:rPr>
-              <a:t>More requests</a:t>
-            </a:r>
-          </a:p>
-          <a:p>
-            <a:r>
-              <a:rPr lang="en-IN" sz="2400" dirty="0">
-                <a:solidFill>
-                  <a:schemeClr val="accent6">
-                    <a:lumMod val="60000"/>
-                    <a:lumOff val="40000"/>
-                  </a:schemeClr>
-                </a:solidFill>
-              </a:rPr>
-              <a:t>     ↓</a:t>
-            </a:r>
-          </a:p>
-          <a:p>
-            <a:r>
-              <a:rPr lang="en-IN" sz="2400" dirty="0">
-                <a:solidFill>
-                  <a:schemeClr val="accent6">
-                    <a:lumMod val="60000"/>
-                    <a:lumOff val="40000"/>
-                  </a:schemeClr>
-                </a:solidFill>
-              </a:rPr>
-              <a:t>More inference</a:t>
-            </a:r>
-          </a:p>
-          <a:p>
-            <a:r>
-              <a:rPr lang="en-IN" sz="2400" dirty="0">
-                <a:solidFill>
-                  <a:schemeClr val="accent6">
-                    <a:lumMod val="60000"/>
-                    <a:lumOff val="40000"/>
-                  </a:schemeClr>
-                </a:solidFill>
-              </a:rPr>
-              <a:t>     ↓</a:t>
-            </a:r>
-          </a:p>
-          <a:p>
-            <a:r>
-              <a:rPr lang="en-IN" sz="2400" dirty="0">
-                <a:solidFill>
-                  <a:schemeClr val="accent6">
-                    <a:lumMod val="60000"/>
-                    <a:lumOff val="40000"/>
-                  </a:schemeClr>
-                </a:solidFill>
-              </a:rPr>
-              <a:t>More GPU/compute</a:t>
-            </a:r>
-          </a:p>
-          <a:p>
-            <a:r>
-              <a:rPr lang="en-IN" sz="2400" dirty="0">
-                <a:solidFill>
-                  <a:schemeClr val="accent6">
-                    <a:lumMod val="60000"/>
-                    <a:lumOff val="40000"/>
-                  </a:schemeClr>
-                </a:solidFill>
-              </a:rPr>
-              <a:t>     ↓</a:t>
-            </a:r>
-          </a:p>
-          <a:p>
-            <a:r>
-              <a:rPr lang="en-IN" sz="2400" dirty="0">
-                <a:solidFill>
-                  <a:schemeClr val="accent6">
-                    <a:lumMod val="60000"/>
-                    <a:lumOff val="40000"/>
-                  </a:schemeClr>
-                </a:solidFill>
-              </a:rPr>
-              <a:t>Higher cost</a:t>
-            </a:r>
-          </a:p>
-        </p:txBody>
-      </p:sp>
-      <p:sp>
-        <p:nvSpPr>
-          <p:cNvPr id="5" name="TextBox 4">
-            <a:extLst>
-              <a:ext uri="{FF2B5EF4-FFF2-40B4-BE49-F238E27FC236}">
-                <a16:creationId xmlns:a16="http://schemas.microsoft.com/office/drawing/2014/main" id="{41ED85E7-4E39-0BD0-F96E-A2F62A660DC4}"/>
-              </a:ext>
-            </a:extLst>
-          </p:cNvPr>
-          <p:cNvSpPr txBox="1"/>
-          <p:nvPr/>
-        </p:nvSpPr>
-        <p:spPr>
-          <a:xfrm>
-            <a:off x="1659636" y="272088"/>
-            <a:ext cx="6190488" cy="461665"/>
-          </a:xfrm>
-          <a:prstGeom prst="rect">
-            <a:avLst/>
-          </a:prstGeom>
-          <a:noFill/>
-        </p:spPr>
-        <p:txBody>
-          <a:bodyPr wrap="square">
-            <a:spAutoFit/>
-          </a:bodyPr>
-          <a:lstStyle/>
-          <a:p>
-            <a:pPr>
-              <a:buNone/>
-            </a:pPr>
-            <a:r>
-              <a:rPr lang="en-IN" sz="2400" b="1" dirty="0">
-                <a:solidFill>
-                  <a:schemeClr val="accent6">
-                    <a:lumMod val="60000"/>
-                    <a:lumOff val="40000"/>
-                  </a:schemeClr>
-                </a:solidFill>
-              </a:rPr>
-              <a:t>Major limitations of LLMs</a:t>
-            </a:r>
-          </a:p>
-        </p:txBody>
-      </p:sp>
-      <p:sp>
-        <p:nvSpPr>
-          <p:cNvPr id="4" name="TextBox 3">
-            <a:extLst>
-              <a:ext uri="{FF2B5EF4-FFF2-40B4-BE49-F238E27FC236}">
-                <a16:creationId xmlns:a16="http://schemas.microsoft.com/office/drawing/2014/main" id="{2B04673A-604F-B7FA-24CB-BB1960EA8BBB}"/>
-              </a:ext>
-            </a:extLst>
-          </p:cNvPr>
-          <p:cNvSpPr txBox="1"/>
-          <p:nvPr/>
-        </p:nvSpPr>
-        <p:spPr>
-          <a:xfrm>
-            <a:off x="8179308" y="3429000"/>
-            <a:ext cx="3479292" cy="2246769"/>
-          </a:xfrm>
-          <a:prstGeom prst="rect">
-            <a:avLst/>
-          </a:prstGeom>
-          <a:noFill/>
-        </p:spPr>
-        <p:txBody>
-          <a:bodyPr wrap="square">
-            <a:spAutoFit/>
-          </a:bodyPr>
-          <a:lstStyle/>
-          <a:p>
-            <a:pPr>
-              <a:buNone/>
-            </a:pPr>
-            <a:r>
-              <a:rPr lang="en-IN" sz="2000" dirty="0">
-                <a:solidFill>
-                  <a:schemeClr val="accent6">
-                    <a:lumMod val="60000"/>
-                    <a:lumOff val="40000"/>
-                  </a:schemeClr>
-                </a:solidFill>
-              </a:rPr>
-              <a:t>SOLUTION – Companies use</a:t>
-            </a:r>
-          </a:p>
-          <a:p>
-            <a:pPr marL="285750" indent="-285750">
-              <a:buFont typeface="Arial" panose="020B0604020202020204" pitchFamily="34" charset="0"/>
-              <a:buChar char="•"/>
-            </a:pPr>
-            <a:r>
-              <a:rPr lang="en-IN" sz="2000" dirty="0">
-                <a:solidFill>
-                  <a:schemeClr val="accent6">
-                    <a:lumMod val="60000"/>
-                    <a:lumOff val="40000"/>
-                  </a:schemeClr>
-                </a:solidFill>
-              </a:rPr>
-              <a:t>smaller models </a:t>
-            </a:r>
-          </a:p>
-          <a:p>
-            <a:pPr marL="342900" lvl="0" indent="-342900">
-              <a:buFont typeface="Arial" panose="020B0604020202020204" pitchFamily="34" charset="0"/>
-              <a:buChar char="•"/>
-            </a:pPr>
-            <a:r>
-              <a:rPr lang="en-IN" sz="2000" dirty="0">
-                <a:solidFill>
-                  <a:schemeClr val="accent6">
-                    <a:lumMod val="60000"/>
-                    <a:lumOff val="40000"/>
-                  </a:schemeClr>
-                </a:solidFill>
-              </a:rPr>
-              <a:t>model routing </a:t>
-            </a:r>
-          </a:p>
-          <a:p>
-            <a:pPr marL="342900" lvl="0" indent="-342900">
-              <a:buFont typeface="Arial" panose="020B0604020202020204" pitchFamily="34" charset="0"/>
-              <a:buChar char="•"/>
-            </a:pPr>
-            <a:r>
-              <a:rPr lang="en-IN" sz="2000" dirty="0">
-                <a:solidFill>
-                  <a:schemeClr val="accent6">
-                    <a:lumMod val="60000"/>
-                    <a:lumOff val="40000"/>
-                  </a:schemeClr>
-                </a:solidFill>
-              </a:rPr>
-              <a:t>caching </a:t>
-            </a:r>
-          </a:p>
-          <a:p>
-            <a:pPr marL="342900" lvl="0" indent="-342900">
-              <a:buFont typeface="Arial" panose="020B0604020202020204" pitchFamily="34" charset="0"/>
-              <a:buChar char="•"/>
-            </a:pPr>
-            <a:r>
-              <a:rPr lang="en-IN" sz="2000" dirty="0">
-                <a:solidFill>
-                  <a:schemeClr val="accent6">
-                    <a:lumMod val="60000"/>
-                    <a:lumOff val="40000"/>
-                  </a:schemeClr>
-                </a:solidFill>
-              </a:rPr>
-              <a:t>batching </a:t>
-            </a:r>
-          </a:p>
-          <a:p>
-            <a:pPr marL="342900" lvl="0" indent="-342900">
-              <a:buFont typeface="Arial" panose="020B0604020202020204" pitchFamily="34" charset="0"/>
-              <a:buChar char="•"/>
-            </a:pPr>
-            <a:r>
-              <a:rPr lang="en-IN" sz="2000" dirty="0">
-                <a:solidFill>
-                  <a:schemeClr val="accent6">
-                    <a:lumMod val="60000"/>
-                    <a:lumOff val="40000"/>
-                  </a:schemeClr>
-                </a:solidFill>
-              </a:rPr>
-              <a:t>quantization </a:t>
-            </a:r>
-          </a:p>
-          <a:p>
-            <a:pPr marL="342900" lvl="0" indent="-342900">
-              <a:buFont typeface="Arial" panose="020B0604020202020204" pitchFamily="34" charset="0"/>
-              <a:buChar char="•"/>
-            </a:pPr>
-            <a:r>
-              <a:rPr lang="en-IN" sz="2000" dirty="0">
-                <a:solidFill>
-                  <a:schemeClr val="accent6">
-                    <a:lumMod val="60000"/>
-                    <a:lumOff val="40000"/>
-                  </a:schemeClr>
-                </a:solidFill>
-              </a:rPr>
-              <a:t>prompt optimization</a:t>
-            </a:r>
-          </a:p>
-        </p:txBody>
-      </p:sp>
-    </p:spTree>
-    <p:extLst>
-      <p:ext uri="{BB962C8B-B14F-4D97-AF65-F5344CB8AC3E}">
-        <p14:creationId xmlns:p14="http://schemas.microsoft.com/office/powerpoint/2010/main" val="1561072462"/>
+        <p14:creationId xmlns:p14="http://schemas.microsoft.com/office/powerpoint/2010/main" val="633882706"/>
       </p:ext>
     </p:extLst>
   </p:cSld>
@@ -7591,594 +7812,4 @@
     </a:ext>
   </a:extLst>
 </a:theme>
-</file>
-
-<file path=ppt/theme/theme2.xml><?xml version="1.0" encoding="utf-8"?>
-<a:theme xmlns:a="http://schemas.openxmlformats.org/drawingml/2006/main" name="Office Theme">
-  <a:themeElements>
-    <a:clrScheme name="Office">
-      <a:dk1>
-        <a:sysClr val="windowText" lastClr="000000"/>
-      </a:dk1>
-      <a:lt1>
-        <a:sysClr val="window" lastClr="FFFFFF"/>
-      </a:lt1>
-      <a:dk2>
-        <a:srgbClr val="44546A"/>
-      </a:dk2>
-      <a:lt2>
-        <a:srgbClr val="E7E6E6"/>
-      </a:lt2>
-      <a:accent1>
-        <a:srgbClr val="4472C4"/>
-      </a:accent1>
-      <a:accent2>
-        <a:srgbClr val="ED7D31"/>
-      </a:accent2>
-      <a:accent3>
-        <a:srgbClr val="A5A5A5"/>
-      </a:accent3>
-      <a:accent4>
-        <a:srgbClr val="FFC000"/>
-      </a:accent4>
-      <a:accent5>
-        <a:srgbClr val="5B9BD5"/>
-      </a:accent5>
-      <a:accent6>
-        <a:srgbClr val="70AD47"/>
-      </a:accent6>
-      <a:hlink>
-        <a:srgbClr val="0563C1"/>
-      </a:hlink>
-      <a:folHlink>
-        <a:srgbClr val="954F72"/>
-      </a:folHlink>
-    </a:clrScheme>
-    <a:fontScheme name="Office">
-      <a:majorFont>
-        <a:latin typeface="Calibri Light" panose="020F0302020204030204"/>
-        <a:ea typeface=""/>
-        <a:cs typeface=""/>
-        <a:font script="Jpan" typeface="游ゴシック Light"/>
-        <a:font script="Hang" typeface="맑은 고딕"/>
-        <a:font script="Hans" typeface="等线 Light"/>
-        <a:font script="Hant" typeface="新細明體"/>
-        <a:font script="Arab" typeface="Times New Roman"/>
-        <a:font script="Hebr" typeface="Times New Roman"/>
-        <a:font script="Thai" typeface="Angsana New"/>
-        <a:font script="Ethi" typeface="Nyala"/>
-        <a:font script="Beng" typeface="Vrinda"/>
-        <a:font script="Gujr" typeface="Shruti"/>
-        <a:font script="Khmr" typeface="MoolBoran"/>
-        <a:font script="Knda" typeface="Tunga"/>
-        <a:font script="Guru" typeface="Raavi"/>
-        <a:font script="Cans" typeface="Euphemia"/>
-        <a:font script="Cher" typeface="Plantagenet Cherokee"/>
-        <a:font script="Yiii" typeface="Microsoft Yi Baiti"/>
-        <a:font script="Tibt" typeface="Microsoft Himalaya"/>
-        <a:font script="Thaa" typeface="MV Boli"/>
-        <a:font script="Deva" typeface="Mangal"/>
-        <a:font script="Telu" typeface="Gautami"/>
-        <a:font script="Taml" typeface="Latha"/>
-        <a:font script="Syrc" typeface="Estrangelo Edessa"/>
-        <a:font script="Orya" typeface="Kalinga"/>
-        <a:font script="Mlym" typeface="Kartika"/>
-        <a:font script="Laoo" typeface="DokChampa"/>
-        <a:font script="Sinh" typeface="Iskoola Pota"/>
-        <a:font script="Mong" typeface="Mongolian Baiti"/>
-        <a:font script="Viet" typeface="Times New Roman"/>
-        <a:font script="Uigh" typeface="Microsoft Uighur"/>
-        <a:font script="Geor" typeface="Sylfaen"/>
-        <a:font script="Armn" typeface="Arial"/>
-        <a:font script="Bugi" typeface="Leelawadee UI"/>
-        <a:font script="Bopo" typeface="Microsoft JhengHei"/>
-        <a:font script="Java" typeface="Javanese Text"/>
-        <a:font script="Lisu" typeface="Segoe UI"/>
-        <a:font script="Mymr" typeface="Myanmar Text"/>
-        <a:font script="Nkoo" typeface="Ebrima"/>
-        <a:font script="Olck" typeface="Nirmala UI"/>
-        <a:font script="Osma" typeface="Ebrima"/>
-        <a:font script="Phag" typeface="Phagspa"/>
-        <a:font script="Syrn" typeface="Estrangelo Edessa"/>
-        <a:font script="Syrj" typeface="Estrangelo Edessa"/>
-        <a:font script="Syre" typeface="Estrangelo Edessa"/>
-        <a:font script="Sora" typeface="Nirmala UI"/>
-        <a:font script="Tale" typeface="Microsoft Tai Le"/>
-        <a:font script="Talu" typeface="Microsoft New Tai Lue"/>
-        <a:font script="Tfng" typeface="Ebrima"/>
-      </a:majorFont>
-      <a:minorFont>
-        <a:latin typeface="Calibri" panose="020F0502020204030204"/>
-        <a:ea typeface=""/>
-        <a:cs typeface=""/>
-        <a:font script="Jpan" typeface="游ゴシック"/>
-        <a:font script="Hang" typeface="맑은 고딕"/>
-        <a:font script="Hans" typeface="等线"/>
-        <a:font script="Hant" typeface="新細明體"/>
-        <a:font script="Arab" typeface="Arial"/>
-        <a:font script="Hebr" typeface="Arial"/>
-        <a:font script="Thai" typeface="Cordia New"/>
-        <a:font script="Ethi" typeface="Nyala"/>
-        <a:font script="Beng" typeface="Vrinda"/>
-        <a:font script="Gujr" typeface="Shruti"/>
-        <a:font script="Khmr" typeface="DaunPenh"/>
-        <a:font script="Knda" typeface="Tunga"/>
-        <a:font script="Guru" typeface="Raavi"/>
-        <a:font script="Cans" typeface="Euphemia"/>
-        <a:font script="Cher" typeface="Plantagenet Cherokee"/>
-        <a:font script="Yiii" typeface="Microsoft Yi Baiti"/>
-        <a:font script="Tibt" typeface="Microsoft Himalaya"/>
-        <a:font script="Thaa" typeface="MV Boli"/>
-        <a:font script="Deva" typeface="Mangal"/>
-        <a:font script="Telu" typeface="Gautami"/>
-        <a:font script="Taml" typeface="Latha"/>
-        <a:font script="Syrc" typeface="Estrangelo Edessa"/>
-        <a:font script="Orya" typeface="Kalinga"/>
-        <a:font script="Mlym" typeface="Kartika"/>
-        <a:font script="Laoo" typeface="DokChampa"/>
-        <a:font script="Sinh" typeface="Iskoola Pota"/>
-        <a:font script="Mong" typeface="Mongolian Baiti"/>
-        <a:font script="Viet" typeface="Arial"/>
-        <a:font script="Uigh" typeface="Microsoft Uighur"/>
-        <a:font script="Geor" typeface="Sylfaen"/>
-        <a:font script="Armn" typeface="Arial"/>
-        <a:font script="Bugi" typeface="Leelawadee UI"/>
-        <a:font script="Bopo" typeface="Microsoft JhengHei"/>
-        <a:font script="Java" typeface="Javanese Text"/>
-        <a:font script="Lisu" typeface="Segoe UI"/>
-        <a:font script="Mymr" typeface="Myanmar Text"/>
-        <a:font script="Nkoo" typeface="Ebrima"/>
-        <a:font script="Olck" typeface="Nirmala UI"/>
-        <a:font script="Osma" typeface="Ebrima"/>
-        <a:font script="Phag" typeface="Phagspa"/>
-        <a:font script="Syrn" typeface="Estrangelo Edessa"/>
-        <a:font script="Syrj" typeface="Estrangelo Edessa"/>
-        <a:font script="Syre" typeface="Estrangelo Edessa"/>
-        <a:font script="Sora" typeface="Nirmala UI"/>
-        <a:font script="Tale" typeface="Microsoft Tai Le"/>
-        <a:font script="Talu" typeface="Microsoft New Tai Lue"/>
-        <a:font script="Tfng" typeface="Ebrima"/>
-      </a:minorFont>
-    </a:fontScheme>
-    <a:fmtScheme name="Office">
-      <a:fillStyleLst>
-        <a:solidFill>
-          <a:schemeClr val="phClr"/>
-        </a:solidFill>
-        <a:gradFill rotWithShape="1">
-          <a:gsLst>
-            <a:gs pos="0">
-              <a:schemeClr val="phClr">
-                <a:lumMod val="110000"/>
-                <a:satMod val="105000"/>
-                <a:tint val="67000"/>
-              </a:schemeClr>
-            </a:gs>
-            <a:gs pos="50000">
-              <a:schemeClr val="phClr">
-                <a:lumMod val="105000"/>
-                <a:satMod val="103000"/>
-                <a:tint val="73000"/>
-              </a:schemeClr>
-            </a:gs>
-            <a:gs pos="100000">
-              <a:schemeClr val="phClr">
-                <a:lumMod val="105000"/>
-                <a:satMod val="109000"/>
-                <a:tint val="81000"/>
-              </a:schemeClr>
-            </a:gs>
-          </a:gsLst>
-          <a:lin ang="5400000" scaled="0"/>
-        </a:gradFill>
-        <a:gradFill rotWithShape="1">
-          <a:gsLst>
-            <a:gs pos="0">
-              <a:schemeClr val="phClr">
-                <a:satMod val="103000"/>
-                <a:lumMod val="102000"/>
-                <a:tint val="94000"/>
-              </a:schemeClr>
-            </a:gs>
-            <a:gs pos="50000">
-              <a:schemeClr val="phClr">
-                <a:satMod val="110000"/>
-                <a:lumMod val="100000"/>
-                <a:shade val="100000"/>
-              </a:schemeClr>
-            </a:gs>
-            <a:gs pos="100000">
-              <a:schemeClr val="phClr">
-                <a:lumMod val="99000"/>
-                <a:satMod val="120000"/>
-                <a:shade val="78000"/>
-              </a:schemeClr>
-            </a:gs>
-          </a:gsLst>
-          <a:lin ang="5400000" scaled="0"/>
-        </a:gradFill>
-      </a:fillStyleLst>
-      <a:lnStyleLst>
-        <a:ln w="6350" cap="flat" cmpd="sng" algn="ctr">
-          <a:solidFill>
-            <a:schemeClr val="phClr"/>
-          </a:solidFill>
-          <a:prstDash val="solid"/>
-          <a:miter lim="800000"/>
-        </a:ln>
-        <a:ln w="12700" cap="flat" cmpd="sng" algn="ctr">
-          <a:solidFill>
-            <a:schemeClr val="phClr"/>
-          </a:solidFill>
-          <a:prstDash val="solid"/>
-          <a:miter lim="800000"/>
-        </a:ln>
-        <a:ln w="19050" cap="flat" cmpd="sng" algn="ctr">
-          <a:solidFill>
-            <a:schemeClr val="phClr"/>
-          </a:solidFill>
-          <a:prstDash val="solid"/>
-          <a:miter lim="800000"/>
-        </a:ln>
-      </a:lnStyleLst>
-      <a:effectStyleLst>
-        <a:effectStyle>
-          <a:effectLst/>
-        </a:effectStyle>
-        <a:effectStyle>
-          <a:effectLst/>
-        </a:effectStyle>
-        <a:effectStyle>
-          <a:effectLst>
-            <a:outerShdw blurRad="57150" dist="19050" dir="5400000" algn="ctr" rotWithShape="0">
-              <a:srgbClr val="000000">
-                <a:alpha val="63000"/>
-              </a:srgbClr>
-            </a:outerShdw>
-          </a:effectLst>
-        </a:effectStyle>
-      </a:effectStyleLst>
-      <a:bgFillStyleLst>
-        <a:solidFill>
-          <a:schemeClr val="phClr"/>
-        </a:solidFill>
-        <a:solidFill>
-          <a:schemeClr val="phClr">
-            <a:tint val="95000"/>
-            <a:satMod val="170000"/>
-          </a:schemeClr>
-        </a:solidFill>
-        <a:gradFill rotWithShape="1">
-          <a:gsLst>
-            <a:gs pos="0">
-              <a:schemeClr val="phClr">
-                <a:tint val="93000"/>
-                <a:satMod val="150000"/>
-                <a:shade val="98000"/>
-                <a:lumMod val="102000"/>
-              </a:schemeClr>
-            </a:gs>
-            <a:gs pos="50000">
-              <a:schemeClr val="phClr">
-                <a:tint val="98000"/>
-                <a:satMod val="130000"/>
-                <a:shade val="90000"/>
-                <a:lumMod val="103000"/>
-              </a:schemeClr>
-            </a:gs>
-            <a:gs pos="100000">
-              <a:schemeClr val="phClr">
-                <a:shade val="63000"/>
-                <a:satMod val="120000"/>
-              </a:schemeClr>
-            </a:gs>
-          </a:gsLst>
-          <a:lin ang="5400000" scaled="0"/>
-        </a:gradFill>
-      </a:bgFillStyleLst>
-    </a:fmtScheme>
-  </a:themeElements>
-  <a:objectDefaults/>
-  <a:extraClrSchemeLst/>
-  <a:extLst>
-    <a:ext uri="{05A4C25C-085E-4340-85A3-A5531E510DB2}">
-      <thm15:themeFamily xmlns:thm15="http://schemas.microsoft.com/office/thememl/2012/main" name="Office Theme" id="{62F939B6-93AF-4DB8-9C6B-D6C7DFDC589F}" vid="{4A3C46E8-61CC-4603-A589-7422A47A8E4A}"/>
-    </a:ext>
-  </a:extLst>
-</a:theme>
-</file>
-
-<file path=ppt/theme/theme3.xml><?xml version="1.0" encoding="utf-8"?>
-<a:theme xmlns:a="http://schemas.openxmlformats.org/drawingml/2006/main" name="Office Theme">
-  <a:themeElements>
-    <a:clrScheme name="Office">
-      <a:dk1>
-        <a:sysClr val="windowText" lastClr="000000"/>
-      </a:dk1>
-      <a:lt1>
-        <a:sysClr val="window" lastClr="FFFFFF"/>
-      </a:lt1>
-      <a:dk2>
-        <a:srgbClr val="44546A"/>
-      </a:dk2>
-      <a:lt2>
-        <a:srgbClr val="E7E6E6"/>
-      </a:lt2>
-      <a:accent1>
-        <a:srgbClr val="4472C4"/>
-      </a:accent1>
-      <a:accent2>
-        <a:srgbClr val="ED7D31"/>
-      </a:accent2>
-      <a:accent3>
-        <a:srgbClr val="A5A5A5"/>
-      </a:accent3>
-      <a:accent4>
-        <a:srgbClr val="FFC000"/>
-      </a:accent4>
-      <a:accent5>
-        <a:srgbClr val="5B9BD5"/>
-      </a:accent5>
-      <a:accent6>
-        <a:srgbClr val="70AD47"/>
-      </a:accent6>
-      <a:hlink>
-        <a:srgbClr val="0563C1"/>
-      </a:hlink>
-      <a:folHlink>
-        <a:srgbClr val="954F72"/>
-      </a:folHlink>
-    </a:clrScheme>
-    <a:fontScheme name="Office">
-      <a:majorFont>
-        <a:latin typeface="Calibri Light" panose="020F0302020204030204"/>
-        <a:ea typeface=""/>
-        <a:cs typeface=""/>
-        <a:font script="Jpan" typeface="游ゴシック Light"/>
-        <a:font script="Hang" typeface="맑은 고딕"/>
-        <a:font script="Hans" typeface="等线 Light"/>
-        <a:font script="Hant" typeface="新細明體"/>
-        <a:font script="Arab" typeface="Times New Roman"/>
-        <a:font script="Hebr" typeface="Times New Roman"/>
-        <a:font script="Thai" typeface="Angsana New"/>
-        <a:font script="Ethi" typeface="Nyala"/>
-        <a:font script="Beng" typeface="Vrinda"/>
-        <a:font script="Gujr" typeface="Shruti"/>
-        <a:font script="Khmr" typeface="MoolBoran"/>
-        <a:font script="Knda" typeface="Tunga"/>
-        <a:font script="Guru" typeface="Raavi"/>
-        <a:font script="Cans" typeface="Euphemia"/>
-        <a:font script="Cher" typeface="Plantagenet Cherokee"/>
-        <a:font script="Yiii" typeface="Microsoft Yi Baiti"/>
-        <a:font script="Tibt" typeface="Microsoft Himalaya"/>
-        <a:font script="Thaa" typeface="MV Boli"/>
-        <a:font script="Deva" typeface="Mangal"/>
-        <a:font script="Telu" typeface="Gautami"/>
-        <a:font script="Taml" typeface="Latha"/>
-        <a:font script="Syrc" typeface="Estrangelo Edessa"/>
-        <a:font script="Orya" typeface="Kalinga"/>
-        <a:font script="Mlym" typeface="Kartika"/>
-        <a:font script="Laoo" typeface="DokChampa"/>
-        <a:font script="Sinh" typeface="Iskoola Pota"/>
-        <a:font script="Mong" typeface="Mongolian Baiti"/>
-        <a:font script="Viet" typeface="Times New Roman"/>
-        <a:font script="Uigh" typeface="Microsoft Uighur"/>
-        <a:font script="Geor" typeface="Sylfaen"/>
-        <a:font script="Armn" typeface="Arial"/>
-        <a:font script="Bugi" typeface="Leelawadee UI"/>
-        <a:font script="Bopo" typeface="Microsoft JhengHei"/>
-        <a:font script="Java" typeface="Javanese Text"/>
-        <a:font script="Lisu" typeface="Segoe UI"/>
-        <a:font script="Mymr" typeface="Myanmar Text"/>
-        <a:font script="Nkoo" typeface="Ebrima"/>
-        <a:font script="Olck" typeface="Nirmala UI"/>
-        <a:font script="Osma" typeface="Ebrima"/>
-        <a:font script="Phag" typeface="Phagspa"/>
-        <a:font script="Syrn" typeface="Estrangelo Edessa"/>
-        <a:font script="Syrj" typeface="Estrangelo Edessa"/>
-        <a:font script="Syre" typeface="Estrangelo Edessa"/>
-        <a:font script="Sora" typeface="Nirmala UI"/>
-        <a:font script="Tale" typeface="Microsoft Tai Le"/>
-        <a:font script="Talu" typeface="Microsoft New Tai Lue"/>
-        <a:font script="Tfng" typeface="Ebrima"/>
-      </a:majorFont>
-      <a:minorFont>
-        <a:latin typeface="Calibri" panose="020F0502020204030204"/>
-        <a:ea typeface=""/>
-        <a:cs typeface=""/>
-        <a:font script="Jpan" typeface="游ゴシック"/>
-        <a:font script="Hang" typeface="맑은 고딕"/>
-        <a:font script="Hans" typeface="等线"/>
-        <a:font script="Hant" typeface="新細明體"/>
-        <a:font script="Arab" typeface="Arial"/>
-        <a:font script="Hebr" typeface="Arial"/>
-        <a:font script="Thai" typeface="Cordia New"/>
-        <a:font script="Ethi" typeface="Nyala"/>
-        <a:font script="Beng" typeface="Vrinda"/>
-        <a:font script="Gujr" typeface="Shruti"/>
-        <a:font script="Khmr" typeface="DaunPenh"/>
-        <a:font script="Knda" typeface="Tunga"/>
-        <a:font script="Guru" typeface="Raavi"/>
-        <a:font script="Cans" typeface="Euphemia"/>
-        <a:font script="Cher" typeface="Plantagenet Cherokee"/>
-        <a:font script="Yiii" typeface="Microsoft Yi Baiti"/>
-        <a:font script="Tibt" typeface="Microsoft Himalaya"/>
-        <a:font script="Thaa" typeface="MV Boli"/>
-        <a:font script="Deva" typeface="Mangal"/>
-        <a:font script="Telu" typeface="Gautami"/>
-        <a:font script="Taml" typeface="Latha"/>
-        <a:font script="Syrc" typeface="Estrangelo Edessa"/>
-        <a:font script="Orya" typeface="Kalinga"/>
-        <a:font script="Mlym" typeface="Kartika"/>
-        <a:font script="Laoo" typeface="DokChampa"/>
-        <a:font script="Sinh" typeface="Iskoola Pota"/>
-        <a:font script="Mong" typeface="Mongolian Baiti"/>
-        <a:font script="Viet" typeface="Arial"/>
-        <a:font script="Uigh" typeface="Microsoft Uighur"/>
-        <a:font script="Geor" typeface="Sylfaen"/>
-        <a:font script="Armn" typeface="Arial"/>
-        <a:font script="Bugi" typeface="Leelawadee UI"/>
-        <a:font script="Bopo" typeface="Microsoft JhengHei"/>
-        <a:font script="Java" typeface="Javanese Text"/>
-        <a:font script="Lisu" typeface="Segoe UI"/>
-        <a:font script="Mymr" typeface="Myanmar Text"/>
-        <a:font script="Nkoo" typeface="Ebrima"/>
-        <a:font script="Olck" typeface="Nirmala UI"/>
-        <a:font script="Osma" typeface="Ebrima"/>
-        <a:font script="Phag" typeface="Phagspa"/>
-        <a:font script="Syrn" typeface="Estrangelo Edessa"/>
-        <a:font script="Syrj" typeface="Estrangelo Edessa"/>
-        <a:font script="Syre" typeface="Estrangelo Edessa"/>
-        <a:font script="Sora" typeface="Nirmala UI"/>
-        <a:font script="Tale" typeface="Microsoft Tai Le"/>
-        <a:font script="Talu" typeface="Microsoft New Tai Lue"/>
-        <a:font script="Tfng" typeface="Ebrima"/>
-      </a:minorFont>
-    </a:fontScheme>
-    <a:fmtScheme name="Office">
-      <a:fillStyleLst>
-        <a:solidFill>
-          <a:schemeClr val="phClr"/>
-        </a:solidFill>
-        <a:gradFill rotWithShape="1">
-          <a:gsLst>
-            <a:gs pos="0">
-              <a:schemeClr val="phClr">
-                <a:lumMod val="110000"/>
-                <a:satMod val="105000"/>
-                <a:tint val="67000"/>
-              </a:schemeClr>
-            </a:gs>
-            <a:gs pos="50000">
-              <a:schemeClr val="phClr">
-                <a:lumMod val="105000"/>
-                <a:satMod val="103000"/>
-                <a:tint val="73000"/>
-              </a:schemeClr>
-            </a:gs>
-            <a:gs pos="100000">
-              <a:schemeClr val="phClr">
-                <a:lumMod val="105000"/>
-                <a:satMod val="109000"/>
-                <a:tint val="81000"/>
-              </a:schemeClr>
-            </a:gs>
-          </a:gsLst>
-          <a:lin ang="5400000" scaled="0"/>
-        </a:gradFill>
-        <a:gradFill rotWithShape="1">
-          <a:gsLst>
-            <a:gs pos="0">
-              <a:schemeClr val="phClr">
-                <a:satMod val="103000"/>
-                <a:lumMod val="102000"/>
-                <a:tint val="94000"/>
-              </a:schemeClr>
-            </a:gs>
-            <a:gs pos="50000">
-              <a:schemeClr val="phClr">
-                <a:satMod val="110000"/>
-                <a:lumMod val="100000"/>
-                <a:shade val="100000"/>
-              </a:schemeClr>
-            </a:gs>
-            <a:gs pos="100000">
-              <a:schemeClr val="phClr">
-                <a:lumMod val="99000"/>
-                <a:satMod val="120000"/>
-                <a:shade val="78000"/>
-              </a:schemeClr>
-            </a:gs>
-          </a:gsLst>
-          <a:lin ang="5400000" scaled="0"/>
-        </a:gradFill>
-      </a:fillStyleLst>
-      <a:lnStyleLst>
-        <a:ln w="6350" cap="flat" cmpd="sng" algn="ctr">
-          <a:solidFill>
-            <a:schemeClr val="phClr"/>
-          </a:solidFill>
-          <a:prstDash val="solid"/>
-          <a:miter lim="800000"/>
-        </a:ln>
-        <a:ln w="12700" cap="flat" cmpd="sng" algn="ctr">
-          <a:solidFill>
-            <a:schemeClr val="phClr"/>
-          </a:solidFill>
-          <a:prstDash val="solid"/>
-          <a:miter lim="800000"/>
-        </a:ln>
-        <a:ln w="19050" cap="flat" cmpd="sng" algn="ctr">
-          <a:solidFill>
-            <a:schemeClr val="phClr"/>
-          </a:solidFill>
-          <a:prstDash val="solid"/>
-          <a:miter lim="800000"/>
-        </a:ln>
-      </a:lnStyleLst>
-      <a:effectStyleLst>
-        <a:effectStyle>
-          <a:effectLst/>
-        </a:effectStyle>
-        <a:effectStyle>
-          <a:effectLst/>
-        </a:effectStyle>
-        <a:effectStyle>
-          <a:effectLst>
-            <a:outerShdw blurRad="57150" dist="19050" dir="5400000" algn="ctr" rotWithShape="0">
-              <a:srgbClr val="000000">
-                <a:alpha val="63000"/>
-              </a:srgbClr>
-            </a:outerShdw>
-          </a:effectLst>
-        </a:effectStyle>
-      </a:effectStyleLst>
-      <a:bgFillStyleLst>
-        <a:solidFill>
-          <a:schemeClr val="phClr"/>
-        </a:solidFill>
-        <a:solidFill>
-          <a:schemeClr val="phClr">
-            <a:tint val="95000"/>
-            <a:satMod val="170000"/>
-          </a:schemeClr>
-        </a:solidFill>
-        <a:gradFill rotWithShape="1">
-          <a:gsLst>
-            <a:gs pos="0">
-              <a:schemeClr val="phClr">
-                <a:tint val="93000"/>
-                <a:satMod val="150000"/>
-                <a:shade val="98000"/>
-                <a:lumMod val="102000"/>
-              </a:schemeClr>
-            </a:gs>
-            <a:gs pos="50000">
-              <a:schemeClr val="phClr">
-                <a:tint val="98000"/>
-                <a:satMod val="130000"/>
-                <a:shade val="90000"/>
-                <a:lumMod val="103000"/>
-              </a:schemeClr>
-            </a:gs>
-            <a:gs pos="100000">
-              <a:schemeClr val="phClr">
-                <a:shade val="63000"/>
-                <a:satMod val="120000"/>
-              </a:schemeClr>
-            </a:gs>
-          </a:gsLst>
-          <a:lin ang="5400000" scaled="0"/>
-        </a:gradFill>
-      </a:bgFillStyleLst>
-    </a:fmtScheme>
-  </a:themeElements>
-  <a:objectDefaults/>
-  <a:extraClrSchemeLst/>
-  <a:extLst>
-    <a:ext uri="{05A4C25C-085E-4340-85A3-A5531E510DB2}">
-      <thm15:themeFamily xmlns:thm15="http://schemas.microsoft.com/office/thememl/2012/main" name="Office Theme" id="{62F939B6-93AF-4DB8-9C6B-D6C7DFDC589F}" vid="{4A3C46E8-61CC-4603-A589-7422A47A8E4A}"/>
-    </a:ext>
-  </a:extLst>
-</a:theme>
 </file>